--- a/output/wordlabs-miss-3day.pptx
+++ b/output/wordlabs-miss-3day.pptx
@@ -4240,7 +4240,7 @@
                 <a:ea typeface="Calibri" pitchFamily="34" charset="-122"/>
                 <a:cs typeface="Calibri" pitchFamily="34" charset="-120"/>
               </a:rPr>
-              <a:t>"send, let go, release"</a:t>
+              <a:t>"send"</a:t>
             </a:r>
             <a:endParaRPr lang="en-US" sz="2200" dirty="0"/>
           </a:p>
@@ -4279,7 +4279,7 @@
                 <a:ea typeface="Calibri" pitchFamily="34" charset="-122"/>
                 <a:cs typeface="Calibri" pitchFamily="34" charset="-120"/>
               </a:rPr>
-              <a:t>Origin: Latin: mittere</a:t>
+              <a:t>Origin: Latin root</a:t>
             </a:r>
             <a:endParaRPr lang="en-US" sz="1300" dirty="0"/>
           </a:p>
@@ -5288,7 +5288,7 @@
                 <a:ea typeface="Calibri" pitchFamily="34" charset="-122"/>
                 <a:cs typeface="Calibri" pitchFamily="34" charset="-120"/>
               </a:rPr>
-              <a:t>Word Labs  •  wordlabs.app  •  Root: 'miss' = send, let go, release</a:t>
+              <a:t>Word Labs  •  wordlabs.app  •  Root: 'miss' = send</a:t>
             </a:r>
             <a:endParaRPr lang="en-US" sz="800" dirty="0"/>
           </a:p>
@@ -5622,7 +5622,7 @@
                 <a:ea typeface="Trebuchet MS" pitchFamily="34" charset="-122"/>
                 <a:cs typeface="Trebuchet MS" pitchFamily="34" charset="-120"/>
               </a:rPr>
-              <a:t>1</a:t>
+              <a:t>0</a:t>
             </a:r>
             <a:pPr algn="ctr" indent="0" marL="0">
               <a:buNone/>
@@ -5928,7 +5928,7 @@
                 <a:ea typeface="Calibri" pitchFamily="34" charset="-122"/>
                 <a:cs typeface="Calibri" pitchFamily="34" charset="-120"/>
               </a:rPr>
-              <a:t>Word Labs  •  wordlabs.app  •  Root: 'miss' = send, let go, release</a:t>
+              <a:t>Word Labs  •  wordlabs.app  •  Root: 'miss' = send</a:t>
             </a:r>
             <a:endParaRPr lang="en-US" sz="800" dirty="0"/>
           </a:p>
@@ -6040,7 +6040,7 @@
                 <a:ea typeface="Calibri" pitchFamily="34" charset="-122"/>
                 <a:cs typeface="Calibri" pitchFamily="34" charset="-120"/>
               </a:rPr>
-              <a:t>You will need written </a:t>
+              <a:t>The radio </a:t>
             </a:r>
             <a:pPr algn="l" indent="0" marL="0">
               <a:buNone/>
@@ -6057,7 +6057,7 @@
                 <a:ea typeface="Calibri" pitchFamily="34" charset="-122"/>
                 <a:cs typeface="Calibri" pitchFamily="34" charset="-120"/>
               </a:rPr>
-              <a:t>permission</a:t>
+              <a:t>transmission</a:t>
             </a:r>
             <a:pPr algn="l" indent="0" marL="0">
               <a:buNone/>
@@ -6071,7 +6071,38 @@
                 <a:ea typeface="Calibri" pitchFamily="34" charset="-122"/>
                 <a:cs typeface="Calibri" pitchFamily="34" charset="-120"/>
               </a:rPr>
-              <a:t> before you can go on the excursion, so please return your form by Friday.</a:t>
+              <a:t> was interrupted by static. The navy is </a:t>
+            </a:r>
+            <a:pPr algn="l" indent="0" marL="0">
+              <a:buNone/>
+            </a:pPr>
+            <a:r>
+              <a:rPr lang="en-US" sz="1800" b="1" dirty="0">
+                <a:solidFill>
+                  <a:srgbClr val="0D9488"/>
+                </a:solidFill>
+                <a:highlight>
+                  <a:srgbClr val="CCFBF1"/>
+                </a:highlight>
+                <a:latin typeface="Calibri" pitchFamily="34" charset="0"/>
+                <a:ea typeface="Calibri" pitchFamily="34" charset="-122"/>
+                <a:cs typeface="Calibri" pitchFamily="34" charset="-120"/>
+              </a:rPr>
+              <a:t>commissioning</a:t>
+            </a:r>
+            <a:pPr algn="l" indent="0" marL="0">
+              <a:buNone/>
+            </a:pPr>
+            <a:r>
+              <a:rPr lang="en-US" sz="1800" dirty="0">
+                <a:solidFill>
+                  <a:srgbClr val="0F172A"/>
+                </a:solidFill>
+                <a:latin typeface="Calibri" pitchFamily="34" charset="0"/>
+                <a:ea typeface="Calibri" pitchFamily="34" charset="-122"/>
+                <a:cs typeface="Calibri" pitchFamily="34" charset="-120"/>
+              </a:rPr>
+              <a:t> a new warship this year.</a:t>
             </a:r>
             <a:endParaRPr lang="en-US" sz="1800" dirty="0"/>
           </a:p>
@@ -6226,7 +6257,7 @@
                 <a:ea typeface="Trebuchet MS" pitchFamily="34" charset="-122"/>
                 <a:cs typeface="Trebuchet MS" pitchFamily="34" charset="-120"/>
               </a:rPr>
-              <a:t>permission</a:t>
+              <a:t>transmission</a:t>
             </a:r>
             <a:endParaRPr lang="en-US" sz="1400" dirty="0"/>
           </a:p>
@@ -6354,7 +6385,7 @@
                 <a:ea typeface="Trebuchet MS" pitchFamily="34" charset="-122"/>
                 <a:cs typeface="Trebuchet MS" pitchFamily="34" charset="-120"/>
               </a:rPr>
-              <a:t>submission</a:t>
+              <a:t>commissioning</a:t>
             </a:r>
             <a:endParaRPr lang="en-US" sz="1400" dirty="0"/>
           </a:p>
@@ -6685,7 +6716,7 @@
                 <a:ea typeface="Calibri" pitchFamily="34" charset="-122"/>
                 <a:cs typeface="Calibri" pitchFamily="34" charset="-120"/>
               </a:rPr>
-              <a:t>Word Labs  •  wordlabs.app  •  Root: 'miss' = send, let go, release</a:t>
+              <a:t>Word Labs  •  wordlabs.app  •  Root: 'miss' = send</a:t>
             </a:r>
             <a:endParaRPr lang="en-US" sz="800" dirty="0"/>
           </a:p>
@@ -6824,7 +6855,7 @@
                 <a:ea typeface="Trebuchet MS" pitchFamily="34" charset="-122"/>
                 <a:cs typeface="Trebuchet MS" pitchFamily="34" charset="-120"/>
               </a:rPr>
-              <a:t>permission</a:t>
+              <a:t>transmission</a:t>
             </a:r>
             <a:endParaRPr lang="en-US" sz="2800" dirty="0"/>
           </a:p>
@@ -7512,7 +7543,7 @@
                 <a:ea typeface="Calibri" pitchFamily="34" charset="-122"/>
                 <a:cs typeface="Calibri" pitchFamily="34" charset="-120"/>
               </a:rPr>
-              <a:t>Word Labs  •  wordlabs.app  •  Root: 'miss' = send, let go, release</a:t>
+              <a:t>Word Labs  •  wordlabs.app  •  Root: 'miss' = send</a:t>
             </a:r>
             <a:endParaRPr lang="en-US" sz="800" dirty="0"/>
           </a:p>
@@ -7651,7 +7682,7 @@
                 <a:ea typeface="Trebuchet MS" pitchFamily="34" charset="-122"/>
                 <a:cs typeface="Trebuchet MS" pitchFamily="34" charset="-120"/>
               </a:rPr>
-              <a:t>permission</a:t>
+              <a:t>transmission</a:t>
             </a:r>
             <a:endParaRPr lang="en-US" sz="2800" dirty="0"/>
           </a:p>
@@ -7790,7 +7821,7 @@
                 <a:ea typeface="Trebuchet MS" pitchFamily="34" charset="-122"/>
                 <a:cs typeface="Trebuchet MS" pitchFamily="34" charset="-120"/>
               </a:rPr>
-              <a:t>per</a:t>
+              <a:t>trans</a:t>
             </a:r>
             <a:endParaRPr lang="en-US" sz="1300" dirty="0"/>
           </a:p>
@@ -7829,7 +7860,7 @@
                 <a:ea typeface="Calibri" pitchFamily="34" charset="-122"/>
                 <a:cs typeface="Calibri" pitchFamily="34" charset="-120"/>
               </a:rPr>
-              <a:t>through, thoroughly</a:t>
+              <a:t>across</a:t>
             </a:r>
             <a:endParaRPr lang="en-US" sz="850" dirty="0"/>
           </a:p>
@@ -7941,7 +7972,7 @@
                 <a:ea typeface="Calibri" pitchFamily="34" charset="-122"/>
                 <a:cs typeface="Calibri" pitchFamily="34" charset="-120"/>
               </a:rPr>
-              <a:t>send, let go</a:t>
+              <a:t>send</a:t>
             </a:r>
             <a:endParaRPr lang="en-US" sz="850" dirty="0"/>
           </a:p>
@@ -8053,7 +8084,7 @@
                 <a:ea typeface="Calibri" pitchFamily="34" charset="-122"/>
                 <a:cs typeface="Calibri" pitchFamily="34" charset="-120"/>
               </a:rPr>
-              <a:t>act or state of</a:t>
+              <a:t>act or result of</a:t>
             </a:r>
             <a:endParaRPr lang="en-US" sz="850" dirty="0"/>
           </a:p>
@@ -8609,7 +8640,7 @@
                 <a:ea typeface="Calibri" pitchFamily="34" charset="-122"/>
                 <a:cs typeface="Calibri" pitchFamily="34" charset="-120"/>
               </a:rPr>
-              <a:t>Word Labs  •  wordlabs.app  •  Root: 'miss' = send, let go, release</a:t>
+              <a:t>Word Labs  •  wordlabs.app  •  Root: 'miss' = send</a:t>
             </a:r>
             <a:endParaRPr lang="en-US" sz="800" dirty="0"/>
           </a:p>
@@ -8748,7 +8779,7 @@
                 <a:ea typeface="Trebuchet MS" pitchFamily="34" charset="-122"/>
                 <a:cs typeface="Trebuchet MS" pitchFamily="34" charset="-120"/>
               </a:rPr>
-              <a:t>permission</a:t>
+              <a:t>transmission</a:t>
             </a:r>
             <a:endParaRPr lang="en-US" sz="2800" dirty="0"/>
           </a:p>
@@ -8887,7 +8918,7 @@
                 <a:ea typeface="Trebuchet MS" pitchFamily="34" charset="-122"/>
                 <a:cs typeface="Trebuchet MS" pitchFamily="34" charset="-120"/>
               </a:rPr>
-              <a:t>per</a:t>
+              <a:t>trans</a:t>
             </a:r>
             <a:endParaRPr lang="en-US" sz="1300" dirty="0"/>
           </a:p>
@@ -8926,7 +8957,7 @@
                 <a:ea typeface="Calibri" pitchFamily="34" charset="-122"/>
                 <a:cs typeface="Calibri" pitchFamily="34" charset="-120"/>
               </a:rPr>
-              <a:t>through, thoroughly</a:t>
+              <a:t>across</a:t>
             </a:r>
             <a:endParaRPr lang="en-US" sz="850" dirty="0"/>
           </a:p>
@@ -9038,7 +9069,7 @@
                 <a:ea typeface="Calibri" pitchFamily="34" charset="-122"/>
                 <a:cs typeface="Calibri" pitchFamily="34" charset="-120"/>
               </a:rPr>
-              <a:t>send, let go</a:t>
+              <a:t>send</a:t>
             </a:r>
             <a:endParaRPr lang="en-US" sz="850" dirty="0"/>
           </a:p>
@@ -9150,7 +9181,7 @@
                 <a:ea typeface="Calibri" pitchFamily="34" charset="-122"/>
                 <a:cs typeface="Calibri" pitchFamily="34" charset="-120"/>
               </a:rPr>
-              <a:t>act or state of</a:t>
+              <a:t>act or result of</a:t>
             </a:r>
             <a:endParaRPr lang="en-US" sz="850" dirty="0"/>
           </a:p>
@@ -9309,7 +9340,7 @@
                 <a:ea typeface="Trebuchet MS" pitchFamily="34" charset="-122"/>
                 <a:cs typeface="Trebuchet MS" pitchFamily="34" charset="-120"/>
               </a:rPr>
-              <a:t>per</a:t>
+              <a:t>trans</a:t>
             </a:r>
             <a:endParaRPr lang="en-US" sz="1400" dirty="0"/>
           </a:p>
@@ -9943,7 +9974,7 @@
                 <a:ea typeface="Calibri" pitchFamily="34" charset="-122"/>
                 <a:cs typeface="Calibri" pitchFamily="34" charset="-120"/>
               </a:rPr>
-              <a:t>Word Labs  •  wordlabs.app  •  Root: 'miss' = send, let go, release</a:t>
+              <a:t>Word Labs  •  wordlabs.app  •  Root: 'miss' = send</a:t>
             </a:r>
             <a:endParaRPr lang="en-US" sz="800" dirty="0"/>
           </a:p>
@@ -10082,7 +10113,7 @@
                 <a:ea typeface="Trebuchet MS" pitchFamily="34" charset="-122"/>
                 <a:cs typeface="Trebuchet MS" pitchFamily="34" charset="-120"/>
               </a:rPr>
-              <a:t>permission</a:t>
+              <a:t>transmission</a:t>
             </a:r>
             <a:endParaRPr lang="en-US" sz="2800" dirty="0"/>
           </a:p>
@@ -10221,7 +10252,7 @@
                 <a:ea typeface="Trebuchet MS" pitchFamily="34" charset="-122"/>
                 <a:cs typeface="Trebuchet MS" pitchFamily="34" charset="-120"/>
               </a:rPr>
-              <a:t>per</a:t>
+              <a:t>trans</a:t>
             </a:r>
             <a:endParaRPr lang="en-US" sz="1300" dirty="0"/>
           </a:p>
@@ -10260,7 +10291,7 @@
                 <a:ea typeface="Calibri" pitchFamily="34" charset="-122"/>
                 <a:cs typeface="Calibri" pitchFamily="34" charset="-120"/>
               </a:rPr>
-              <a:t>through, thoroughly</a:t>
+              <a:t>across</a:t>
             </a:r>
             <a:endParaRPr lang="en-US" sz="850" dirty="0"/>
           </a:p>
@@ -10372,7 +10403,7 @@
                 <a:ea typeface="Calibri" pitchFamily="34" charset="-122"/>
                 <a:cs typeface="Calibri" pitchFamily="34" charset="-120"/>
               </a:rPr>
-              <a:t>send, let go</a:t>
+              <a:t>send</a:t>
             </a:r>
             <a:endParaRPr lang="en-US" sz="850" dirty="0"/>
           </a:p>
@@ -10484,7 +10515,7 @@
                 <a:ea typeface="Calibri" pitchFamily="34" charset="-122"/>
                 <a:cs typeface="Calibri" pitchFamily="34" charset="-120"/>
               </a:rPr>
-              <a:t>act or state of</a:t>
+              <a:t>act or result of</a:t>
             </a:r>
             <a:endParaRPr lang="en-US" sz="850" dirty="0"/>
           </a:p>
@@ -10643,7 +10674,7 @@
                 <a:ea typeface="Trebuchet MS" pitchFamily="34" charset="-122"/>
                 <a:cs typeface="Trebuchet MS" pitchFamily="34" charset="-120"/>
               </a:rPr>
-              <a:t>per</a:t>
+              <a:t>trans</a:t>
             </a:r>
             <a:endParaRPr lang="en-US" sz="1400" dirty="0"/>
           </a:p>
@@ -10934,11 +10965,11 @@
         <p:spPr>
           <a:xfrm>
             <a:off x="1874520" y="4096512"/>
-            <a:ext cx="6903720" cy="804672"/>
+            <a:ext cx="6903720" cy="658368"/>
           </a:xfrm>
           <a:prstGeom prst="rect">
             <a:avLst>
-              <a:gd name="adj" fmla="val 6818"/>
+              <a:gd name="adj" fmla="val 8333"/>
             </a:avLst>
           </a:prstGeom>
           <a:solidFill>
@@ -10960,12 +10991,12 @@
         </p:nvSpPr>
         <p:spPr>
           <a:xfrm>
-            <a:off x="2254649" y="4169664"/>
-            <a:ext cx="685800" cy="384048"/>
+            <a:off x="1951828" y="4169664"/>
+            <a:ext cx="603504" cy="475488"/>
           </a:xfrm>
           <a:prstGeom prst="rect">
             <a:avLst>
-              <a:gd name="adj" fmla="val 9524"/>
+              <a:gd name="adj" fmla="val 7692"/>
             </a:avLst>
           </a:prstGeom>
           <a:solidFill>
@@ -10987,8 +11018,8 @@
         </p:nvSpPr>
         <p:spPr>
           <a:xfrm>
-            <a:off x="2254649" y="4169664"/>
-            <a:ext cx="685800" cy="384048"/>
+            <a:off x="1951828" y="4169664"/>
+            <a:ext cx="603504" cy="475488"/>
           </a:xfrm>
           <a:prstGeom prst="rect">
             <a:avLst/>
@@ -11012,7 +11043,7 @@
                 <a:ea typeface="Trebuchet MS" pitchFamily="34" charset="-122"/>
                 <a:cs typeface="Trebuchet MS" pitchFamily="34" charset="-120"/>
               </a:rPr>
-              <a:t>p</a:t>
+              <a:t>t</a:t>
             </a:r>
             <a:endParaRPr lang="en-US" sz="900" dirty="0"/>
           </a:p>
@@ -11026,12 +11057,12 @@
         </p:nvSpPr>
         <p:spPr>
           <a:xfrm>
-            <a:off x="3293146" y="4169664"/>
-            <a:ext cx="685800" cy="384048"/>
+            <a:off x="2605209" y="4169664"/>
+            <a:ext cx="603504" cy="475488"/>
           </a:xfrm>
           <a:prstGeom prst="rect">
             <a:avLst>
-              <a:gd name="adj" fmla="val 9524"/>
+              <a:gd name="adj" fmla="val 7692"/>
             </a:avLst>
           </a:prstGeom>
           <a:solidFill>
@@ -11053,8 +11084,8 @@
         </p:nvSpPr>
         <p:spPr>
           <a:xfrm>
-            <a:off x="3293146" y="4169664"/>
-            <a:ext cx="685800" cy="384048"/>
+            <a:off x="2605209" y="4169664"/>
+            <a:ext cx="603504" cy="475488"/>
           </a:xfrm>
           <a:prstGeom prst="rect">
             <a:avLst/>
@@ -11078,7 +11109,7 @@
                 <a:ea typeface="Trebuchet MS" pitchFamily="34" charset="-122"/>
                 <a:cs typeface="Trebuchet MS" pitchFamily="34" charset="-120"/>
               </a:rPr>
-              <a:t>er</a:t>
+              <a:t>r</a:t>
             </a:r>
             <a:endParaRPr lang="en-US" sz="900" dirty="0"/>
           </a:p>
@@ -11092,12 +11123,12 @@
         </p:nvSpPr>
         <p:spPr>
           <a:xfrm>
-            <a:off x="4331643" y="4169664"/>
-            <a:ext cx="685800" cy="384048"/>
+            <a:off x="3258589" y="4169664"/>
+            <a:ext cx="603504" cy="475488"/>
           </a:xfrm>
           <a:prstGeom prst="rect">
             <a:avLst>
-              <a:gd name="adj" fmla="val 9524"/>
+              <a:gd name="adj" fmla="val 7692"/>
             </a:avLst>
           </a:prstGeom>
           <a:solidFill>
@@ -11119,8 +11150,8 @@
         </p:nvSpPr>
         <p:spPr>
           <a:xfrm>
-            <a:off x="4331643" y="4169664"/>
-            <a:ext cx="685800" cy="384048"/>
+            <a:off x="3258589" y="4169664"/>
+            <a:ext cx="603504" cy="475488"/>
           </a:xfrm>
           <a:prstGeom prst="rect">
             <a:avLst/>
@@ -11144,7 +11175,7 @@
                 <a:ea typeface="Trebuchet MS" pitchFamily="34" charset="-122"/>
                 <a:cs typeface="Trebuchet MS" pitchFamily="34" charset="-120"/>
               </a:rPr>
-              <a:t>m</a:t>
+              <a:t>a</a:t>
             </a:r>
             <a:endParaRPr lang="en-US" sz="900" dirty="0"/>
           </a:p>
@@ -11158,12 +11189,12 @@
         </p:nvSpPr>
         <p:spPr>
           <a:xfrm>
-            <a:off x="5370141" y="4169664"/>
-            <a:ext cx="685800" cy="384048"/>
+            <a:off x="3911969" y="4169664"/>
+            <a:ext cx="603504" cy="475488"/>
           </a:xfrm>
           <a:prstGeom prst="rect">
             <a:avLst>
-              <a:gd name="adj" fmla="val 9524"/>
+              <a:gd name="adj" fmla="val 7692"/>
             </a:avLst>
           </a:prstGeom>
           <a:solidFill>
@@ -11185,8 +11216,8 @@
         </p:nvSpPr>
         <p:spPr>
           <a:xfrm>
-            <a:off x="5370141" y="4169664"/>
-            <a:ext cx="685800" cy="384048"/>
+            <a:off x="3911969" y="4169664"/>
+            <a:ext cx="603504" cy="475488"/>
           </a:xfrm>
           <a:prstGeom prst="rect">
             <a:avLst/>
@@ -11210,7 +11241,7 @@
                 <a:ea typeface="Trebuchet MS" pitchFamily="34" charset="-122"/>
                 <a:cs typeface="Trebuchet MS" pitchFamily="34" charset="-120"/>
               </a:rPr>
-              <a:t>i</a:t>
+              <a:t>n</a:t>
             </a:r>
             <a:endParaRPr lang="en-US" sz="900" dirty="0"/>
           </a:p>
@@ -11224,12 +11255,12 @@
         </p:nvSpPr>
         <p:spPr>
           <a:xfrm>
-            <a:off x="6408638" y="4169664"/>
-            <a:ext cx="685800" cy="384048"/>
+            <a:off x="4565350" y="4169664"/>
+            <a:ext cx="603504" cy="475488"/>
           </a:xfrm>
           <a:prstGeom prst="rect">
             <a:avLst>
-              <a:gd name="adj" fmla="val 9524"/>
+              <a:gd name="adj" fmla="val 7692"/>
             </a:avLst>
           </a:prstGeom>
           <a:solidFill>
@@ -11251,8 +11282,8 @@
         </p:nvSpPr>
         <p:spPr>
           <a:xfrm>
-            <a:off x="6408638" y="4169664"/>
-            <a:ext cx="685800" cy="384048"/>
+            <a:off x="4565350" y="4169664"/>
+            <a:ext cx="603504" cy="475488"/>
           </a:xfrm>
           <a:prstGeom prst="rect">
             <a:avLst/>
@@ -11276,7 +11307,7 @@
                 <a:ea typeface="Trebuchet MS" pitchFamily="34" charset="-122"/>
                 <a:cs typeface="Trebuchet MS" pitchFamily="34" charset="-120"/>
               </a:rPr>
-              <a:t>ss</a:t>
+              <a:t>s</a:t>
             </a:r>
             <a:endParaRPr lang="en-US" sz="900" dirty="0"/>
           </a:p>
@@ -11290,12 +11321,12 @@
         </p:nvSpPr>
         <p:spPr>
           <a:xfrm>
-            <a:off x="7447135" y="4169664"/>
-            <a:ext cx="685800" cy="384048"/>
+            <a:off x="5218730" y="4169664"/>
+            <a:ext cx="603504" cy="475488"/>
           </a:xfrm>
           <a:prstGeom prst="rect">
             <a:avLst>
-              <a:gd name="adj" fmla="val 9524"/>
+              <a:gd name="adj" fmla="val 7692"/>
             </a:avLst>
           </a:prstGeom>
           <a:solidFill>
@@ -11317,8 +11348,8 @@
         </p:nvSpPr>
         <p:spPr>
           <a:xfrm>
-            <a:off x="7447135" y="4169664"/>
-            <a:ext cx="685800" cy="384048"/>
+            <a:off x="5218730" y="4169664"/>
+            <a:ext cx="603504" cy="475488"/>
           </a:xfrm>
           <a:prstGeom prst="rect">
             <a:avLst/>
@@ -11342,7 +11373,7 @@
                 <a:ea typeface="Trebuchet MS" pitchFamily="34" charset="-122"/>
                 <a:cs typeface="Trebuchet MS" pitchFamily="34" charset="-120"/>
               </a:rPr>
-              <a:t>ion</a:t>
+              <a:t>m</a:t>
             </a:r>
             <a:endParaRPr lang="en-US" sz="900" dirty="0"/>
           </a:p>
@@ -11350,40 +11381,265 @@
       </p:sp>
       <p:sp>
         <p:nvSpPr>
-          <p:cNvPr id="51" name="Text 49"/>
-          <p:cNvSpPr/>
-          <p:nvPr/>
-        </p:nvSpPr>
-        <p:spPr>
-          <a:xfrm>
-            <a:off x="7447135" y="4572000"/>
-            <a:ext cx="685800" cy="219456"/>
-          </a:xfrm>
-          <a:prstGeom prst="rect">
-            <a:avLst/>
-          </a:prstGeom>
-          <a:noFill/>
-          <a:ln/>
-        </p:spPr>
-        <p:txBody>
-          <a:bodyPr wrap="square" lIns="0" tIns="0" rIns="0" bIns="0" rtlCol="0" anchor="t"/>
-          <a:lstStyle/>
-          <a:p>
-            <a:pPr algn="ctr" indent="0" marL="0">
-              <a:buNone/>
-            </a:pPr>
-            <a:r>
-              <a:rPr lang="en-US" sz="750" i="1" dirty="0">
-                <a:solidFill>
-                  <a:srgbClr val="94A3B8"/>
-                </a:solidFill>
-                <a:latin typeface="Calibri" pitchFamily="34" charset="0"/>
-                <a:ea typeface="Calibri" pitchFamily="34" charset="-122"/>
-                <a:cs typeface="Calibri" pitchFamily="34" charset="-120"/>
-              </a:rPr>
-              <a:t>/shun/</a:t>
-            </a:r>
-            <a:endParaRPr lang="en-US" sz="750" dirty="0"/>
+          <p:cNvPr id="51" name="Shape 49"/>
+          <p:cNvSpPr/>
+          <p:nvPr/>
+        </p:nvSpPr>
+        <p:spPr>
+          <a:xfrm>
+            <a:off x="5872111" y="4169664"/>
+            <a:ext cx="603504" cy="475488"/>
+          </a:xfrm>
+          <a:prstGeom prst="rect">
+            <a:avLst>
+              <a:gd name="adj" fmla="val 7692"/>
+            </a:avLst>
+          </a:prstGeom>
+          <a:solidFill>
+            <a:srgbClr val="FFFFFF"/>
+          </a:solidFill>
+          <a:ln w="12700">
+            <a:solidFill>
+              <a:srgbClr val="DB2777"/>
+            </a:solidFill>
+            <a:prstDash val="solid"/>
+          </a:ln>
+        </p:spPr>
+      </p:sp>
+      <p:sp>
+        <p:nvSpPr>
+          <p:cNvPr id="52" name="Text 50"/>
+          <p:cNvSpPr/>
+          <p:nvPr/>
+        </p:nvSpPr>
+        <p:spPr>
+          <a:xfrm>
+            <a:off x="5872111" y="4169664"/>
+            <a:ext cx="603504" cy="475488"/>
+          </a:xfrm>
+          <a:prstGeom prst="rect">
+            <a:avLst/>
+          </a:prstGeom>
+          <a:noFill/>
+          <a:ln/>
+        </p:spPr>
+        <p:txBody>
+          <a:bodyPr wrap="square" lIns="0" tIns="0" rIns="0" bIns="0" rtlCol="0" anchor="ctr"/>
+          <a:lstStyle/>
+          <a:p>
+            <a:pPr algn="ctr" indent="0" marL="0">
+              <a:buNone/>
+            </a:pPr>
+            <a:r>
+              <a:rPr lang="en-US" sz="900" b="1" dirty="0">
+                <a:solidFill>
+                  <a:srgbClr val="9D174D"/>
+                </a:solidFill>
+                <a:latin typeface="Trebuchet MS" pitchFamily="34" charset="0"/>
+                <a:ea typeface="Trebuchet MS" pitchFamily="34" charset="-122"/>
+                <a:cs typeface="Trebuchet MS" pitchFamily="34" charset="-120"/>
+              </a:rPr>
+              <a:t>i</a:t>
+            </a:r>
+            <a:endParaRPr lang="en-US" sz="900" dirty="0"/>
+          </a:p>
+        </p:txBody>
+      </p:sp>
+      <p:sp>
+        <p:nvSpPr>
+          <p:cNvPr id="53" name="Shape 51"/>
+          <p:cNvSpPr/>
+          <p:nvPr/>
+        </p:nvSpPr>
+        <p:spPr>
+          <a:xfrm>
+            <a:off x="6525491" y="4169664"/>
+            <a:ext cx="603504" cy="475488"/>
+          </a:xfrm>
+          <a:prstGeom prst="rect">
+            <a:avLst>
+              <a:gd name="adj" fmla="val 7692"/>
+            </a:avLst>
+          </a:prstGeom>
+          <a:solidFill>
+            <a:srgbClr val="FFFFFF"/>
+          </a:solidFill>
+          <a:ln w="12700">
+            <a:solidFill>
+              <a:srgbClr val="DB2777"/>
+            </a:solidFill>
+            <a:prstDash val="solid"/>
+          </a:ln>
+        </p:spPr>
+      </p:sp>
+      <p:sp>
+        <p:nvSpPr>
+          <p:cNvPr id="54" name="Text 52"/>
+          <p:cNvSpPr/>
+          <p:nvPr/>
+        </p:nvSpPr>
+        <p:spPr>
+          <a:xfrm>
+            <a:off x="6525491" y="4169664"/>
+            <a:ext cx="603504" cy="475488"/>
+          </a:xfrm>
+          <a:prstGeom prst="rect">
+            <a:avLst/>
+          </a:prstGeom>
+          <a:noFill/>
+          <a:ln/>
+        </p:spPr>
+        <p:txBody>
+          <a:bodyPr wrap="square" lIns="0" tIns="0" rIns="0" bIns="0" rtlCol="0" anchor="ctr"/>
+          <a:lstStyle/>
+          <a:p>
+            <a:pPr algn="ctr" indent="0" marL="0">
+              <a:buNone/>
+            </a:pPr>
+            <a:r>
+              <a:rPr lang="en-US" sz="900" b="1" dirty="0">
+                <a:solidFill>
+                  <a:srgbClr val="9D174D"/>
+                </a:solidFill>
+                <a:latin typeface="Trebuchet MS" pitchFamily="34" charset="0"/>
+                <a:ea typeface="Trebuchet MS" pitchFamily="34" charset="-122"/>
+                <a:cs typeface="Trebuchet MS" pitchFamily="34" charset="-120"/>
+              </a:rPr>
+              <a:t>ssi</a:t>
+            </a:r>
+            <a:endParaRPr lang="en-US" sz="900" dirty="0"/>
+          </a:p>
+        </p:txBody>
+      </p:sp>
+      <p:sp>
+        <p:nvSpPr>
+          <p:cNvPr id="55" name="Shape 53"/>
+          <p:cNvSpPr/>
+          <p:nvPr/>
+        </p:nvSpPr>
+        <p:spPr>
+          <a:xfrm>
+            <a:off x="7178871" y="4169664"/>
+            <a:ext cx="603504" cy="475488"/>
+          </a:xfrm>
+          <a:prstGeom prst="rect">
+            <a:avLst>
+              <a:gd name="adj" fmla="val 7692"/>
+            </a:avLst>
+          </a:prstGeom>
+          <a:solidFill>
+            <a:srgbClr val="FFFFFF"/>
+          </a:solidFill>
+          <a:ln w="12700">
+            <a:solidFill>
+              <a:srgbClr val="DB2777"/>
+            </a:solidFill>
+            <a:prstDash val="solid"/>
+          </a:ln>
+        </p:spPr>
+      </p:sp>
+      <p:sp>
+        <p:nvSpPr>
+          <p:cNvPr id="56" name="Text 54"/>
+          <p:cNvSpPr/>
+          <p:nvPr/>
+        </p:nvSpPr>
+        <p:spPr>
+          <a:xfrm>
+            <a:off x="7178871" y="4169664"/>
+            <a:ext cx="603504" cy="475488"/>
+          </a:xfrm>
+          <a:prstGeom prst="rect">
+            <a:avLst/>
+          </a:prstGeom>
+          <a:noFill/>
+          <a:ln/>
+        </p:spPr>
+        <p:txBody>
+          <a:bodyPr wrap="square" lIns="0" tIns="0" rIns="0" bIns="0" rtlCol="0" anchor="ctr"/>
+          <a:lstStyle/>
+          <a:p>
+            <a:pPr algn="ctr" indent="0" marL="0">
+              <a:buNone/>
+            </a:pPr>
+            <a:r>
+              <a:rPr lang="en-US" sz="900" b="1" dirty="0">
+                <a:solidFill>
+                  <a:srgbClr val="9D174D"/>
+                </a:solidFill>
+                <a:latin typeface="Trebuchet MS" pitchFamily="34" charset="0"/>
+                <a:ea typeface="Trebuchet MS" pitchFamily="34" charset="-122"/>
+                <a:cs typeface="Trebuchet MS" pitchFamily="34" charset="-120"/>
+              </a:rPr>
+              <a:t>o</a:t>
+            </a:r>
+            <a:endParaRPr lang="en-US" sz="900" dirty="0"/>
+          </a:p>
+        </p:txBody>
+      </p:sp>
+      <p:sp>
+        <p:nvSpPr>
+          <p:cNvPr id="57" name="Shape 55"/>
+          <p:cNvSpPr/>
+          <p:nvPr/>
+        </p:nvSpPr>
+        <p:spPr>
+          <a:xfrm>
+            <a:off x="7832252" y="4169664"/>
+            <a:ext cx="603504" cy="475488"/>
+          </a:xfrm>
+          <a:prstGeom prst="rect">
+            <a:avLst>
+              <a:gd name="adj" fmla="val 7692"/>
+            </a:avLst>
+          </a:prstGeom>
+          <a:solidFill>
+            <a:srgbClr val="FFFFFF"/>
+          </a:solidFill>
+          <a:ln w="12700">
+            <a:solidFill>
+              <a:srgbClr val="DB2777"/>
+            </a:solidFill>
+            <a:prstDash val="solid"/>
+          </a:ln>
+        </p:spPr>
+      </p:sp>
+      <p:sp>
+        <p:nvSpPr>
+          <p:cNvPr id="58" name="Text 56"/>
+          <p:cNvSpPr/>
+          <p:nvPr/>
+        </p:nvSpPr>
+        <p:spPr>
+          <a:xfrm>
+            <a:off x="7832252" y="4169664"/>
+            <a:ext cx="603504" cy="475488"/>
+          </a:xfrm>
+          <a:prstGeom prst="rect">
+            <a:avLst/>
+          </a:prstGeom>
+          <a:noFill/>
+          <a:ln/>
+        </p:spPr>
+        <p:txBody>
+          <a:bodyPr wrap="square" lIns="0" tIns="0" rIns="0" bIns="0" rtlCol="0" anchor="ctr"/>
+          <a:lstStyle/>
+          <a:p>
+            <a:pPr algn="ctr" indent="0" marL="0">
+              <a:buNone/>
+            </a:pPr>
+            <a:r>
+              <a:rPr lang="en-US" sz="900" b="1" dirty="0">
+                <a:solidFill>
+                  <a:srgbClr val="9D174D"/>
+                </a:solidFill>
+                <a:latin typeface="Trebuchet MS" pitchFamily="34" charset="0"/>
+                <a:ea typeface="Trebuchet MS" pitchFamily="34" charset="-122"/>
+                <a:cs typeface="Trebuchet MS" pitchFamily="34" charset="-120"/>
+              </a:rPr>
+              <a:t>n</a:t>
+            </a:r>
+            <a:endParaRPr lang="en-US" sz="900" dirty="0"/>
           </a:p>
         </p:txBody>
       </p:sp>
@@ -11673,7 +11929,7 @@
                 <a:ea typeface="Calibri" pitchFamily="34" charset="-122"/>
                 <a:cs typeface="Calibri" pitchFamily="34" charset="-120"/>
               </a:rPr>
-              <a:t>Word Labs  •  wordlabs.app  •  Root: 'miss' = send, let go, release</a:t>
+              <a:t>Word Labs  •  wordlabs.app  •  Root: 'miss' = send</a:t>
             </a:r>
             <a:endParaRPr lang="en-US" sz="800" dirty="0"/>
           </a:p>
@@ -11812,7 +12068,7 @@
                 <a:ea typeface="Trebuchet MS" pitchFamily="34" charset="-122"/>
                 <a:cs typeface="Trebuchet MS" pitchFamily="34" charset="-120"/>
               </a:rPr>
-              <a:t>submission</a:t>
+              <a:t>commissioning</a:t>
             </a:r>
             <a:endParaRPr lang="en-US" sz="2800" dirty="0"/>
           </a:p>
@@ -12500,7 +12756,7 @@
                 <a:ea typeface="Calibri" pitchFamily="34" charset="-122"/>
                 <a:cs typeface="Calibri" pitchFamily="34" charset="-120"/>
               </a:rPr>
-              <a:t>Word Labs  •  wordlabs.app  •  Root: 'miss' = send, let go, release</a:t>
+              <a:t>Word Labs  •  wordlabs.app  •  Root: 'miss' = send</a:t>
             </a:r>
             <a:endParaRPr lang="en-US" sz="800" dirty="0"/>
           </a:p>
@@ -12639,7 +12895,7 @@
                 <a:ea typeface="Trebuchet MS" pitchFamily="34" charset="-122"/>
                 <a:cs typeface="Trebuchet MS" pitchFamily="34" charset="-120"/>
               </a:rPr>
-              <a:t>submission</a:t>
+              <a:t>commissioning</a:t>
             </a:r>
             <a:endParaRPr lang="en-US" sz="2800" dirty="0"/>
           </a:p>
@@ -12719,8 +12975,8 @@
         </p:nvSpPr>
         <p:spPr>
           <a:xfrm>
-            <a:off x="2221992" y="2258568"/>
-            <a:ext cx="1828800" cy="292608"/>
+            <a:off x="1989734" y="2258568"/>
+            <a:ext cx="1581912" cy="292608"/>
           </a:xfrm>
           <a:prstGeom prst="rect">
             <a:avLst>
@@ -12753,8 +13009,8 @@
         </p:nvSpPr>
         <p:spPr>
           <a:xfrm>
-            <a:off x="2221992" y="2258568"/>
-            <a:ext cx="1828800" cy="292608"/>
+            <a:off x="1989734" y="2258568"/>
+            <a:ext cx="1581912" cy="292608"/>
           </a:xfrm>
           <a:prstGeom prst="rect">
             <a:avLst/>
@@ -12778,7 +13034,7 @@
                 <a:ea typeface="Trebuchet MS" pitchFamily="34" charset="-122"/>
                 <a:cs typeface="Trebuchet MS" pitchFamily="34" charset="-120"/>
               </a:rPr>
-              <a:t>sub</a:t>
+              <a:t>con</a:t>
             </a:r>
             <a:endParaRPr lang="en-US" sz="1300" dirty="0"/>
           </a:p>
@@ -12792,8 +13048,8 @@
         </p:nvSpPr>
         <p:spPr>
           <a:xfrm>
-            <a:off x="2221992" y="2569464"/>
-            <a:ext cx="1828800" cy="201168"/>
+            <a:off x="1989734" y="2569464"/>
+            <a:ext cx="1581912" cy="201168"/>
           </a:xfrm>
           <a:prstGeom prst="rect">
             <a:avLst/>
@@ -12817,7 +13073,7 @@
                 <a:ea typeface="Calibri" pitchFamily="34" charset="-122"/>
                 <a:cs typeface="Calibri" pitchFamily="34" charset="-120"/>
               </a:rPr>
-              <a:t>under, below</a:t>
+              <a:t>with or together</a:t>
             </a:r>
             <a:endParaRPr lang="en-US" sz="850" dirty="0"/>
           </a:p>
@@ -12831,8 +13087,8 @@
         </p:nvSpPr>
         <p:spPr>
           <a:xfrm>
-            <a:off x="4370832" y="2258568"/>
-            <a:ext cx="1828800" cy="292608"/>
+            <a:off x="3659429" y="2258568"/>
+            <a:ext cx="1581912" cy="292608"/>
           </a:xfrm>
           <a:prstGeom prst="rect">
             <a:avLst>
@@ -12865,8 +13121,8 @@
         </p:nvSpPr>
         <p:spPr>
           <a:xfrm>
-            <a:off x="4370832" y="2258568"/>
-            <a:ext cx="1828800" cy="292608"/>
+            <a:off x="3659429" y="2258568"/>
+            <a:ext cx="1581912" cy="292608"/>
           </a:xfrm>
           <a:prstGeom prst="rect">
             <a:avLst/>
@@ -12904,8 +13160,8 @@
         </p:nvSpPr>
         <p:spPr>
           <a:xfrm>
-            <a:off x="4370832" y="2569464"/>
-            <a:ext cx="1828800" cy="201168"/>
+            <a:off x="3659429" y="2569464"/>
+            <a:ext cx="1581912" cy="201168"/>
           </a:xfrm>
           <a:prstGeom prst="rect">
             <a:avLst/>
@@ -12929,7 +13185,7 @@
                 <a:ea typeface="Calibri" pitchFamily="34" charset="-122"/>
                 <a:cs typeface="Calibri" pitchFamily="34" charset="-120"/>
               </a:rPr>
-              <a:t>send, let go</a:t>
+              <a:t>send</a:t>
             </a:r>
             <a:endParaRPr lang="en-US" sz="850" dirty="0"/>
           </a:p>
@@ -12943,8 +13199,8 @@
         </p:nvSpPr>
         <p:spPr>
           <a:xfrm>
-            <a:off x="6519672" y="2258568"/>
-            <a:ext cx="1828800" cy="292608"/>
+            <a:off x="5329123" y="2258568"/>
+            <a:ext cx="1581912" cy="292608"/>
           </a:xfrm>
           <a:prstGeom prst="rect">
             <a:avLst>
@@ -12977,8 +13233,8 @@
         </p:nvSpPr>
         <p:spPr>
           <a:xfrm>
-            <a:off x="6519672" y="2258568"/>
-            <a:ext cx="1828800" cy="292608"/>
+            <a:off x="5329123" y="2258568"/>
+            <a:ext cx="1581912" cy="292608"/>
           </a:xfrm>
           <a:prstGeom prst="rect">
             <a:avLst/>
@@ -13016,8 +13272,8 @@
         </p:nvSpPr>
         <p:spPr>
           <a:xfrm>
-            <a:off x="6519672" y="2569464"/>
-            <a:ext cx="1828800" cy="201168"/>
+            <a:off x="5329123" y="2569464"/>
+            <a:ext cx="1581912" cy="201168"/>
           </a:xfrm>
           <a:prstGeom prst="rect">
             <a:avLst/>
@@ -13041,7 +13297,7 @@
                 <a:ea typeface="Calibri" pitchFamily="34" charset="-122"/>
                 <a:cs typeface="Calibri" pitchFamily="34" charset="-120"/>
               </a:rPr>
-              <a:t>act or state of</a:t>
+              <a:t>act or result of</a:t>
             </a:r>
             <a:endParaRPr lang="en-US" sz="850" dirty="0"/>
           </a:p>
@@ -13050,6 +13306,118 @@
       <p:sp>
         <p:nvSpPr>
           <p:cNvPr id="25" name="Shape 23"/>
+          <p:cNvSpPr/>
+          <p:nvPr/>
+        </p:nvSpPr>
+        <p:spPr>
+          <a:xfrm>
+            <a:off x="6998818" y="2258568"/>
+            <a:ext cx="1581912" cy="292608"/>
+          </a:xfrm>
+          <a:prstGeom prst="rect">
+            <a:avLst>
+              <a:gd name="adj" fmla="val 25000"/>
+            </a:avLst>
+          </a:prstGeom>
+          <a:solidFill>
+            <a:srgbClr val="FCE7F3"/>
+          </a:solidFill>
+          <a:ln w="19050">
+            <a:solidFill>
+              <a:srgbClr val="DB2777"/>
+            </a:solidFill>
+            <a:prstDash val="solid"/>
+          </a:ln>
+          <a:effectLst>
+            <a:outerShdw sx="100000" sy="100000" kx="0" ky="0" algn="bl" rotWithShape="0" blurRad="101600" dist="38100" dir="8100000">
+              <a:srgbClr val="000000">
+                <a:alpha val="12000"/>
+              </a:srgbClr>
+            </a:outerShdw>
+          </a:effectLst>
+        </p:spPr>
+      </p:sp>
+      <p:sp>
+        <p:nvSpPr>
+          <p:cNvPr id="26" name="Text 24"/>
+          <p:cNvSpPr/>
+          <p:nvPr/>
+        </p:nvSpPr>
+        <p:spPr>
+          <a:xfrm>
+            <a:off x="6998818" y="2258568"/>
+            <a:ext cx="1581912" cy="292608"/>
+          </a:xfrm>
+          <a:prstGeom prst="rect">
+            <a:avLst/>
+          </a:prstGeom>
+          <a:noFill/>
+          <a:ln/>
+        </p:spPr>
+        <p:txBody>
+          <a:bodyPr wrap="square" lIns="0" tIns="0" rIns="0" bIns="0" rtlCol="0" anchor="ctr"/>
+          <a:lstStyle/>
+          <a:p>
+            <a:pPr algn="ctr" indent="0" marL="0">
+              <a:buNone/>
+            </a:pPr>
+            <a:r>
+              <a:rPr lang="en-US" sz="1300" b="1" dirty="0">
+                <a:solidFill>
+                  <a:srgbClr val="9D174D"/>
+                </a:solidFill>
+                <a:latin typeface="Trebuchet MS" pitchFamily="34" charset="0"/>
+                <a:ea typeface="Trebuchet MS" pitchFamily="34" charset="-122"/>
+                <a:cs typeface="Trebuchet MS" pitchFamily="34" charset="-120"/>
+              </a:rPr>
+              <a:t>ing</a:t>
+            </a:r>
+            <a:endParaRPr lang="en-US" sz="1300" dirty="0"/>
+          </a:p>
+        </p:txBody>
+      </p:sp>
+      <p:sp>
+        <p:nvSpPr>
+          <p:cNvPr id="27" name="Text 25"/>
+          <p:cNvSpPr/>
+          <p:nvPr/>
+        </p:nvSpPr>
+        <p:spPr>
+          <a:xfrm>
+            <a:off x="6998818" y="2569464"/>
+            <a:ext cx="1581912" cy="201168"/>
+          </a:xfrm>
+          <a:prstGeom prst="rect">
+            <a:avLst/>
+          </a:prstGeom>
+          <a:noFill/>
+          <a:ln/>
+        </p:spPr>
+        <p:txBody>
+          <a:bodyPr wrap="square" lIns="0" tIns="0" rIns="0" bIns="0" rtlCol="0" anchor="t"/>
+          <a:lstStyle/>
+          <a:p>
+            <a:pPr algn="ctr" indent="0" marL="0">
+              <a:buNone/>
+            </a:pPr>
+            <a:r>
+              <a:rPr lang="en-US" sz="850" dirty="0">
+                <a:solidFill>
+                  <a:srgbClr val="475569"/>
+                </a:solidFill>
+                <a:latin typeface="Calibri" pitchFamily="34" charset="0"/>
+                <a:ea typeface="Calibri" pitchFamily="34" charset="-122"/>
+                <a:cs typeface="Calibri" pitchFamily="34" charset="-120"/>
+              </a:rPr>
+              <a:t>happening now</a:t>
+            </a:r>
+            <a:endParaRPr lang="en-US" sz="850" dirty="0"/>
+          </a:p>
+        </p:txBody>
+      </p:sp>
+      <p:sp>
+        <p:nvSpPr>
+          <p:cNvPr id="28" name="Shape 26"/>
           <p:cNvSpPr/>
           <p:nvPr/>
         </p:nvSpPr>
@@ -13076,7 +13444,7 @@
       </p:sp>
       <p:sp>
         <p:nvSpPr>
-          <p:cNvPr id="26" name="Text 24"/>
+          <p:cNvPr id="29" name="Text 27"/>
           <p:cNvSpPr/>
           <p:nvPr/>
         </p:nvSpPr>
@@ -13115,7 +13483,7 @@
       </p:sp>
       <p:sp>
         <p:nvSpPr>
-          <p:cNvPr id="27" name="Shape 25"/>
+          <p:cNvPr id="30" name="Shape 28"/>
           <p:cNvSpPr/>
           <p:nvPr/>
         </p:nvSpPr>
@@ -13142,7 +13510,7 @@
       </p:sp>
       <p:sp>
         <p:nvSpPr>
-          <p:cNvPr id="28" name="Text 26"/>
+          <p:cNvPr id="31" name="Text 29"/>
           <p:cNvSpPr/>
           <p:nvPr/>
         </p:nvSpPr>
@@ -13181,7 +13549,7 @@
       </p:sp>
       <p:sp>
         <p:nvSpPr>
-          <p:cNvPr id="29" name="Shape 27"/>
+          <p:cNvPr id="32" name="Shape 30"/>
           <p:cNvSpPr/>
           <p:nvPr/>
         </p:nvSpPr>
@@ -13208,7 +13576,7 @@
       </p:sp>
       <p:sp>
         <p:nvSpPr>
-          <p:cNvPr id="30" name="Text 28"/>
+          <p:cNvPr id="33" name="Text 31"/>
           <p:cNvSpPr/>
           <p:nvPr/>
         </p:nvSpPr>
@@ -13247,7 +13615,7 @@
       </p:sp>
       <p:sp>
         <p:nvSpPr>
-          <p:cNvPr id="31" name="Shape 29"/>
+          <p:cNvPr id="34" name="Shape 32"/>
           <p:cNvSpPr/>
           <p:nvPr/>
         </p:nvSpPr>
@@ -13274,7 +13642,7 @@
       </p:sp>
       <p:sp>
         <p:nvSpPr>
-          <p:cNvPr id="32" name="Text 30"/>
+          <p:cNvPr id="35" name="Text 33"/>
           <p:cNvSpPr/>
           <p:nvPr/>
         </p:nvSpPr>
@@ -13597,7 +13965,7 @@
                 <a:ea typeface="Calibri" pitchFamily="34" charset="-122"/>
                 <a:cs typeface="Calibri" pitchFamily="34" charset="-120"/>
               </a:rPr>
-              <a:t>Word Labs  •  wordlabs.app  •  Root: 'miss' = send, let go, release</a:t>
+              <a:t>Word Labs  •  wordlabs.app  •  Root: 'miss' = send</a:t>
             </a:r>
             <a:endParaRPr lang="en-US" sz="800" dirty="0"/>
           </a:p>
@@ -13736,7 +14104,7 @@
                 <a:ea typeface="Trebuchet MS" pitchFamily="34" charset="-122"/>
                 <a:cs typeface="Trebuchet MS" pitchFamily="34" charset="-120"/>
               </a:rPr>
-              <a:t>submission</a:t>
+              <a:t>commissioning</a:t>
             </a:r>
             <a:endParaRPr lang="en-US" sz="2800" dirty="0"/>
           </a:p>
@@ -13816,8 +14184,8 @@
         </p:nvSpPr>
         <p:spPr>
           <a:xfrm>
-            <a:off x="2221992" y="2258568"/>
-            <a:ext cx="1828800" cy="292608"/>
+            <a:off x="1989734" y="2258568"/>
+            <a:ext cx="1581912" cy="292608"/>
           </a:xfrm>
           <a:prstGeom prst="rect">
             <a:avLst>
@@ -13850,8 +14218,8 @@
         </p:nvSpPr>
         <p:spPr>
           <a:xfrm>
-            <a:off x="2221992" y="2258568"/>
-            <a:ext cx="1828800" cy="292608"/>
+            <a:off x="1989734" y="2258568"/>
+            <a:ext cx="1581912" cy="292608"/>
           </a:xfrm>
           <a:prstGeom prst="rect">
             <a:avLst/>
@@ -13875,7 +14243,7 @@
                 <a:ea typeface="Trebuchet MS" pitchFamily="34" charset="-122"/>
                 <a:cs typeface="Trebuchet MS" pitchFamily="34" charset="-120"/>
               </a:rPr>
-              <a:t>sub</a:t>
+              <a:t>con</a:t>
             </a:r>
             <a:endParaRPr lang="en-US" sz="1300" dirty="0"/>
           </a:p>
@@ -13889,8 +14257,8 @@
         </p:nvSpPr>
         <p:spPr>
           <a:xfrm>
-            <a:off x="2221992" y="2569464"/>
-            <a:ext cx="1828800" cy="201168"/>
+            <a:off x="1989734" y="2569464"/>
+            <a:ext cx="1581912" cy="201168"/>
           </a:xfrm>
           <a:prstGeom prst="rect">
             <a:avLst/>
@@ -13914,7 +14282,7 @@
                 <a:ea typeface="Calibri" pitchFamily="34" charset="-122"/>
                 <a:cs typeface="Calibri" pitchFamily="34" charset="-120"/>
               </a:rPr>
-              <a:t>under, below</a:t>
+              <a:t>with or together</a:t>
             </a:r>
             <a:endParaRPr lang="en-US" sz="850" dirty="0"/>
           </a:p>
@@ -13928,8 +14296,8 @@
         </p:nvSpPr>
         <p:spPr>
           <a:xfrm>
-            <a:off x="4370832" y="2258568"/>
-            <a:ext cx="1828800" cy="292608"/>
+            <a:off x="3659429" y="2258568"/>
+            <a:ext cx="1581912" cy="292608"/>
           </a:xfrm>
           <a:prstGeom prst="rect">
             <a:avLst>
@@ -13962,8 +14330,8 @@
         </p:nvSpPr>
         <p:spPr>
           <a:xfrm>
-            <a:off x="4370832" y="2258568"/>
-            <a:ext cx="1828800" cy="292608"/>
+            <a:off x="3659429" y="2258568"/>
+            <a:ext cx="1581912" cy="292608"/>
           </a:xfrm>
           <a:prstGeom prst="rect">
             <a:avLst/>
@@ -14001,8 +14369,8 @@
         </p:nvSpPr>
         <p:spPr>
           <a:xfrm>
-            <a:off x="4370832" y="2569464"/>
-            <a:ext cx="1828800" cy="201168"/>
+            <a:off x="3659429" y="2569464"/>
+            <a:ext cx="1581912" cy="201168"/>
           </a:xfrm>
           <a:prstGeom prst="rect">
             <a:avLst/>
@@ -14026,7 +14394,7 @@
                 <a:ea typeface="Calibri" pitchFamily="34" charset="-122"/>
                 <a:cs typeface="Calibri" pitchFamily="34" charset="-120"/>
               </a:rPr>
-              <a:t>send, let go</a:t>
+              <a:t>send</a:t>
             </a:r>
             <a:endParaRPr lang="en-US" sz="850" dirty="0"/>
           </a:p>
@@ -14040,8 +14408,8 @@
         </p:nvSpPr>
         <p:spPr>
           <a:xfrm>
-            <a:off x="6519672" y="2258568"/>
-            <a:ext cx="1828800" cy="292608"/>
+            <a:off x="5329123" y="2258568"/>
+            <a:ext cx="1581912" cy="292608"/>
           </a:xfrm>
           <a:prstGeom prst="rect">
             <a:avLst>
@@ -14074,8 +14442,8 @@
         </p:nvSpPr>
         <p:spPr>
           <a:xfrm>
-            <a:off x="6519672" y="2258568"/>
-            <a:ext cx="1828800" cy="292608"/>
+            <a:off x="5329123" y="2258568"/>
+            <a:ext cx="1581912" cy="292608"/>
           </a:xfrm>
           <a:prstGeom prst="rect">
             <a:avLst/>
@@ -14113,8 +14481,8 @@
         </p:nvSpPr>
         <p:spPr>
           <a:xfrm>
-            <a:off x="6519672" y="2569464"/>
-            <a:ext cx="1828800" cy="201168"/>
+            <a:off x="5329123" y="2569464"/>
+            <a:ext cx="1581912" cy="201168"/>
           </a:xfrm>
           <a:prstGeom prst="rect">
             <a:avLst/>
@@ -14138,7 +14506,7 @@
                 <a:ea typeface="Calibri" pitchFamily="34" charset="-122"/>
                 <a:cs typeface="Calibri" pitchFamily="34" charset="-120"/>
               </a:rPr>
-              <a:t>act or state of</a:t>
+              <a:t>act or result of</a:t>
             </a:r>
             <a:endParaRPr lang="en-US" sz="850" dirty="0"/>
           </a:p>
@@ -14147,6 +14515,118 @@
       <p:sp>
         <p:nvSpPr>
           <p:cNvPr id="25" name="Shape 23"/>
+          <p:cNvSpPr/>
+          <p:nvPr/>
+        </p:nvSpPr>
+        <p:spPr>
+          <a:xfrm>
+            <a:off x="6998818" y="2258568"/>
+            <a:ext cx="1581912" cy="292608"/>
+          </a:xfrm>
+          <a:prstGeom prst="rect">
+            <a:avLst>
+              <a:gd name="adj" fmla="val 25000"/>
+            </a:avLst>
+          </a:prstGeom>
+          <a:solidFill>
+            <a:srgbClr val="FCE7F3"/>
+          </a:solidFill>
+          <a:ln w="19050">
+            <a:solidFill>
+              <a:srgbClr val="DB2777"/>
+            </a:solidFill>
+            <a:prstDash val="solid"/>
+          </a:ln>
+          <a:effectLst>
+            <a:outerShdw sx="100000" sy="100000" kx="0" ky="0" algn="bl" rotWithShape="0" blurRad="101600" dist="38100" dir="8100000">
+              <a:srgbClr val="000000">
+                <a:alpha val="12000"/>
+              </a:srgbClr>
+            </a:outerShdw>
+          </a:effectLst>
+        </p:spPr>
+      </p:sp>
+      <p:sp>
+        <p:nvSpPr>
+          <p:cNvPr id="26" name="Text 24"/>
+          <p:cNvSpPr/>
+          <p:nvPr/>
+        </p:nvSpPr>
+        <p:spPr>
+          <a:xfrm>
+            <a:off x="6998818" y="2258568"/>
+            <a:ext cx="1581912" cy="292608"/>
+          </a:xfrm>
+          <a:prstGeom prst="rect">
+            <a:avLst/>
+          </a:prstGeom>
+          <a:noFill/>
+          <a:ln/>
+        </p:spPr>
+        <p:txBody>
+          <a:bodyPr wrap="square" lIns="0" tIns="0" rIns="0" bIns="0" rtlCol="0" anchor="ctr"/>
+          <a:lstStyle/>
+          <a:p>
+            <a:pPr algn="ctr" indent="0" marL="0">
+              <a:buNone/>
+            </a:pPr>
+            <a:r>
+              <a:rPr lang="en-US" sz="1300" b="1" dirty="0">
+                <a:solidFill>
+                  <a:srgbClr val="9D174D"/>
+                </a:solidFill>
+                <a:latin typeface="Trebuchet MS" pitchFamily="34" charset="0"/>
+                <a:ea typeface="Trebuchet MS" pitchFamily="34" charset="-122"/>
+                <a:cs typeface="Trebuchet MS" pitchFamily="34" charset="-120"/>
+              </a:rPr>
+              <a:t>ing</a:t>
+            </a:r>
+            <a:endParaRPr lang="en-US" sz="1300" dirty="0"/>
+          </a:p>
+        </p:txBody>
+      </p:sp>
+      <p:sp>
+        <p:nvSpPr>
+          <p:cNvPr id="27" name="Text 25"/>
+          <p:cNvSpPr/>
+          <p:nvPr/>
+        </p:nvSpPr>
+        <p:spPr>
+          <a:xfrm>
+            <a:off x="6998818" y="2569464"/>
+            <a:ext cx="1581912" cy="201168"/>
+          </a:xfrm>
+          <a:prstGeom prst="rect">
+            <a:avLst/>
+          </a:prstGeom>
+          <a:noFill/>
+          <a:ln/>
+        </p:spPr>
+        <p:txBody>
+          <a:bodyPr wrap="square" lIns="0" tIns="0" rIns="0" bIns="0" rtlCol="0" anchor="t"/>
+          <a:lstStyle/>
+          <a:p>
+            <a:pPr algn="ctr" indent="0" marL="0">
+              <a:buNone/>
+            </a:pPr>
+            <a:r>
+              <a:rPr lang="en-US" sz="850" dirty="0">
+                <a:solidFill>
+                  <a:srgbClr val="475569"/>
+                </a:solidFill>
+                <a:latin typeface="Calibri" pitchFamily="34" charset="0"/>
+                <a:ea typeface="Calibri" pitchFamily="34" charset="-122"/>
+                <a:cs typeface="Calibri" pitchFamily="34" charset="-120"/>
+              </a:rPr>
+              <a:t>happening now</a:t>
+            </a:r>
+            <a:endParaRPr lang="en-US" sz="850" dirty="0"/>
+          </a:p>
+        </p:txBody>
+      </p:sp>
+      <p:sp>
+        <p:nvSpPr>
+          <p:cNvPr id="28" name="Shape 26"/>
           <p:cNvSpPr/>
           <p:nvPr/>
         </p:nvSpPr>
@@ -14173,7 +14653,7 @@
       </p:sp>
       <p:sp>
         <p:nvSpPr>
-          <p:cNvPr id="26" name="Text 24"/>
+          <p:cNvPr id="29" name="Text 27"/>
           <p:cNvSpPr/>
           <p:nvPr/>
         </p:nvSpPr>
@@ -14212,7 +14692,7 @@
       </p:sp>
       <p:sp>
         <p:nvSpPr>
-          <p:cNvPr id="27" name="Shape 25"/>
+          <p:cNvPr id="30" name="Shape 28"/>
           <p:cNvSpPr/>
           <p:nvPr/>
         </p:nvSpPr>
@@ -14239,14 +14719,14 @@
       </p:sp>
       <p:sp>
         <p:nvSpPr>
-          <p:cNvPr id="28" name="Shape 26"/>
-          <p:cNvSpPr/>
-          <p:nvPr/>
-        </p:nvSpPr>
-        <p:spPr>
-          <a:xfrm>
-            <a:off x="2313432" y="3364992"/>
-            <a:ext cx="1645920" cy="475488"/>
+          <p:cNvPr id="31" name="Shape 29"/>
+          <p:cNvSpPr/>
+          <p:nvPr/>
+        </p:nvSpPr>
+        <p:spPr>
+          <a:xfrm>
+            <a:off x="1975104" y="3364992"/>
+            <a:ext cx="1554480" cy="475488"/>
           </a:xfrm>
           <a:prstGeom prst="rect">
             <a:avLst>
@@ -14266,14 +14746,14 @@
       </p:sp>
       <p:sp>
         <p:nvSpPr>
-          <p:cNvPr id="29" name="Text 27"/>
-          <p:cNvSpPr/>
-          <p:nvPr/>
-        </p:nvSpPr>
-        <p:spPr>
-          <a:xfrm>
-            <a:off x="2313432" y="3364992"/>
-            <a:ext cx="1645920" cy="475488"/>
+          <p:cNvPr id="32" name="Text 30"/>
+          <p:cNvSpPr/>
+          <p:nvPr/>
+        </p:nvSpPr>
+        <p:spPr>
+          <a:xfrm>
+            <a:off x="1975104" y="3364992"/>
+            <a:ext cx="1554480" cy="475488"/>
           </a:xfrm>
           <a:prstGeom prst="rect">
             <a:avLst/>
@@ -14297,7 +14777,7 @@
                 <a:ea typeface="Trebuchet MS" pitchFamily="34" charset="-122"/>
                 <a:cs typeface="Trebuchet MS" pitchFamily="34" charset="-120"/>
               </a:rPr>
-              <a:t>sub</a:t>
+              <a:t>com</a:t>
             </a:r>
             <a:endParaRPr lang="en-US" sz="1400" dirty="0"/>
           </a:p>
@@ -14305,14 +14785,14 @@
       </p:sp>
       <p:sp>
         <p:nvSpPr>
-          <p:cNvPr id="30" name="Text 28"/>
-          <p:cNvSpPr/>
-          <p:nvPr/>
-        </p:nvSpPr>
-        <p:spPr>
-          <a:xfrm>
-            <a:off x="3959352" y="3364992"/>
-            <a:ext cx="411480" cy="475488"/>
+          <p:cNvPr id="33" name="Text 31"/>
+          <p:cNvSpPr/>
+          <p:nvPr/>
+        </p:nvSpPr>
+        <p:spPr>
+          <a:xfrm>
+            <a:off x="3529584" y="3364992"/>
+            <a:ext cx="73152" cy="475488"/>
           </a:xfrm>
           <a:prstGeom prst="rect">
             <a:avLst/>
@@ -14344,14 +14824,14 @@
       </p:sp>
       <p:sp>
         <p:nvSpPr>
-          <p:cNvPr id="31" name="Shape 29"/>
-          <p:cNvSpPr/>
-          <p:nvPr/>
-        </p:nvSpPr>
-        <p:spPr>
-          <a:xfrm>
-            <a:off x="4370832" y="3364992"/>
-            <a:ext cx="1645920" cy="475488"/>
+          <p:cNvPr id="34" name="Shape 32"/>
+          <p:cNvSpPr/>
+          <p:nvPr/>
+        </p:nvSpPr>
+        <p:spPr>
+          <a:xfrm>
+            <a:off x="3602736" y="3364992"/>
+            <a:ext cx="1554480" cy="475488"/>
           </a:xfrm>
           <a:prstGeom prst="rect">
             <a:avLst>
@@ -14371,14 +14851,14 @@
       </p:sp>
       <p:sp>
         <p:nvSpPr>
-          <p:cNvPr id="32" name="Text 30"/>
-          <p:cNvSpPr/>
-          <p:nvPr/>
-        </p:nvSpPr>
-        <p:spPr>
-          <a:xfrm>
-            <a:off x="4370832" y="3364992"/>
-            <a:ext cx="1645920" cy="475488"/>
+          <p:cNvPr id="35" name="Text 33"/>
+          <p:cNvSpPr/>
+          <p:nvPr/>
+        </p:nvSpPr>
+        <p:spPr>
+          <a:xfrm>
+            <a:off x="3602736" y="3364992"/>
+            <a:ext cx="1554480" cy="475488"/>
           </a:xfrm>
           <a:prstGeom prst="rect">
             <a:avLst/>
@@ -14410,14 +14890,14 @@
       </p:sp>
       <p:sp>
         <p:nvSpPr>
-          <p:cNvPr id="33" name="Text 31"/>
-          <p:cNvSpPr/>
-          <p:nvPr/>
-        </p:nvSpPr>
-        <p:spPr>
-          <a:xfrm>
-            <a:off x="6016752" y="3364992"/>
-            <a:ext cx="411480" cy="475488"/>
+          <p:cNvPr id="36" name="Text 34"/>
+          <p:cNvSpPr/>
+          <p:nvPr/>
+        </p:nvSpPr>
+        <p:spPr>
+          <a:xfrm>
+            <a:off x="5157216" y="3364992"/>
+            <a:ext cx="73152" cy="475488"/>
           </a:xfrm>
           <a:prstGeom prst="rect">
             <a:avLst/>
@@ -14449,14 +14929,14 @@
       </p:sp>
       <p:sp>
         <p:nvSpPr>
-          <p:cNvPr id="34" name="Shape 32"/>
-          <p:cNvSpPr/>
-          <p:nvPr/>
-        </p:nvSpPr>
-        <p:spPr>
-          <a:xfrm>
-            <a:off x="6428232" y="3364992"/>
-            <a:ext cx="1645920" cy="475488"/>
+          <p:cNvPr id="37" name="Shape 35"/>
+          <p:cNvSpPr/>
+          <p:nvPr/>
+        </p:nvSpPr>
+        <p:spPr>
+          <a:xfrm>
+            <a:off x="5230368" y="3364992"/>
+            <a:ext cx="1554480" cy="475488"/>
           </a:xfrm>
           <a:prstGeom prst="rect">
             <a:avLst>
@@ -14476,14 +14956,14 @@
       </p:sp>
       <p:sp>
         <p:nvSpPr>
-          <p:cNvPr id="35" name="Text 33"/>
-          <p:cNvSpPr/>
-          <p:nvPr/>
-        </p:nvSpPr>
-        <p:spPr>
-          <a:xfrm>
-            <a:off x="6428232" y="3364992"/>
-            <a:ext cx="1645920" cy="475488"/>
+          <p:cNvPr id="38" name="Text 36"/>
+          <p:cNvSpPr/>
+          <p:nvPr/>
+        </p:nvSpPr>
+        <p:spPr>
+          <a:xfrm>
+            <a:off x="5230368" y="3364992"/>
+            <a:ext cx="1554480" cy="475488"/>
           </a:xfrm>
           <a:prstGeom prst="rect">
             <a:avLst/>
@@ -14515,7 +14995,112 @@
       </p:sp>
       <p:sp>
         <p:nvSpPr>
-          <p:cNvPr id="36" name="Shape 34"/>
+          <p:cNvPr id="39" name="Text 37"/>
+          <p:cNvSpPr/>
+          <p:nvPr/>
+        </p:nvSpPr>
+        <p:spPr>
+          <a:xfrm>
+            <a:off x="6784848" y="3364992"/>
+            <a:ext cx="73152" cy="475488"/>
+          </a:xfrm>
+          <a:prstGeom prst="rect">
+            <a:avLst/>
+          </a:prstGeom>
+          <a:noFill/>
+          <a:ln/>
+        </p:spPr>
+        <p:txBody>
+          <a:bodyPr wrap="square" lIns="0" tIns="0" rIns="0" bIns="0" rtlCol="0" anchor="ctr"/>
+          <a:lstStyle/>
+          <a:p>
+            <a:pPr algn="ctr" indent="0" marL="0">
+              <a:buNone/>
+            </a:pPr>
+            <a:r>
+              <a:rPr lang="en-US" sz="1600" b="1" dirty="0">
+                <a:solidFill>
+                  <a:srgbClr val="0D9488"/>
+                </a:solidFill>
+                <a:latin typeface="Trebuchet MS" pitchFamily="34" charset="0"/>
+                <a:ea typeface="Trebuchet MS" pitchFamily="34" charset="-122"/>
+                <a:cs typeface="Trebuchet MS" pitchFamily="34" charset="-120"/>
+              </a:rPr>
+              <a:t>·</a:t>
+            </a:r>
+            <a:endParaRPr lang="en-US" sz="1600" dirty="0"/>
+          </a:p>
+        </p:txBody>
+      </p:sp>
+      <p:sp>
+        <p:nvSpPr>
+          <p:cNvPr id="40" name="Shape 38"/>
+          <p:cNvSpPr/>
+          <p:nvPr/>
+        </p:nvSpPr>
+        <p:spPr>
+          <a:xfrm>
+            <a:off x="6858000" y="3364992"/>
+            <a:ext cx="1554480" cy="475488"/>
+          </a:xfrm>
+          <a:prstGeom prst="rect">
+            <a:avLst>
+              <a:gd name="adj" fmla="val 9615"/>
+            </a:avLst>
+          </a:prstGeom>
+          <a:solidFill>
+            <a:srgbClr val="FFFFFF"/>
+          </a:solidFill>
+          <a:ln w="12700">
+            <a:solidFill>
+              <a:srgbClr val="0D9488"/>
+            </a:solidFill>
+            <a:prstDash val="solid"/>
+          </a:ln>
+        </p:spPr>
+      </p:sp>
+      <p:sp>
+        <p:nvSpPr>
+          <p:cNvPr id="41" name="Text 39"/>
+          <p:cNvSpPr/>
+          <p:nvPr/>
+        </p:nvSpPr>
+        <p:spPr>
+          <a:xfrm>
+            <a:off x="6858000" y="3364992"/>
+            <a:ext cx="1554480" cy="475488"/>
+          </a:xfrm>
+          <a:prstGeom prst="rect">
+            <a:avLst/>
+          </a:prstGeom>
+          <a:noFill/>
+          <a:ln/>
+        </p:spPr>
+        <p:txBody>
+          <a:bodyPr wrap="square" lIns="0" tIns="0" rIns="0" bIns="0" rtlCol="0" anchor="ctr"/>
+          <a:lstStyle/>
+          <a:p>
+            <a:pPr algn="ctr" indent="0" marL="0">
+              <a:buNone/>
+            </a:pPr>
+            <a:r>
+              <a:rPr lang="en-US" sz="1400" b="1" dirty="0">
+                <a:solidFill>
+                  <a:srgbClr val="0D9488"/>
+                </a:solidFill>
+                <a:latin typeface="Trebuchet MS" pitchFamily="34" charset="0"/>
+                <a:ea typeface="Trebuchet MS" pitchFamily="34" charset="-122"/>
+                <a:cs typeface="Trebuchet MS" pitchFamily="34" charset="-120"/>
+              </a:rPr>
+              <a:t>ing</a:t>
+            </a:r>
+            <a:endParaRPr lang="en-US" sz="1400" dirty="0"/>
+          </a:p>
+        </p:txBody>
+      </p:sp>
+      <p:sp>
+        <p:nvSpPr>
+          <p:cNvPr id="42" name="Shape 40"/>
           <p:cNvSpPr/>
           <p:nvPr/>
         </p:nvSpPr>
@@ -14542,7 +15127,7 @@
       </p:sp>
       <p:sp>
         <p:nvSpPr>
-          <p:cNvPr id="37" name="Text 35"/>
+          <p:cNvPr id="43" name="Text 41"/>
           <p:cNvSpPr/>
           <p:nvPr/>
         </p:nvSpPr>
@@ -14581,7 +15166,7 @@
       </p:sp>
       <p:sp>
         <p:nvSpPr>
-          <p:cNvPr id="38" name="Shape 36"/>
+          <p:cNvPr id="44" name="Shape 42"/>
           <p:cNvSpPr/>
           <p:nvPr/>
         </p:nvSpPr>
@@ -14608,7 +15193,7 @@
       </p:sp>
       <p:sp>
         <p:nvSpPr>
-          <p:cNvPr id="39" name="Text 37"/>
+          <p:cNvPr id="45" name="Text 43"/>
           <p:cNvSpPr/>
           <p:nvPr/>
         </p:nvSpPr>
@@ -14840,7 +15425,7 @@
                 <a:ea typeface="Calibri" pitchFamily="34" charset="-122"/>
                 <a:cs typeface="Calibri" pitchFamily="34" charset="-120"/>
               </a:rPr>
-              <a:t>Root 'miss' — send, let go, release</a:t>
+              <a:t>Root 'miss' — send</a:t>
             </a:r>
             <a:endParaRPr lang="en-US" sz="1600" dirty="0"/>
           </a:p>
@@ -15196,7 +15781,7 @@
                 <a:ea typeface="Calibri" pitchFamily="34" charset="-122"/>
                 <a:cs typeface="Calibri" pitchFamily="34" charset="-120"/>
               </a:rPr>
-              <a:t>Word Labs  •  wordlabs.app  •  Root: 'miss' = send, let go, release</a:t>
+              <a:t>Word Labs  •  wordlabs.app  •  Root: 'miss' = send</a:t>
             </a:r>
             <a:endParaRPr lang="en-US" sz="800" dirty="0"/>
           </a:p>
@@ -15335,7 +15920,7 @@
                 <a:ea typeface="Trebuchet MS" pitchFamily="34" charset="-122"/>
                 <a:cs typeface="Trebuchet MS" pitchFamily="34" charset="-120"/>
               </a:rPr>
-              <a:t>submission</a:t>
+              <a:t>commissioning</a:t>
             </a:r>
             <a:endParaRPr lang="en-US" sz="2800" dirty="0"/>
           </a:p>
@@ -15415,8 +16000,8 @@
         </p:nvSpPr>
         <p:spPr>
           <a:xfrm>
-            <a:off x="2221992" y="2258568"/>
-            <a:ext cx="1828800" cy="292608"/>
+            <a:off x="1989734" y="2258568"/>
+            <a:ext cx="1581912" cy="292608"/>
           </a:xfrm>
           <a:prstGeom prst="rect">
             <a:avLst>
@@ -15449,8 +16034,8 @@
         </p:nvSpPr>
         <p:spPr>
           <a:xfrm>
-            <a:off x="2221992" y="2258568"/>
-            <a:ext cx="1828800" cy="292608"/>
+            <a:off x="1989734" y="2258568"/>
+            <a:ext cx="1581912" cy="292608"/>
           </a:xfrm>
           <a:prstGeom prst="rect">
             <a:avLst/>
@@ -15474,7 +16059,7 @@
                 <a:ea typeface="Trebuchet MS" pitchFamily="34" charset="-122"/>
                 <a:cs typeface="Trebuchet MS" pitchFamily="34" charset="-120"/>
               </a:rPr>
-              <a:t>sub</a:t>
+              <a:t>con</a:t>
             </a:r>
             <a:endParaRPr lang="en-US" sz="1300" dirty="0"/>
           </a:p>
@@ -15488,8 +16073,8 @@
         </p:nvSpPr>
         <p:spPr>
           <a:xfrm>
-            <a:off x="2221992" y="2569464"/>
-            <a:ext cx="1828800" cy="201168"/>
+            <a:off x="1989734" y="2569464"/>
+            <a:ext cx="1581912" cy="201168"/>
           </a:xfrm>
           <a:prstGeom prst="rect">
             <a:avLst/>
@@ -15513,7 +16098,7 @@
                 <a:ea typeface="Calibri" pitchFamily="34" charset="-122"/>
                 <a:cs typeface="Calibri" pitchFamily="34" charset="-120"/>
               </a:rPr>
-              <a:t>under, below</a:t>
+              <a:t>with or together</a:t>
             </a:r>
             <a:endParaRPr lang="en-US" sz="850" dirty="0"/>
           </a:p>
@@ -15527,8 +16112,8 @@
         </p:nvSpPr>
         <p:spPr>
           <a:xfrm>
-            <a:off x="4370832" y="2258568"/>
-            <a:ext cx="1828800" cy="292608"/>
+            <a:off x="3659429" y="2258568"/>
+            <a:ext cx="1581912" cy="292608"/>
           </a:xfrm>
           <a:prstGeom prst="rect">
             <a:avLst>
@@ -15561,8 +16146,8 @@
         </p:nvSpPr>
         <p:spPr>
           <a:xfrm>
-            <a:off x="4370832" y="2258568"/>
-            <a:ext cx="1828800" cy="292608"/>
+            <a:off x="3659429" y="2258568"/>
+            <a:ext cx="1581912" cy="292608"/>
           </a:xfrm>
           <a:prstGeom prst="rect">
             <a:avLst/>
@@ -15600,8 +16185,8 @@
         </p:nvSpPr>
         <p:spPr>
           <a:xfrm>
-            <a:off x="4370832" y="2569464"/>
-            <a:ext cx="1828800" cy="201168"/>
+            <a:off x="3659429" y="2569464"/>
+            <a:ext cx="1581912" cy="201168"/>
           </a:xfrm>
           <a:prstGeom prst="rect">
             <a:avLst/>
@@ -15625,7 +16210,7 @@
                 <a:ea typeface="Calibri" pitchFamily="34" charset="-122"/>
                 <a:cs typeface="Calibri" pitchFamily="34" charset="-120"/>
               </a:rPr>
-              <a:t>send, let go</a:t>
+              <a:t>send</a:t>
             </a:r>
             <a:endParaRPr lang="en-US" sz="850" dirty="0"/>
           </a:p>
@@ -15639,8 +16224,8 @@
         </p:nvSpPr>
         <p:spPr>
           <a:xfrm>
-            <a:off x="6519672" y="2258568"/>
-            <a:ext cx="1828800" cy="292608"/>
+            <a:off x="5329123" y="2258568"/>
+            <a:ext cx="1581912" cy="292608"/>
           </a:xfrm>
           <a:prstGeom prst="rect">
             <a:avLst>
@@ -15673,8 +16258,8 @@
         </p:nvSpPr>
         <p:spPr>
           <a:xfrm>
-            <a:off x="6519672" y="2258568"/>
-            <a:ext cx="1828800" cy="292608"/>
+            <a:off x="5329123" y="2258568"/>
+            <a:ext cx="1581912" cy="292608"/>
           </a:xfrm>
           <a:prstGeom prst="rect">
             <a:avLst/>
@@ -15712,8 +16297,8 @@
         </p:nvSpPr>
         <p:spPr>
           <a:xfrm>
-            <a:off x="6519672" y="2569464"/>
-            <a:ext cx="1828800" cy="201168"/>
+            <a:off x="5329123" y="2569464"/>
+            <a:ext cx="1581912" cy="201168"/>
           </a:xfrm>
           <a:prstGeom prst="rect">
             <a:avLst/>
@@ -15737,7 +16322,7 @@
                 <a:ea typeface="Calibri" pitchFamily="34" charset="-122"/>
                 <a:cs typeface="Calibri" pitchFamily="34" charset="-120"/>
               </a:rPr>
-              <a:t>act or state of</a:t>
+              <a:t>act or result of</a:t>
             </a:r>
             <a:endParaRPr lang="en-US" sz="850" dirty="0"/>
           </a:p>
@@ -15746,6 +16331,118 @@
       <p:sp>
         <p:nvSpPr>
           <p:cNvPr id="25" name="Shape 23"/>
+          <p:cNvSpPr/>
+          <p:nvPr/>
+        </p:nvSpPr>
+        <p:spPr>
+          <a:xfrm>
+            <a:off x="6998818" y="2258568"/>
+            <a:ext cx="1581912" cy="292608"/>
+          </a:xfrm>
+          <a:prstGeom prst="rect">
+            <a:avLst>
+              <a:gd name="adj" fmla="val 25000"/>
+            </a:avLst>
+          </a:prstGeom>
+          <a:solidFill>
+            <a:srgbClr val="FCE7F3"/>
+          </a:solidFill>
+          <a:ln w="19050">
+            <a:solidFill>
+              <a:srgbClr val="DB2777"/>
+            </a:solidFill>
+            <a:prstDash val="solid"/>
+          </a:ln>
+          <a:effectLst>
+            <a:outerShdw sx="100000" sy="100000" kx="0" ky="0" algn="bl" rotWithShape="0" blurRad="101600" dist="38100" dir="8100000">
+              <a:srgbClr val="000000">
+                <a:alpha val="12000"/>
+              </a:srgbClr>
+            </a:outerShdw>
+          </a:effectLst>
+        </p:spPr>
+      </p:sp>
+      <p:sp>
+        <p:nvSpPr>
+          <p:cNvPr id="26" name="Text 24"/>
+          <p:cNvSpPr/>
+          <p:nvPr/>
+        </p:nvSpPr>
+        <p:spPr>
+          <a:xfrm>
+            <a:off x="6998818" y="2258568"/>
+            <a:ext cx="1581912" cy="292608"/>
+          </a:xfrm>
+          <a:prstGeom prst="rect">
+            <a:avLst/>
+          </a:prstGeom>
+          <a:noFill/>
+          <a:ln/>
+        </p:spPr>
+        <p:txBody>
+          <a:bodyPr wrap="square" lIns="0" tIns="0" rIns="0" bIns="0" rtlCol="0" anchor="ctr"/>
+          <a:lstStyle/>
+          <a:p>
+            <a:pPr algn="ctr" indent="0" marL="0">
+              <a:buNone/>
+            </a:pPr>
+            <a:r>
+              <a:rPr lang="en-US" sz="1300" b="1" dirty="0">
+                <a:solidFill>
+                  <a:srgbClr val="9D174D"/>
+                </a:solidFill>
+                <a:latin typeface="Trebuchet MS" pitchFamily="34" charset="0"/>
+                <a:ea typeface="Trebuchet MS" pitchFamily="34" charset="-122"/>
+                <a:cs typeface="Trebuchet MS" pitchFamily="34" charset="-120"/>
+              </a:rPr>
+              <a:t>ing</a:t>
+            </a:r>
+            <a:endParaRPr lang="en-US" sz="1300" dirty="0"/>
+          </a:p>
+        </p:txBody>
+      </p:sp>
+      <p:sp>
+        <p:nvSpPr>
+          <p:cNvPr id="27" name="Text 25"/>
+          <p:cNvSpPr/>
+          <p:nvPr/>
+        </p:nvSpPr>
+        <p:spPr>
+          <a:xfrm>
+            <a:off x="6998818" y="2569464"/>
+            <a:ext cx="1581912" cy="201168"/>
+          </a:xfrm>
+          <a:prstGeom prst="rect">
+            <a:avLst/>
+          </a:prstGeom>
+          <a:noFill/>
+          <a:ln/>
+        </p:spPr>
+        <p:txBody>
+          <a:bodyPr wrap="square" lIns="0" tIns="0" rIns="0" bIns="0" rtlCol="0" anchor="t"/>
+          <a:lstStyle/>
+          <a:p>
+            <a:pPr algn="ctr" indent="0" marL="0">
+              <a:buNone/>
+            </a:pPr>
+            <a:r>
+              <a:rPr lang="en-US" sz="850" dirty="0">
+                <a:solidFill>
+                  <a:srgbClr val="475569"/>
+                </a:solidFill>
+                <a:latin typeface="Calibri" pitchFamily="34" charset="0"/>
+                <a:ea typeface="Calibri" pitchFamily="34" charset="-122"/>
+                <a:cs typeface="Calibri" pitchFamily="34" charset="-120"/>
+              </a:rPr>
+              <a:t>happening now</a:t>
+            </a:r>
+            <a:endParaRPr lang="en-US" sz="850" dirty="0"/>
+          </a:p>
+        </p:txBody>
+      </p:sp>
+      <p:sp>
+        <p:nvSpPr>
+          <p:cNvPr id="28" name="Shape 26"/>
           <p:cNvSpPr/>
           <p:nvPr/>
         </p:nvSpPr>
@@ -15772,7 +16469,7 @@
       </p:sp>
       <p:sp>
         <p:nvSpPr>
-          <p:cNvPr id="26" name="Text 24"/>
+          <p:cNvPr id="29" name="Text 27"/>
           <p:cNvSpPr/>
           <p:nvPr/>
         </p:nvSpPr>
@@ -15811,7 +16508,7 @@
       </p:sp>
       <p:sp>
         <p:nvSpPr>
-          <p:cNvPr id="27" name="Shape 25"/>
+          <p:cNvPr id="30" name="Shape 28"/>
           <p:cNvSpPr/>
           <p:nvPr/>
         </p:nvSpPr>
@@ -15838,14 +16535,14 @@
       </p:sp>
       <p:sp>
         <p:nvSpPr>
-          <p:cNvPr id="28" name="Shape 26"/>
-          <p:cNvSpPr/>
-          <p:nvPr/>
-        </p:nvSpPr>
-        <p:spPr>
-          <a:xfrm>
-            <a:off x="2313432" y="3364992"/>
-            <a:ext cx="1645920" cy="475488"/>
+          <p:cNvPr id="31" name="Shape 29"/>
+          <p:cNvSpPr/>
+          <p:nvPr/>
+        </p:nvSpPr>
+        <p:spPr>
+          <a:xfrm>
+            <a:off x="1975104" y="3364992"/>
+            <a:ext cx="1554480" cy="475488"/>
           </a:xfrm>
           <a:prstGeom prst="rect">
             <a:avLst>
@@ -15865,14 +16562,14 @@
       </p:sp>
       <p:sp>
         <p:nvSpPr>
-          <p:cNvPr id="29" name="Text 27"/>
-          <p:cNvSpPr/>
-          <p:nvPr/>
-        </p:nvSpPr>
-        <p:spPr>
-          <a:xfrm>
-            <a:off x="2313432" y="3364992"/>
-            <a:ext cx="1645920" cy="475488"/>
+          <p:cNvPr id="32" name="Text 30"/>
+          <p:cNvSpPr/>
+          <p:nvPr/>
+        </p:nvSpPr>
+        <p:spPr>
+          <a:xfrm>
+            <a:off x="1975104" y="3364992"/>
+            <a:ext cx="1554480" cy="475488"/>
           </a:xfrm>
           <a:prstGeom prst="rect">
             <a:avLst/>
@@ -15896,7 +16593,7 @@
                 <a:ea typeface="Trebuchet MS" pitchFamily="34" charset="-122"/>
                 <a:cs typeface="Trebuchet MS" pitchFamily="34" charset="-120"/>
               </a:rPr>
-              <a:t>sub</a:t>
+              <a:t>com</a:t>
             </a:r>
             <a:endParaRPr lang="en-US" sz="1400" dirty="0"/>
           </a:p>
@@ -15904,14 +16601,14 @@
       </p:sp>
       <p:sp>
         <p:nvSpPr>
-          <p:cNvPr id="30" name="Text 28"/>
-          <p:cNvSpPr/>
-          <p:nvPr/>
-        </p:nvSpPr>
-        <p:spPr>
-          <a:xfrm>
-            <a:off x="3959352" y="3364992"/>
-            <a:ext cx="411480" cy="475488"/>
+          <p:cNvPr id="33" name="Text 31"/>
+          <p:cNvSpPr/>
+          <p:nvPr/>
+        </p:nvSpPr>
+        <p:spPr>
+          <a:xfrm>
+            <a:off x="3529584" y="3364992"/>
+            <a:ext cx="73152" cy="475488"/>
           </a:xfrm>
           <a:prstGeom prst="rect">
             <a:avLst/>
@@ -15943,14 +16640,14 @@
       </p:sp>
       <p:sp>
         <p:nvSpPr>
-          <p:cNvPr id="31" name="Shape 29"/>
-          <p:cNvSpPr/>
-          <p:nvPr/>
-        </p:nvSpPr>
-        <p:spPr>
-          <a:xfrm>
-            <a:off x="4370832" y="3364992"/>
-            <a:ext cx="1645920" cy="475488"/>
+          <p:cNvPr id="34" name="Shape 32"/>
+          <p:cNvSpPr/>
+          <p:nvPr/>
+        </p:nvSpPr>
+        <p:spPr>
+          <a:xfrm>
+            <a:off x="3602736" y="3364992"/>
+            <a:ext cx="1554480" cy="475488"/>
           </a:xfrm>
           <a:prstGeom prst="rect">
             <a:avLst>
@@ -15970,14 +16667,14 @@
       </p:sp>
       <p:sp>
         <p:nvSpPr>
-          <p:cNvPr id="32" name="Text 30"/>
-          <p:cNvSpPr/>
-          <p:nvPr/>
-        </p:nvSpPr>
-        <p:spPr>
-          <a:xfrm>
-            <a:off x="4370832" y="3364992"/>
-            <a:ext cx="1645920" cy="475488"/>
+          <p:cNvPr id="35" name="Text 33"/>
+          <p:cNvSpPr/>
+          <p:nvPr/>
+        </p:nvSpPr>
+        <p:spPr>
+          <a:xfrm>
+            <a:off x="3602736" y="3364992"/>
+            <a:ext cx="1554480" cy="475488"/>
           </a:xfrm>
           <a:prstGeom prst="rect">
             <a:avLst/>
@@ -16009,14 +16706,14 @@
       </p:sp>
       <p:sp>
         <p:nvSpPr>
-          <p:cNvPr id="33" name="Text 31"/>
-          <p:cNvSpPr/>
-          <p:nvPr/>
-        </p:nvSpPr>
-        <p:spPr>
-          <a:xfrm>
-            <a:off x="6016752" y="3364992"/>
-            <a:ext cx="411480" cy="475488"/>
+          <p:cNvPr id="36" name="Text 34"/>
+          <p:cNvSpPr/>
+          <p:nvPr/>
+        </p:nvSpPr>
+        <p:spPr>
+          <a:xfrm>
+            <a:off x="5157216" y="3364992"/>
+            <a:ext cx="73152" cy="475488"/>
           </a:xfrm>
           <a:prstGeom prst="rect">
             <a:avLst/>
@@ -16048,14 +16745,14 @@
       </p:sp>
       <p:sp>
         <p:nvSpPr>
-          <p:cNvPr id="34" name="Shape 32"/>
-          <p:cNvSpPr/>
-          <p:nvPr/>
-        </p:nvSpPr>
-        <p:spPr>
-          <a:xfrm>
-            <a:off x="6428232" y="3364992"/>
-            <a:ext cx="1645920" cy="475488"/>
+          <p:cNvPr id="37" name="Shape 35"/>
+          <p:cNvSpPr/>
+          <p:nvPr/>
+        </p:nvSpPr>
+        <p:spPr>
+          <a:xfrm>
+            <a:off x="5230368" y="3364992"/>
+            <a:ext cx="1554480" cy="475488"/>
           </a:xfrm>
           <a:prstGeom prst="rect">
             <a:avLst>
@@ -16075,14 +16772,14 @@
       </p:sp>
       <p:sp>
         <p:nvSpPr>
-          <p:cNvPr id="35" name="Text 33"/>
-          <p:cNvSpPr/>
-          <p:nvPr/>
-        </p:nvSpPr>
-        <p:spPr>
-          <a:xfrm>
-            <a:off x="6428232" y="3364992"/>
-            <a:ext cx="1645920" cy="475488"/>
+          <p:cNvPr id="38" name="Text 36"/>
+          <p:cNvSpPr/>
+          <p:nvPr/>
+        </p:nvSpPr>
+        <p:spPr>
+          <a:xfrm>
+            <a:off x="5230368" y="3364992"/>
+            <a:ext cx="1554480" cy="475488"/>
           </a:xfrm>
           <a:prstGeom prst="rect">
             <a:avLst/>
@@ -16114,7 +16811,112 @@
       </p:sp>
       <p:sp>
         <p:nvSpPr>
-          <p:cNvPr id="36" name="Shape 34"/>
+          <p:cNvPr id="39" name="Text 37"/>
+          <p:cNvSpPr/>
+          <p:nvPr/>
+        </p:nvSpPr>
+        <p:spPr>
+          <a:xfrm>
+            <a:off x="6784848" y="3364992"/>
+            <a:ext cx="73152" cy="475488"/>
+          </a:xfrm>
+          <a:prstGeom prst="rect">
+            <a:avLst/>
+          </a:prstGeom>
+          <a:noFill/>
+          <a:ln/>
+        </p:spPr>
+        <p:txBody>
+          <a:bodyPr wrap="square" lIns="0" tIns="0" rIns="0" bIns="0" rtlCol="0" anchor="ctr"/>
+          <a:lstStyle/>
+          <a:p>
+            <a:pPr algn="ctr" indent="0" marL="0">
+              <a:buNone/>
+            </a:pPr>
+            <a:r>
+              <a:rPr lang="en-US" sz="1600" b="1" dirty="0">
+                <a:solidFill>
+                  <a:srgbClr val="0D9488"/>
+                </a:solidFill>
+                <a:latin typeface="Trebuchet MS" pitchFamily="34" charset="0"/>
+                <a:ea typeface="Trebuchet MS" pitchFamily="34" charset="-122"/>
+                <a:cs typeface="Trebuchet MS" pitchFamily="34" charset="-120"/>
+              </a:rPr>
+              <a:t>·</a:t>
+            </a:r>
+            <a:endParaRPr lang="en-US" sz="1600" dirty="0"/>
+          </a:p>
+        </p:txBody>
+      </p:sp>
+      <p:sp>
+        <p:nvSpPr>
+          <p:cNvPr id="40" name="Shape 38"/>
+          <p:cNvSpPr/>
+          <p:nvPr/>
+        </p:nvSpPr>
+        <p:spPr>
+          <a:xfrm>
+            <a:off x="6858000" y="3364992"/>
+            <a:ext cx="1554480" cy="475488"/>
+          </a:xfrm>
+          <a:prstGeom prst="rect">
+            <a:avLst>
+              <a:gd name="adj" fmla="val 9615"/>
+            </a:avLst>
+          </a:prstGeom>
+          <a:solidFill>
+            <a:srgbClr val="FFFFFF"/>
+          </a:solidFill>
+          <a:ln w="12700">
+            <a:solidFill>
+              <a:srgbClr val="0D9488"/>
+            </a:solidFill>
+            <a:prstDash val="solid"/>
+          </a:ln>
+        </p:spPr>
+      </p:sp>
+      <p:sp>
+        <p:nvSpPr>
+          <p:cNvPr id="41" name="Text 39"/>
+          <p:cNvSpPr/>
+          <p:nvPr/>
+        </p:nvSpPr>
+        <p:spPr>
+          <a:xfrm>
+            <a:off x="6858000" y="3364992"/>
+            <a:ext cx="1554480" cy="475488"/>
+          </a:xfrm>
+          <a:prstGeom prst="rect">
+            <a:avLst/>
+          </a:prstGeom>
+          <a:noFill/>
+          <a:ln/>
+        </p:spPr>
+        <p:txBody>
+          <a:bodyPr wrap="square" lIns="0" tIns="0" rIns="0" bIns="0" rtlCol="0" anchor="ctr"/>
+          <a:lstStyle/>
+          <a:p>
+            <a:pPr algn="ctr" indent="0" marL="0">
+              <a:buNone/>
+            </a:pPr>
+            <a:r>
+              <a:rPr lang="en-US" sz="1400" b="1" dirty="0">
+                <a:solidFill>
+                  <a:srgbClr val="0D9488"/>
+                </a:solidFill>
+                <a:latin typeface="Trebuchet MS" pitchFamily="34" charset="0"/>
+                <a:ea typeface="Trebuchet MS" pitchFamily="34" charset="-122"/>
+                <a:cs typeface="Trebuchet MS" pitchFamily="34" charset="-120"/>
+              </a:rPr>
+              <a:t>ing</a:t>
+            </a:r>
+            <a:endParaRPr lang="en-US" sz="1400" dirty="0"/>
+          </a:p>
+        </p:txBody>
+      </p:sp>
+      <p:sp>
+        <p:nvSpPr>
+          <p:cNvPr id="42" name="Shape 40"/>
           <p:cNvSpPr/>
           <p:nvPr/>
         </p:nvSpPr>
@@ -16141,7 +16943,7 @@
       </p:sp>
       <p:sp>
         <p:nvSpPr>
-          <p:cNvPr id="37" name="Text 35"/>
+          <p:cNvPr id="43" name="Text 41"/>
           <p:cNvSpPr/>
           <p:nvPr/>
         </p:nvSpPr>
@@ -16180,18 +16982,18 @@
       </p:sp>
       <p:sp>
         <p:nvSpPr>
-          <p:cNvPr id="38" name="Shape 36"/>
+          <p:cNvPr id="44" name="Shape 42"/>
           <p:cNvSpPr/>
           <p:nvPr/>
         </p:nvSpPr>
         <p:spPr>
           <a:xfrm>
             <a:off x="1874520" y="4096512"/>
-            <a:ext cx="6903720" cy="804672"/>
+            <a:ext cx="6903720" cy="658368"/>
           </a:xfrm>
           <a:prstGeom prst="rect">
             <a:avLst>
-              <a:gd name="adj" fmla="val 6818"/>
+              <a:gd name="adj" fmla="val 8333"/>
             </a:avLst>
           </a:prstGeom>
           <a:solidFill>
@@ -16207,18 +17009,18 @@
       </p:sp>
       <p:sp>
         <p:nvSpPr>
-          <p:cNvPr id="39" name="Shape 37"/>
-          <p:cNvSpPr/>
-          <p:nvPr/>
-        </p:nvSpPr>
-        <p:spPr>
-          <a:xfrm>
-            <a:off x="2124837" y="4169664"/>
-            <a:ext cx="685800" cy="384048"/>
+          <p:cNvPr id="45" name="Shape 43"/>
+          <p:cNvSpPr/>
+          <p:nvPr/>
+        </p:nvSpPr>
+        <p:spPr>
+          <a:xfrm>
+            <a:off x="1951330" y="4169664"/>
+            <a:ext cx="676656" cy="475488"/>
           </a:xfrm>
           <a:prstGeom prst="rect">
             <a:avLst>
-              <a:gd name="adj" fmla="val 9524"/>
+              <a:gd name="adj" fmla="val 7692"/>
             </a:avLst>
           </a:prstGeom>
           <a:solidFill>
@@ -16234,14 +17036,14 @@
       </p:sp>
       <p:sp>
         <p:nvSpPr>
-          <p:cNvPr id="40" name="Text 38"/>
-          <p:cNvSpPr/>
-          <p:nvPr/>
-        </p:nvSpPr>
-        <p:spPr>
-          <a:xfrm>
-            <a:off x="2124837" y="4169664"/>
-            <a:ext cx="685800" cy="384048"/>
+          <p:cNvPr id="46" name="Text 44"/>
+          <p:cNvSpPr/>
+          <p:nvPr/>
+        </p:nvSpPr>
+        <p:spPr>
+          <a:xfrm>
+            <a:off x="1951330" y="4169664"/>
+            <a:ext cx="676656" cy="475488"/>
           </a:xfrm>
           <a:prstGeom prst="rect">
             <a:avLst/>
@@ -16265,7 +17067,7 @@
                 <a:ea typeface="Trebuchet MS" pitchFamily="34" charset="-122"/>
                 <a:cs typeface="Trebuchet MS" pitchFamily="34" charset="-120"/>
               </a:rPr>
-              <a:t>s</a:t>
+              <a:t>c</a:t>
             </a:r>
             <a:endParaRPr lang="en-US" sz="900" dirty="0"/>
           </a:p>
@@ -16273,18 +17075,18 @@
       </p:sp>
       <p:sp>
         <p:nvSpPr>
-          <p:cNvPr id="41" name="Shape 39"/>
-          <p:cNvSpPr/>
-          <p:nvPr/>
-        </p:nvSpPr>
-        <p:spPr>
-          <a:xfrm>
-            <a:off x="3033522" y="4169664"/>
-            <a:ext cx="685800" cy="384048"/>
+          <p:cNvPr id="47" name="Shape 45"/>
+          <p:cNvSpPr/>
+          <p:nvPr/>
+        </p:nvSpPr>
+        <p:spPr>
+          <a:xfrm>
+            <a:off x="2677363" y="4169664"/>
+            <a:ext cx="676656" cy="475488"/>
           </a:xfrm>
           <a:prstGeom prst="rect">
             <a:avLst>
-              <a:gd name="adj" fmla="val 9524"/>
+              <a:gd name="adj" fmla="val 7692"/>
             </a:avLst>
           </a:prstGeom>
           <a:solidFill>
@@ -16300,14 +17102,14 @@
       </p:sp>
       <p:sp>
         <p:nvSpPr>
-          <p:cNvPr id="42" name="Text 40"/>
-          <p:cNvSpPr/>
-          <p:nvPr/>
-        </p:nvSpPr>
-        <p:spPr>
-          <a:xfrm>
-            <a:off x="3033522" y="4169664"/>
-            <a:ext cx="685800" cy="384048"/>
+          <p:cNvPr id="48" name="Text 46"/>
+          <p:cNvSpPr/>
+          <p:nvPr/>
+        </p:nvSpPr>
+        <p:spPr>
+          <a:xfrm>
+            <a:off x="2677363" y="4169664"/>
+            <a:ext cx="676656" cy="475488"/>
           </a:xfrm>
           <a:prstGeom prst="rect">
             <a:avLst/>
@@ -16331,7 +17133,7 @@
                 <a:ea typeface="Trebuchet MS" pitchFamily="34" charset="-122"/>
                 <a:cs typeface="Trebuchet MS" pitchFamily="34" charset="-120"/>
               </a:rPr>
-              <a:t>u</a:t>
+              <a:t>o</a:t>
             </a:r>
             <a:endParaRPr lang="en-US" sz="900" dirty="0"/>
           </a:p>
@@ -16339,18 +17141,18 @@
       </p:sp>
       <p:sp>
         <p:nvSpPr>
-          <p:cNvPr id="43" name="Shape 41"/>
-          <p:cNvSpPr/>
-          <p:nvPr/>
-        </p:nvSpPr>
-        <p:spPr>
-          <a:xfrm>
-            <a:off x="3942207" y="4169664"/>
-            <a:ext cx="685800" cy="384048"/>
+          <p:cNvPr id="49" name="Shape 47"/>
+          <p:cNvSpPr/>
+          <p:nvPr/>
+        </p:nvSpPr>
+        <p:spPr>
+          <a:xfrm>
+            <a:off x="3403397" y="4169664"/>
+            <a:ext cx="676656" cy="475488"/>
           </a:xfrm>
           <a:prstGeom prst="rect">
             <a:avLst>
-              <a:gd name="adj" fmla="val 9524"/>
+              <a:gd name="adj" fmla="val 7692"/>
             </a:avLst>
           </a:prstGeom>
           <a:solidFill>
@@ -16366,14 +17168,14 @@
       </p:sp>
       <p:sp>
         <p:nvSpPr>
-          <p:cNvPr id="44" name="Text 42"/>
-          <p:cNvSpPr/>
-          <p:nvPr/>
-        </p:nvSpPr>
-        <p:spPr>
-          <a:xfrm>
-            <a:off x="3942207" y="4169664"/>
-            <a:ext cx="685800" cy="384048"/>
+          <p:cNvPr id="50" name="Text 48"/>
+          <p:cNvSpPr/>
+          <p:nvPr/>
+        </p:nvSpPr>
+        <p:spPr>
+          <a:xfrm>
+            <a:off x="3403397" y="4169664"/>
+            <a:ext cx="676656" cy="475488"/>
           </a:xfrm>
           <a:prstGeom prst="rect">
             <a:avLst/>
@@ -16397,7 +17199,7 @@
                 <a:ea typeface="Trebuchet MS" pitchFamily="34" charset="-122"/>
                 <a:cs typeface="Trebuchet MS" pitchFamily="34" charset="-120"/>
               </a:rPr>
-              <a:t>b</a:t>
+              <a:t>mm</a:t>
             </a:r>
             <a:endParaRPr lang="en-US" sz="900" dirty="0"/>
           </a:p>
@@ -16405,18 +17207,18 @@
       </p:sp>
       <p:sp>
         <p:nvSpPr>
-          <p:cNvPr id="45" name="Shape 43"/>
-          <p:cNvSpPr/>
-          <p:nvPr/>
-        </p:nvSpPr>
-        <p:spPr>
-          <a:xfrm>
-            <a:off x="4850892" y="4169664"/>
-            <a:ext cx="685800" cy="384048"/>
+          <p:cNvPr id="51" name="Shape 49"/>
+          <p:cNvSpPr/>
+          <p:nvPr/>
+        </p:nvSpPr>
+        <p:spPr>
+          <a:xfrm>
+            <a:off x="4129430" y="4169664"/>
+            <a:ext cx="676656" cy="475488"/>
           </a:xfrm>
           <a:prstGeom prst="rect">
             <a:avLst>
-              <a:gd name="adj" fmla="val 9524"/>
+              <a:gd name="adj" fmla="val 7692"/>
             </a:avLst>
           </a:prstGeom>
           <a:solidFill>
@@ -16432,14 +17234,14 @@
       </p:sp>
       <p:sp>
         <p:nvSpPr>
-          <p:cNvPr id="46" name="Text 44"/>
-          <p:cNvSpPr/>
-          <p:nvPr/>
-        </p:nvSpPr>
-        <p:spPr>
-          <a:xfrm>
-            <a:off x="4850892" y="4169664"/>
-            <a:ext cx="685800" cy="384048"/>
+          <p:cNvPr id="52" name="Text 50"/>
+          <p:cNvSpPr/>
+          <p:nvPr/>
+        </p:nvSpPr>
+        <p:spPr>
+          <a:xfrm>
+            <a:off x="4129430" y="4169664"/>
+            <a:ext cx="676656" cy="475488"/>
           </a:xfrm>
           <a:prstGeom prst="rect">
             <a:avLst/>
@@ -16463,7 +17265,7 @@
                 <a:ea typeface="Trebuchet MS" pitchFamily="34" charset="-122"/>
                 <a:cs typeface="Trebuchet MS" pitchFamily="34" charset="-120"/>
               </a:rPr>
-              <a:t>m</a:t>
+              <a:t>i</a:t>
             </a:r>
             <a:endParaRPr lang="en-US" sz="900" dirty="0"/>
           </a:p>
@@ -16471,18 +17273,18 @@
       </p:sp>
       <p:sp>
         <p:nvSpPr>
-          <p:cNvPr id="47" name="Shape 45"/>
-          <p:cNvSpPr/>
-          <p:nvPr/>
-        </p:nvSpPr>
-        <p:spPr>
-          <a:xfrm>
-            <a:off x="5759577" y="4169664"/>
-            <a:ext cx="685800" cy="384048"/>
+          <p:cNvPr id="53" name="Shape 51"/>
+          <p:cNvSpPr/>
+          <p:nvPr/>
+        </p:nvSpPr>
+        <p:spPr>
+          <a:xfrm>
+            <a:off x="4855464" y="4169664"/>
+            <a:ext cx="676656" cy="475488"/>
           </a:xfrm>
           <a:prstGeom prst="rect">
             <a:avLst>
-              <a:gd name="adj" fmla="val 9524"/>
+              <a:gd name="adj" fmla="val 7692"/>
             </a:avLst>
           </a:prstGeom>
           <a:solidFill>
@@ -16498,14 +17300,14 @@
       </p:sp>
       <p:sp>
         <p:nvSpPr>
-          <p:cNvPr id="48" name="Text 46"/>
-          <p:cNvSpPr/>
-          <p:nvPr/>
-        </p:nvSpPr>
-        <p:spPr>
-          <a:xfrm>
-            <a:off x="5759577" y="4169664"/>
-            <a:ext cx="685800" cy="384048"/>
+          <p:cNvPr id="54" name="Text 52"/>
+          <p:cNvSpPr/>
+          <p:nvPr/>
+        </p:nvSpPr>
+        <p:spPr>
+          <a:xfrm>
+            <a:off x="4855464" y="4169664"/>
+            <a:ext cx="676656" cy="475488"/>
           </a:xfrm>
           <a:prstGeom prst="rect">
             <a:avLst/>
@@ -16529,7 +17331,7 @@
                 <a:ea typeface="Trebuchet MS" pitchFamily="34" charset="-122"/>
                 <a:cs typeface="Trebuchet MS" pitchFamily="34" charset="-120"/>
               </a:rPr>
-              <a:t>i</a:t>
+              <a:t>ssi</a:t>
             </a:r>
             <a:endParaRPr lang="en-US" sz="900" dirty="0"/>
           </a:p>
@@ -16537,18 +17339,18 @@
       </p:sp>
       <p:sp>
         <p:nvSpPr>
-          <p:cNvPr id="49" name="Shape 47"/>
-          <p:cNvSpPr/>
-          <p:nvPr/>
-        </p:nvSpPr>
-        <p:spPr>
-          <a:xfrm>
-            <a:off x="6668262" y="4169664"/>
-            <a:ext cx="685800" cy="384048"/>
+          <p:cNvPr id="55" name="Shape 53"/>
+          <p:cNvSpPr/>
+          <p:nvPr/>
+        </p:nvSpPr>
+        <p:spPr>
+          <a:xfrm>
+            <a:off x="5581498" y="4169664"/>
+            <a:ext cx="676656" cy="475488"/>
           </a:xfrm>
           <a:prstGeom prst="rect">
             <a:avLst>
-              <a:gd name="adj" fmla="val 9524"/>
+              <a:gd name="adj" fmla="val 7692"/>
             </a:avLst>
           </a:prstGeom>
           <a:solidFill>
@@ -16564,14 +17366,14 @@
       </p:sp>
       <p:sp>
         <p:nvSpPr>
-          <p:cNvPr id="50" name="Text 48"/>
-          <p:cNvSpPr/>
-          <p:nvPr/>
-        </p:nvSpPr>
-        <p:spPr>
-          <a:xfrm>
-            <a:off x="6668262" y="4169664"/>
-            <a:ext cx="685800" cy="384048"/>
+          <p:cNvPr id="56" name="Text 54"/>
+          <p:cNvSpPr/>
+          <p:nvPr/>
+        </p:nvSpPr>
+        <p:spPr>
+          <a:xfrm>
+            <a:off x="5581498" y="4169664"/>
+            <a:ext cx="676656" cy="475488"/>
           </a:xfrm>
           <a:prstGeom prst="rect">
             <a:avLst/>
@@ -16595,7 +17397,7 @@
                 <a:ea typeface="Trebuchet MS" pitchFamily="34" charset="-122"/>
                 <a:cs typeface="Trebuchet MS" pitchFamily="34" charset="-120"/>
               </a:rPr>
-              <a:t>ss</a:t>
+              <a:t>o</a:t>
             </a:r>
             <a:endParaRPr lang="en-US" sz="900" dirty="0"/>
           </a:p>
@@ -16603,18 +17405,18 @@
       </p:sp>
       <p:sp>
         <p:nvSpPr>
-          <p:cNvPr id="51" name="Shape 49"/>
-          <p:cNvSpPr/>
-          <p:nvPr/>
-        </p:nvSpPr>
-        <p:spPr>
-          <a:xfrm>
-            <a:off x="7576947" y="4169664"/>
-            <a:ext cx="685800" cy="384048"/>
+          <p:cNvPr id="57" name="Shape 55"/>
+          <p:cNvSpPr/>
+          <p:nvPr/>
+        </p:nvSpPr>
+        <p:spPr>
+          <a:xfrm>
+            <a:off x="6307531" y="4169664"/>
+            <a:ext cx="676656" cy="475488"/>
           </a:xfrm>
           <a:prstGeom prst="rect">
             <a:avLst>
-              <a:gd name="adj" fmla="val 9524"/>
+              <a:gd name="adj" fmla="val 7692"/>
             </a:avLst>
           </a:prstGeom>
           <a:solidFill>
@@ -16630,14 +17432,14 @@
       </p:sp>
       <p:sp>
         <p:nvSpPr>
-          <p:cNvPr id="52" name="Text 50"/>
-          <p:cNvSpPr/>
-          <p:nvPr/>
-        </p:nvSpPr>
-        <p:spPr>
-          <a:xfrm>
-            <a:off x="7576947" y="4169664"/>
-            <a:ext cx="685800" cy="384048"/>
+          <p:cNvPr id="58" name="Text 56"/>
+          <p:cNvSpPr/>
+          <p:nvPr/>
+        </p:nvSpPr>
+        <p:spPr>
+          <a:xfrm>
+            <a:off x="6307531" y="4169664"/>
+            <a:ext cx="676656" cy="475488"/>
           </a:xfrm>
           <a:prstGeom prst="rect">
             <a:avLst/>
@@ -16661,7 +17463,7 @@
                 <a:ea typeface="Trebuchet MS" pitchFamily="34" charset="-122"/>
                 <a:cs typeface="Trebuchet MS" pitchFamily="34" charset="-120"/>
               </a:rPr>
-              <a:t>ion</a:t>
+              <a:t>n</a:t>
             </a:r>
             <a:endParaRPr lang="en-US" sz="900" dirty="0"/>
           </a:p>
@@ -16669,40 +17471,133 @@
       </p:sp>
       <p:sp>
         <p:nvSpPr>
-          <p:cNvPr id="53" name="Text 51"/>
-          <p:cNvSpPr/>
-          <p:nvPr/>
-        </p:nvSpPr>
-        <p:spPr>
-          <a:xfrm>
-            <a:off x="7576947" y="4572000"/>
-            <a:ext cx="685800" cy="219456"/>
-          </a:xfrm>
-          <a:prstGeom prst="rect">
-            <a:avLst/>
-          </a:prstGeom>
-          <a:noFill/>
-          <a:ln/>
-        </p:spPr>
-        <p:txBody>
-          <a:bodyPr wrap="square" lIns="0" tIns="0" rIns="0" bIns="0" rtlCol="0" anchor="t"/>
-          <a:lstStyle/>
-          <a:p>
-            <a:pPr algn="ctr" indent="0" marL="0">
-              <a:buNone/>
-            </a:pPr>
-            <a:r>
-              <a:rPr lang="en-US" sz="750" i="1" dirty="0">
-                <a:solidFill>
-                  <a:srgbClr val="94A3B8"/>
-                </a:solidFill>
-                <a:latin typeface="Calibri" pitchFamily="34" charset="0"/>
-                <a:ea typeface="Calibri" pitchFamily="34" charset="-122"/>
-                <a:cs typeface="Calibri" pitchFamily="34" charset="-120"/>
-              </a:rPr>
-              <a:t>/shun/</a:t>
-            </a:r>
-            <a:endParaRPr lang="en-US" sz="750" dirty="0"/>
+          <p:cNvPr id="59" name="Shape 57"/>
+          <p:cNvSpPr/>
+          <p:nvPr/>
+        </p:nvSpPr>
+        <p:spPr>
+          <a:xfrm>
+            <a:off x="7033565" y="4169664"/>
+            <a:ext cx="676656" cy="475488"/>
+          </a:xfrm>
+          <a:prstGeom prst="rect">
+            <a:avLst>
+              <a:gd name="adj" fmla="val 7692"/>
+            </a:avLst>
+          </a:prstGeom>
+          <a:solidFill>
+            <a:srgbClr val="FFFFFF"/>
+          </a:solidFill>
+          <a:ln w="12700">
+            <a:solidFill>
+              <a:srgbClr val="DB2777"/>
+            </a:solidFill>
+            <a:prstDash val="solid"/>
+          </a:ln>
+        </p:spPr>
+      </p:sp>
+      <p:sp>
+        <p:nvSpPr>
+          <p:cNvPr id="60" name="Text 58"/>
+          <p:cNvSpPr/>
+          <p:nvPr/>
+        </p:nvSpPr>
+        <p:spPr>
+          <a:xfrm>
+            <a:off x="7033565" y="4169664"/>
+            <a:ext cx="676656" cy="475488"/>
+          </a:xfrm>
+          <a:prstGeom prst="rect">
+            <a:avLst/>
+          </a:prstGeom>
+          <a:noFill/>
+          <a:ln/>
+        </p:spPr>
+        <p:txBody>
+          <a:bodyPr wrap="square" lIns="0" tIns="0" rIns="0" bIns="0" rtlCol="0" anchor="ctr"/>
+          <a:lstStyle/>
+          <a:p>
+            <a:pPr algn="ctr" indent="0" marL="0">
+              <a:buNone/>
+            </a:pPr>
+            <a:r>
+              <a:rPr lang="en-US" sz="900" b="1" dirty="0">
+                <a:solidFill>
+                  <a:srgbClr val="9D174D"/>
+                </a:solidFill>
+                <a:latin typeface="Trebuchet MS" pitchFamily="34" charset="0"/>
+                <a:ea typeface="Trebuchet MS" pitchFamily="34" charset="-122"/>
+                <a:cs typeface="Trebuchet MS" pitchFamily="34" charset="-120"/>
+              </a:rPr>
+              <a:t>i</a:t>
+            </a:r>
+            <a:endParaRPr lang="en-US" sz="900" dirty="0"/>
+          </a:p>
+        </p:txBody>
+      </p:sp>
+      <p:sp>
+        <p:nvSpPr>
+          <p:cNvPr id="61" name="Shape 59"/>
+          <p:cNvSpPr/>
+          <p:nvPr/>
+        </p:nvSpPr>
+        <p:spPr>
+          <a:xfrm>
+            <a:off x="7759598" y="4169664"/>
+            <a:ext cx="676656" cy="475488"/>
+          </a:xfrm>
+          <a:prstGeom prst="rect">
+            <a:avLst>
+              <a:gd name="adj" fmla="val 7692"/>
+            </a:avLst>
+          </a:prstGeom>
+          <a:solidFill>
+            <a:srgbClr val="FFFFFF"/>
+          </a:solidFill>
+          <a:ln w="12700">
+            <a:solidFill>
+              <a:srgbClr val="DB2777"/>
+            </a:solidFill>
+            <a:prstDash val="solid"/>
+          </a:ln>
+        </p:spPr>
+      </p:sp>
+      <p:sp>
+        <p:nvSpPr>
+          <p:cNvPr id="62" name="Text 60"/>
+          <p:cNvSpPr/>
+          <p:nvPr/>
+        </p:nvSpPr>
+        <p:spPr>
+          <a:xfrm>
+            <a:off x="7759598" y="4169664"/>
+            <a:ext cx="676656" cy="475488"/>
+          </a:xfrm>
+          <a:prstGeom prst="rect">
+            <a:avLst/>
+          </a:prstGeom>
+          <a:noFill/>
+          <a:ln/>
+        </p:spPr>
+        <p:txBody>
+          <a:bodyPr wrap="square" lIns="0" tIns="0" rIns="0" bIns="0" rtlCol="0" anchor="ctr"/>
+          <a:lstStyle/>
+          <a:p>
+            <a:pPr algn="ctr" indent="0" marL="0">
+              <a:buNone/>
+            </a:pPr>
+            <a:r>
+              <a:rPr lang="en-US" sz="900" b="1" dirty="0">
+                <a:solidFill>
+                  <a:srgbClr val="9D174D"/>
+                </a:solidFill>
+                <a:latin typeface="Trebuchet MS" pitchFamily="34" charset="0"/>
+                <a:ea typeface="Trebuchet MS" pitchFamily="34" charset="-122"/>
+                <a:cs typeface="Trebuchet MS" pitchFamily="34" charset="-120"/>
+              </a:rPr>
+              <a:t>ng</a:t>
+            </a:r>
+            <a:endParaRPr lang="en-US" sz="900" dirty="0"/>
           </a:p>
         </p:txBody>
       </p:sp>
@@ -17274,7 +18169,7 @@
                 <a:ea typeface="Calibri" pitchFamily="34" charset="-122"/>
                 <a:cs typeface="Calibri" pitchFamily="34" charset="-120"/>
               </a:rPr>
-              <a:t>Word Labs  •  wordlabs.app  •  Root: 'miss' = send, let go, release</a:t>
+              <a:t>Word Labs  •  wordlabs.app  •  Root: 'miss' = send</a:t>
             </a:r>
             <a:endParaRPr lang="en-US" sz="800" dirty="0"/>
           </a:p>
@@ -17608,7 +18503,7 @@
                 <a:ea typeface="Trebuchet MS" pitchFamily="34" charset="-122"/>
                 <a:cs typeface="Trebuchet MS" pitchFamily="34" charset="-120"/>
               </a:rPr>
-              <a:t>2</a:t>
+              <a:t>0</a:t>
             </a:r>
             <a:pPr algn="ctr" indent="0" marL="0">
               <a:buNone/>
@@ -17622,7 +18517,7 @@
                 <a:ea typeface="Trebuchet MS" pitchFamily="34" charset="-122"/>
                 <a:cs typeface="Trebuchet MS" pitchFamily="34" charset="-120"/>
               </a:rPr>
-              <a:t>  punctuation marks</a:t>
+              <a:t>  punctuation mark</a:t>
             </a:r>
             <a:endParaRPr lang="en-US" sz="2800" dirty="0"/>
           </a:p>
@@ -17914,7 +18809,7 @@
                 <a:ea typeface="Calibri" pitchFamily="34" charset="-122"/>
                 <a:cs typeface="Calibri" pitchFamily="34" charset="-120"/>
               </a:rPr>
-              <a:t>Word Labs  •  wordlabs.app  •  Root: 'miss' = send, let go, release</a:t>
+              <a:t>Word Labs  •  wordlabs.app  •  Root: 'miss' = send</a:t>
             </a:r>
             <a:endParaRPr lang="en-US" sz="800" dirty="0"/>
           </a:p>
@@ -18026,7 +18921,7 @@
                 <a:ea typeface="Calibri" pitchFamily="34" charset="-122"/>
                 <a:cs typeface="Calibri" pitchFamily="34" charset="-120"/>
               </a:rPr>
-              <a:t>The </a:t>
+              <a:t>The satellite sent </a:t>
             </a:r>
             <a:pPr algn="l" indent="0" marL="0">
               <a:buNone/>
@@ -18043,7 +18938,7 @@
                 <a:ea typeface="Calibri" pitchFamily="34" charset="-122"/>
                 <a:cs typeface="Calibri" pitchFamily="34" charset="-120"/>
               </a:rPr>
-              <a:t>commissioner</a:t>
+              <a:t>transmissions</a:t>
             </a:r>
             <a:pPr algn="l" indent="0" marL="0">
               <a:buNone/>
@@ -18057,7 +18952,7 @@
                 <a:ea typeface="Calibri" pitchFamily="34" charset="-122"/>
                 <a:cs typeface="Calibri" pitchFamily="34" charset="-120"/>
               </a:rPr>
-              <a:t> announced the new </a:t>
+              <a:t> back to Earth every hour. The factory reduced its carbon </a:t>
             </a:r>
             <a:pPr algn="l" indent="0" marL="0">
               <a:buNone/>
@@ -18074,7 +18969,7 @@
                 <a:ea typeface="Calibri" pitchFamily="34" charset="-122"/>
                 <a:cs typeface="Calibri" pitchFamily="34" charset="-120"/>
               </a:rPr>
-              <a:t>mission</a:t>
+              <a:t>emission</a:t>
             </a:r>
             <a:pPr algn="l" indent="0" marL="0">
               <a:buNone/>
@@ -18088,7 +18983,7 @@
                 <a:ea typeface="Calibri" pitchFamily="34" charset="-122"/>
                 <a:cs typeface="Calibri" pitchFamily="34" charset="-120"/>
               </a:rPr>
-              <a:t>; however, </a:t>
+              <a:t> after installing new filters. Cars produce </a:t>
             </a:r>
             <a:pPr algn="l" indent="0" marL="0">
               <a:buNone/>
@@ -18105,7 +19000,7 @@
                 <a:ea typeface="Calibri" pitchFamily="34" charset="-122"/>
                 <a:cs typeface="Calibri" pitchFamily="34" charset="-120"/>
               </a:rPr>
-              <a:t>admission</a:t>
+              <a:t>emissions</a:t>
             </a:r>
             <a:pPr algn="l" indent="0" marL="0">
               <a:buNone/>
@@ -18119,7 +19014,7 @@
                 <a:ea typeface="Calibri" pitchFamily="34" charset="-122"/>
                 <a:cs typeface="Calibri" pitchFamily="34" charset="-120"/>
               </a:rPr>
-              <a:t> to the briefing was limited to senior staff.</a:t>
+              <a:t> that can pollute the air.</a:t>
             </a:r>
             <a:endParaRPr lang="en-US" sz="1800" dirty="0"/>
           </a:p>
@@ -18274,7 +19169,7 @@
                 <a:ea typeface="Trebuchet MS" pitchFamily="34" charset="-122"/>
                 <a:cs typeface="Trebuchet MS" pitchFamily="34" charset="-120"/>
               </a:rPr>
-              <a:t>commissioner</a:t>
+              <a:t>transmissions</a:t>
             </a:r>
             <a:endParaRPr lang="en-US" sz="1400" dirty="0"/>
           </a:p>
@@ -18402,7 +19297,7 @@
                 <a:ea typeface="Trebuchet MS" pitchFamily="34" charset="-122"/>
                 <a:cs typeface="Trebuchet MS" pitchFamily="34" charset="-120"/>
               </a:rPr>
-              <a:t>mission</a:t>
+              <a:t>emission</a:t>
             </a:r>
             <a:endParaRPr lang="en-US" sz="1400" dirty="0"/>
           </a:p>
@@ -18530,7 +19425,7 @@
                 <a:ea typeface="Trebuchet MS" pitchFamily="34" charset="-122"/>
                 <a:cs typeface="Trebuchet MS" pitchFamily="34" charset="-120"/>
               </a:rPr>
-              <a:t>admission</a:t>
+              <a:t>emissions</a:t>
             </a:r>
             <a:endParaRPr lang="en-US" sz="1400" dirty="0"/>
           </a:p>
@@ -18861,7 +19756,7 @@
                 <a:ea typeface="Calibri" pitchFamily="34" charset="-122"/>
                 <a:cs typeface="Calibri" pitchFamily="34" charset="-120"/>
               </a:rPr>
-              <a:t>Word Labs  •  wordlabs.app  •  Root: 'miss' = send, let go, release</a:t>
+              <a:t>Word Labs  •  wordlabs.app  •  Root: 'miss' = send</a:t>
             </a:r>
             <a:endParaRPr lang="en-US" sz="800" dirty="0"/>
           </a:p>
@@ -19000,7 +19895,7 @@
                 <a:ea typeface="Trebuchet MS" pitchFamily="34" charset="-122"/>
                 <a:cs typeface="Trebuchet MS" pitchFamily="34" charset="-120"/>
               </a:rPr>
-              <a:t>commissioner</a:t>
+              <a:t>transmissions</a:t>
             </a:r>
             <a:endParaRPr lang="en-US" sz="2800" dirty="0"/>
           </a:p>
@@ -19688,7 +20583,7 @@
                 <a:ea typeface="Calibri" pitchFamily="34" charset="-122"/>
                 <a:cs typeface="Calibri" pitchFamily="34" charset="-120"/>
               </a:rPr>
-              <a:t>Word Labs  •  wordlabs.app  •  Root: 'miss' = send, let go, release</a:t>
+              <a:t>Word Labs  •  wordlabs.app  •  Root: 'miss' = send</a:t>
             </a:r>
             <a:endParaRPr lang="en-US" sz="800" dirty="0"/>
           </a:p>
@@ -19827,7 +20722,7 @@
                 <a:ea typeface="Trebuchet MS" pitchFamily="34" charset="-122"/>
                 <a:cs typeface="Trebuchet MS" pitchFamily="34" charset="-120"/>
               </a:rPr>
-              <a:t>commissioner</a:t>
+              <a:t>transmissions</a:t>
             </a:r>
             <a:endParaRPr lang="en-US" sz="2800" dirty="0"/>
           </a:p>
@@ -19966,7 +20861,7 @@
                 <a:ea typeface="Trebuchet MS" pitchFamily="34" charset="-122"/>
                 <a:cs typeface="Trebuchet MS" pitchFamily="34" charset="-120"/>
               </a:rPr>
-              <a:t>com</a:t>
+              <a:t>trans</a:t>
             </a:r>
             <a:endParaRPr lang="en-US" sz="1300" dirty="0"/>
           </a:p>
@@ -20005,7 +20900,7 @@
                 <a:ea typeface="Calibri" pitchFamily="34" charset="-122"/>
                 <a:cs typeface="Calibri" pitchFamily="34" charset="-120"/>
               </a:rPr>
-              <a:t>together, with</a:t>
+              <a:t>across</a:t>
             </a:r>
             <a:endParaRPr lang="en-US" sz="850" dirty="0"/>
           </a:p>
@@ -20117,7 +21012,7 @@
                 <a:ea typeface="Calibri" pitchFamily="34" charset="-122"/>
                 <a:cs typeface="Calibri" pitchFamily="34" charset="-120"/>
               </a:rPr>
-              <a:t>send, let go</a:t>
+              <a:t>send</a:t>
             </a:r>
             <a:endParaRPr lang="en-US" sz="850" dirty="0"/>
           </a:p>
@@ -20229,7 +21124,7 @@
                 <a:ea typeface="Calibri" pitchFamily="34" charset="-122"/>
                 <a:cs typeface="Calibri" pitchFamily="34" charset="-120"/>
               </a:rPr>
-              <a:t>act or state of</a:t>
+              <a:t>act or result of</a:t>
             </a:r>
             <a:endParaRPr lang="en-US" sz="850" dirty="0"/>
           </a:p>
@@ -20302,7 +21197,7 @@
                 <a:ea typeface="Trebuchet MS" pitchFamily="34" charset="-122"/>
                 <a:cs typeface="Trebuchet MS" pitchFamily="34" charset="-120"/>
               </a:rPr>
-              <a:t>er</a:t>
+              <a:t>s</a:t>
             </a:r>
             <a:endParaRPr lang="en-US" sz="1300" dirty="0"/>
           </a:p>
@@ -20341,7 +21236,7 @@
                 <a:ea typeface="Calibri" pitchFamily="34" charset="-122"/>
                 <a:cs typeface="Calibri" pitchFamily="34" charset="-120"/>
               </a:rPr>
-              <a:t>person who does</a:t>
+              <a:t>plural or present tense</a:t>
             </a:r>
             <a:endParaRPr lang="en-US" sz="850" dirty="0"/>
           </a:p>
@@ -20897,7 +21792,7 @@
                 <a:ea typeface="Calibri" pitchFamily="34" charset="-122"/>
                 <a:cs typeface="Calibri" pitchFamily="34" charset="-120"/>
               </a:rPr>
-              <a:t>Word Labs  •  wordlabs.app  •  Root: 'miss' = send, let go, release</a:t>
+              <a:t>Word Labs  •  wordlabs.app  •  Root: 'miss' = send</a:t>
             </a:r>
             <a:endParaRPr lang="en-US" sz="800" dirty="0"/>
           </a:p>
@@ -21036,7 +21931,7 @@
                 <a:ea typeface="Trebuchet MS" pitchFamily="34" charset="-122"/>
                 <a:cs typeface="Trebuchet MS" pitchFamily="34" charset="-120"/>
               </a:rPr>
-              <a:t>commissioner</a:t>
+              <a:t>transmissions</a:t>
             </a:r>
             <a:endParaRPr lang="en-US" sz="2800" dirty="0"/>
           </a:p>
@@ -21175,7 +22070,7 @@
                 <a:ea typeface="Trebuchet MS" pitchFamily="34" charset="-122"/>
                 <a:cs typeface="Trebuchet MS" pitchFamily="34" charset="-120"/>
               </a:rPr>
-              <a:t>com</a:t>
+              <a:t>trans</a:t>
             </a:r>
             <a:endParaRPr lang="en-US" sz="1300" dirty="0"/>
           </a:p>
@@ -21214,7 +22109,7 @@
                 <a:ea typeface="Calibri" pitchFamily="34" charset="-122"/>
                 <a:cs typeface="Calibri" pitchFamily="34" charset="-120"/>
               </a:rPr>
-              <a:t>together, with</a:t>
+              <a:t>across</a:t>
             </a:r>
             <a:endParaRPr lang="en-US" sz="850" dirty="0"/>
           </a:p>
@@ -21326,7 +22221,7 @@
                 <a:ea typeface="Calibri" pitchFamily="34" charset="-122"/>
                 <a:cs typeface="Calibri" pitchFamily="34" charset="-120"/>
               </a:rPr>
-              <a:t>send, let go</a:t>
+              <a:t>send</a:t>
             </a:r>
             <a:endParaRPr lang="en-US" sz="850" dirty="0"/>
           </a:p>
@@ -21438,7 +22333,7 @@
                 <a:ea typeface="Calibri" pitchFamily="34" charset="-122"/>
                 <a:cs typeface="Calibri" pitchFamily="34" charset="-120"/>
               </a:rPr>
-              <a:t>act or state of</a:t>
+              <a:t>act or result of</a:t>
             </a:r>
             <a:endParaRPr lang="en-US" sz="850" dirty="0"/>
           </a:p>
@@ -21511,7 +22406,7 @@
                 <a:ea typeface="Trebuchet MS" pitchFamily="34" charset="-122"/>
                 <a:cs typeface="Trebuchet MS" pitchFamily="34" charset="-120"/>
               </a:rPr>
-              <a:t>er</a:t>
+              <a:t>s</a:t>
             </a:r>
             <a:endParaRPr lang="en-US" sz="1300" dirty="0"/>
           </a:p>
@@ -21550,7 +22445,7 @@
                 <a:ea typeface="Calibri" pitchFamily="34" charset="-122"/>
                 <a:cs typeface="Calibri" pitchFamily="34" charset="-120"/>
               </a:rPr>
-              <a:t>person who does</a:t>
+              <a:t>plural or present tense</a:t>
             </a:r>
             <a:endParaRPr lang="en-US" sz="850" dirty="0"/>
           </a:p>
@@ -21657,8 +22552,8 @@
         </p:nvSpPr>
         <p:spPr>
           <a:xfrm>
-            <a:off x="1975104" y="3364992"/>
-            <a:ext cx="1554480" cy="475488"/>
+            <a:off x="2313432" y="3364992"/>
+            <a:ext cx="1645920" cy="475488"/>
           </a:xfrm>
           <a:prstGeom prst="rect">
             <a:avLst>
@@ -21684,8 +22579,8 @@
         </p:nvSpPr>
         <p:spPr>
           <a:xfrm>
-            <a:off x="1975104" y="3364992"/>
-            <a:ext cx="1554480" cy="475488"/>
+            <a:off x="2313432" y="3364992"/>
+            <a:ext cx="1645920" cy="475488"/>
           </a:xfrm>
           <a:prstGeom prst="rect">
             <a:avLst/>
@@ -21709,7 +22604,7 @@
                 <a:ea typeface="Trebuchet MS" pitchFamily="34" charset="-122"/>
                 <a:cs typeface="Trebuchet MS" pitchFamily="34" charset="-120"/>
               </a:rPr>
-              <a:t>com</a:t>
+              <a:t>trans</a:t>
             </a:r>
             <a:endParaRPr lang="en-US" sz="1400" dirty="0"/>
           </a:p>
@@ -21723,8 +22618,8 @@
         </p:nvSpPr>
         <p:spPr>
           <a:xfrm>
-            <a:off x="3529584" y="3364992"/>
-            <a:ext cx="73152" cy="475488"/>
+            <a:off x="3959352" y="3364992"/>
+            <a:ext cx="411480" cy="475488"/>
           </a:xfrm>
           <a:prstGeom prst="rect">
             <a:avLst/>
@@ -21762,8 +22657,8 @@
         </p:nvSpPr>
         <p:spPr>
           <a:xfrm>
-            <a:off x="3602736" y="3364992"/>
-            <a:ext cx="1554480" cy="475488"/>
+            <a:off x="4370832" y="3364992"/>
+            <a:ext cx="1645920" cy="475488"/>
           </a:xfrm>
           <a:prstGeom prst="rect">
             <a:avLst>
@@ -21789,8 +22684,8 @@
         </p:nvSpPr>
         <p:spPr>
           <a:xfrm>
-            <a:off x="3602736" y="3364992"/>
-            <a:ext cx="1554480" cy="475488"/>
+            <a:off x="4370832" y="3364992"/>
+            <a:ext cx="1645920" cy="475488"/>
           </a:xfrm>
           <a:prstGeom prst="rect">
             <a:avLst/>
@@ -21828,8 +22723,8 @@
         </p:nvSpPr>
         <p:spPr>
           <a:xfrm>
-            <a:off x="5157216" y="3364992"/>
-            <a:ext cx="73152" cy="475488"/>
+            <a:off x="6016752" y="3364992"/>
+            <a:ext cx="411480" cy="475488"/>
           </a:xfrm>
           <a:prstGeom prst="rect">
             <a:avLst/>
@@ -21867,8 +22762,8 @@
         </p:nvSpPr>
         <p:spPr>
           <a:xfrm>
-            <a:off x="5230368" y="3364992"/>
-            <a:ext cx="1554480" cy="475488"/>
+            <a:off x="6428232" y="3364992"/>
+            <a:ext cx="1645920" cy="475488"/>
           </a:xfrm>
           <a:prstGeom prst="rect">
             <a:avLst>
@@ -21894,8 +22789,8 @@
         </p:nvSpPr>
         <p:spPr>
           <a:xfrm>
-            <a:off x="5230368" y="3364992"/>
-            <a:ext cx="1554480" cy="475488"/>
+            <a:off x="6428232" y="3364992"/>
+            <a:ext cx="1645920" cy="475488"/>
           </a:xfrm>
           <a:prstGeom prst="rect">
             <a:avLst/>
@@ -21919,7 +22814,7 @@
                 <a:ea typeface="Trebuchet MS" pitchFamily="34" charset="-122"/>
                 <a:cs typeface="Trebuchet MS" pitchFamily="34" charset="-120"/>
               </a:rPr>
-              <a:t>sion</a:t>
+              <a:t>sions</a:t>
             </a:r>
             <a:endParaRPr lang="en-US" sz="1400" dirty="0"/>
           </a:p>
@@ -21927,119 +22822,80 @@
       </p:sp>
       <p:sp>
         <p:nvSpPr>
-          <p:cNvPr id="39" name="Text 37"/>
-          <p:cNvSpPr/>
-          <p:nvPr/>
-        </p:nvSpPr>
-        <p:spPr>
-          <a:xfrm>
-            <a:off x="6784848" y="3364992"/>
-            <a:ext cx="73152" cy="475488"/>
-          </a:xfrm>
-          <a:prstGeom prst="rect">
-            <a:avLst/>
-          </a:prstGeom>
-          <a:noFill/>
-          <a:ln/>
-        </p:spPr>
-        <p:txBody>
-          <a:bodyPr wrap="square" lIns="0" tIns="0" rIns="0" bIns="0" rtlCol="0" anchor="ctr"/>
-          <a:lstStyle/>
-          <a:p>
-            <a:pPr algn="ctr" indent="0" marL="0">
-              <a:buNone/>
-            </a:pPr>
-            <a:r>
-              <a:rPr lang="en-US" sz="1600" b="1" dirty="0">
-                <a:solidFill>
-                  <a:srgbClr val="0D9488"/>
+          <p:cNvPr id="39" name="Shape 37"/>
+          <p:cNvSpPr/>
+          <p:nvPr/>
+        </p:nvSpPr>
+        <p:spPr>
+          <a:xfrm>
+            <a:off x="365760" y="4096512"/>
+            <a:ext cx="1371600" cy="804672"/>
+          </a:xfrm>
+          <a:prstGeom prst="rect">
+            <a:avLst>
+              <a:gd name="adj" fmla="val 6818"/>
+            </a:avLst>
+          </a:prstGeom>
+          <a:solidFill>
+            <a:srgbClr val="E2E8F0"/>
+          </a:solidFill>
+          <a:ln w="12700">
+            <a:solidFill>
+              <a:srgbClr val="E2E8F0"/>
+            </a:solidFill>
+            <a:prstDash val="solid"/>
+          </a:ln>
+        </p:spPr>
+      </p:sp>
+      <p:sp>
+        <p:nvSpPr>
+          <p:cNvPr id="40" name="Text 38"/>
+          <p:cNvSpPr/>
+          <p:nvPr/>
+        </p:nvSpPr>
+        <p:spPr>
+          <a:xfrm>
+            <a:off x="365760" y="4096512"/>
+            <a:ext cx="1371600" cy="804672"/>
+          </a:xfrm>
+          <a:prstGeom prst="rect">
+            <a:avLst/>
+          </a:prstGeom>
+          <a:noFill/>
+          <a:ln/>
+        </p:spPr>
+        <p:txBody>
+          <a:bodyPr wrap="square" lIns="0" tIns="0" rIns="0" bIns="0" rtlCol="0" anchor="ctr"/>
+          <a:lstStyle/>
+          <a:p>
+            <a:pPr algn="ctr" indent="0" marL="0">
+              <a:buNone/>
+            </a:pPr>
+            <a:r>
+              <a:rPr lang="en-US" sz="1100" b="1" dirty="0">
+                <a:solidFill>
+                  <a:srgbClr val="475569"/>
                 </a:solidFill>
                 <a:latin typeface="Trebuchet MS" pitchFamily="34" charset="0"/>
                 <a:ea typeface="Trebuchet MS" pitchFamily="34" charset="-122"/>
                 <a:cs typeface="Trebuchet MS" pitchFamily="34" charset="-120"/>
               </a:rPr>
-              <a:t>·</a:t>
-            </a:r>
-            <a:endParaRPr lang="en-US" sz="1600" dirty="0"/>
-          </a:p>
-        </p:txBody>
-      </p:sp>
-      <p:sp>
-        <p:nvSpPr>
-          <p:cNvPr id="40" name="Shape 38"/>
-          <p:cNvSpPr/>
-          <p:nvPr/>
-        </p:nvSpPr>
-        <p:spPr>
-          <a:xfrm>
-            <a:off x="6858000" y="3364992"/>
-            <a:ext cx="1554480" cy="475488"/>
-          </a:xfrm>
-          <a:prstGeom prst="rect">
-            <a:avLst>
-              <a:gd name="adj" fmla="val 9615"/>
-            </a:avLst>
-          </a:prstGeom>
-          <a:solidFill>
-            <a:srgbClr val="FFFFFF"/>
-          </a:solidFill>
-          <a:ln w="12700">
-            <a:solidFill>
-              <a:srgbClr val="0D9488"/>
-            </a:solidFill>
-            <a:prstDash val="solid"/>
-          </a:ln>
-        </p:spPr>
-      </p:sp>
-      <p:sp>
-        <p:nvSpPr>
-          <p:cNvPr id="41" name="Text 39"/>
-          <p:cNvSpPr/>
-          <p:nvPr/>
-        </p:nvSpPr>
-        <p:spPr>
-          <a:xfrm>
-            <a:off x="6858000" y="3364992"/>
-            <a:ext cx="1554480" cy="475488"/>
-          </a:xfrm>
-          <a:prstGeom prst="rect">
-            <a:avLst/>
-          </a:prstGeom>
-          <a:noFill/>
-          <a:ln/>
-        </p:spPr>
-        <p:txBody>
-          <a:bodyPr wrap="square" lIns="0" tIns="0" rIns="0" bIns="0" rtlCol="0" anchor="ctr"/>
-          <a:lstStyle/>
-          <a:p>
-            <a:pPr algn="ctr" indent="0" marL="0">
-              <a:buNone/>
-            </a:pPr>
-            <a:r>
-              <a:rPr lang="en-US" sz="1400" b="1" dirty="0">
-                <a:solidFill>
-                  <a:srgbClr val="0D9488"/>
-                </a:solidFill>
-                <a:latin typeface="Trebuchet MS" pitchFamily="34" charset="0"/>
-                <a:ea typeface="Trebuchet MS" pitchFamily="34" charset="-122"/>
-                <a:cs typeface="Trebuchet MS" pitchFamily="34" charset="-120"/>
-              </a:rPr>
-              <a:t>er</a:t>
-            </a:r>
-            <a:endParaRPr lang="en-US" sz="1400" dirty="0"/>
-          </a:p>
-        </p:txBody>
-      </p:sp>
-      <p:sp>
-        <p:nvSpPr>
-          <p:cNvPr id="42" name="Shape 40"/>
-          <p:cNvSpPr/>
-          <p:nvPr/>
-        </p:nvSpPr>
-        <p:spPr>
-          <a:xfrm>
-            <a:off x="365760" y="4096512"/>
-            <a:ext cx="1371600" cy="804672"/>
+              <a:t>Phonemes</a:t>
+            </a:r>
+            <a:endParaRPr lang="en-US" sz="1100" dirty="0"/>
+          </a:p>
+        </p:txBody>
+      </p:sp>
+      <p:sp>
+        <p:nvSpPr>
+          <p:cNvPr id="41" name="Shape 39"/>
+          <p:cNvSpPr/>
+          <p:nvPr/>
+        </p:nvSpPr>
+        <p:spPr>
+          <a:xfrm>
+            <a:off x="1874520" y="4096512"/>
+            <a:ext cx="6903720" cy="804672"/>
           </a:xfrm>
           <a:prstGeom prst="rect">
             <a:avLst>
@@ -22047,85 +22903,19 @@
             </a:avLst>
           </a:prstGeom>
           <a:solidFill>
-            <a:srgbClr val="E2E8F0"/>
+            <a:srgbClr val="F8FAFC"/>
           </a:solidFill>
           <a:ln w="12700">
             <a:solidFill>
               <a:srgbClr val="E2E8F0"/>
             </a:solidFill>
-            <a:prstDash val="solid"/>
-          </a:ln>
-        </p:spPr>
-      </p:sp>
-      <p:sp>
-        <p:nvSpPr>
-          <p:cNvPr id="43" name="Text 41"/>
-          <p:cNvSpPr/>
-          <p:nvPr/>
-        </p:nvSpPr>
-        <p:spPr>
-          <a:xfrm>
-            <a:off x="365760" y="4096512"/>
-            <a:ext cx="1371600" cy="804672"/>
-          </a:xfrm>
-          <a:prstGeom prst="rect">
-            <a:avLst/>
-          </a:prstGeom>
-          <a:noFill/>
-          <a:ln/>
-        </p:spPr>
-        <p:txBody>
-          <a:bodyPr wrap="square" lIns="0" tIns="0" rIns="0" bIns="0" rtlCol="0" anchor="ctr"/>
-          <a:lstStyle/>
-          <a:p>
-            <a:pPr algn="ctr" indent="0" marL="0">
-              <a:buNone/>
-            </a:pPr>
-            <a:r>
-              <a:rPr lang="en-US" sz="1100" b="1" dirty="0">
-                <a:solidFill>
-                  <a:srgbClr val="475569"/>
-                </a:solidFill>
-                <a:latin typeface="Trebuchet MS" pitchFamily="34" charset="0"/>
-                <a:ea typeface="Trebuchet MS" pitchFamily="34" charset="-122"/>
-                <a:cs typeface="Trebuchet MS" pitchFamily="34" charset="-120"/>
-              </a:rPr>
-              <a:t>Phonemes</a:t>
-            </a:r>
-            <a:endParaRPr lang="en-US" sz="1100" dirty="0"/>
-          </a:p>
-        </p:txBody>
-      </p:sp>
-      <p:sp>
-        <p:nvSpPr>
-          <p:cNvPr id="44" name="Shape 42"/>
-          <p:cNvSpPr/>
-          <p:nvPr/>
-        </p:nvSpPr>
-        <p:spPr>
-          <a:xfrm>
-            <a:off x="1874520" y="4096512"/>
-            <a:ext cx="6903720" cy="804672"/>
-          </a:xfrm>
-          <a:prstGeom prst="rect">
-            <a:avLst>
-              <a:gd name="adj" fmla="val 6818"/>
-            </a:avLst>
-          </a:prstGeom>
-          <a:solidFill>
-            <a:srgbClr val="F8FAFC"/>
-          </a:solidFill>
-          <a:ln w="12700">
-            <a:solidFill>
-              <a:srgbClr val="E2E8F0"/>
-            </a:solidFill>
             <a:prstDash val="dash"/>
           </a:ln>
         </p:spPr>
       </p:sp>
       <p:sp>
         <p:nvSpPr>
-          <p:cNvPr id="45" name="Text 43"/>
+          <p:cNvPr id="42" name="Text 40"/>
           <p:cNvSpPr/>
           <p:nvPr/>
         </p:nvSpPr>
@@ -22448,7 +23238,7 @@
                 <a:ea typeface="Calibri" pitchFamily="34" charset="-122"/>
                 <a:cs typeface="Calibri" pitchFamily="34" charset="-120"/>
               </a:rPr>
-              <a:t>Word Labs  •  wordlabs.app  •  Root: 'miss' = send, let go, release</a:t>
+              <a:t>Word Labs  •  wordlabs.app  •  Root: 'miss' = send</a:t>
             </a:r>
             <a:endParaRPr lang="en-US" sz="800" dirty="0"/>
           </a:p>
@@ -22587,7 +23377,7 @@
                 <a:ea typeface="Trebuchet MS" pitchFamily="34" charset="-122"/>
                 <a:cs typeface="Trebuchet MS" pitchFamily="34" charset="-120"/>
               </a:rPr>
-              <a:t>commissioner</a:t>
+              <a:t>transmissions</a:t>
             </a:r>
             <a:endParaRPr lang="en-US" sz="2800" dirty="0"/>
           </a:p>
@@ -22726,7 +23516,7 @@
                 <a:ea typeface="Trebuchet MS" pitchFamily="34" charset="-122"/>
                 <a:cs typeface="Trebuchet MS" pitchFamily="34" charset="-120"/>
               </a:rPr>
-              <a:t>com</a:t>
+              <a:t>trans</a:t>
             </a:r>
             <a:endParaRPr lang="en-US" sz="1300" dirty="0"/>
           </a:p>
@@ -22765,7 +23555,7 @@
                 <a:ea typeface="Calibri" pitchFamily="34" charset="-122"/>
                 <a:cs typeface="Calibri" pitchFamily="34" charset="-120"/>
               </a:rPr>
-              <a:t>together, with</a:t>
+              <a:t>across</a:t>
             </a:r>
             <a:endParaRPr lang="en-US" sz="850" dirty="0"/>
           </a:p>
@@ -22877,7 +23667,7 @@
                 <a:ea typeface="Calibri" pitchFamily="34" charset="-122"/>
                 <a:cs typeface="Calibri" pitchFamily="34" charset="-120"/>
               </a:rPr>
-              <a:t>send, let go</a:t>
+              <a:t>send</a:t>
             </a:r>
             <a:endParaRPr lang="en-US" sz="850" dirty="0"/>
           </a:p>
@@ -22989,7 +23779,7 @@
                 <a:ea typeface="Calibri" pitchFamily="34" charset="-122"/>
                 <a:cs typeface="Calibri" pitchFamily="34" charset="-120"/>
               </a:rPr>
-              <a:t>act or state of</a:t>
+              <a:t>act or result of</a:t>
             </a:r>
             <a:endParaRPr lang="en-US" sz="850" dirty="0"/>
           </a:p>
@@ -23062,7 +23852,7 @@
                 <a:ea typeface="Trebuchet MS" pitchFamily="34" charset="-122"/>
                 <a:cs typeface="Trebuchet MS" pitchFamily="34" charset="-120"/>
               </a:rPr>
-              <a:t>er</a:t>
+              <a:t>s</a:t>
             </a:r>
             <a:endParaRPr lang="en-US" sz="1300" dirty="0"/>
           </a:p>
@@ -23101,7 +23891,7 @@
                 <a:ea typeface="Calibri" pitchFamily="34" charset="-122"/>
                 <a:cs typeface="Calibri" pitchFamily="34" charset="-120"/>
               </a:rPr>
-              <a:t>person who does</a:t>
+              <a:t>plural or present tense</a:t>
             </a:r>
             <a:endParaRPr lang="en-US" sz="850" dirty="0"/>
           </a:p>
@@ -23208,8 +23998,8 @@
         </p:nvSpPr>
         <p:spPr>
           <a:xfrm>
-            <a:off x="1975104" y="3364992"/>
-            <a:ext cx="1554480" cy="475488"/>
+            <a:off x="2313432" y="3364992"/>
+            <a:ext cx="1645920" cy="475488"/>
           </a:xfrm>
           <a:prstGeom prst="rect">
             <a:avLst>
@@ -23235,8 +24025,8 @@
         </p:nvSpPr>
         <p:spPr>
           <a:xfrm>
-            <a:off x="1975104" y="3364992"/>
-            <a:ext cx="1554480" cy="475488"/>
+            <a:off x="2313432" y="3364992"/>
+            <a:ext cx="1645920" cy="475488"/>
           </a:xfrm>
           <a:prstGeom prst="rect">
             <a:avLst/>
@@ -23260,7 +24050,7 @@
                 <a:ea typeface="Trebuchet MS" pitchFamily="34" charset="-122"/>
                 <a:cs typeface="Trebuchet MS" pitchFamily="34" charset="-120"/>
               </a:rPr>
-              <a:t>com</a:t>
+              <a:t>trans</a:t>
             </a:r>
             <a:endParaRPr lang="en-US" sz="1400" dirty="0"/>
           </a:p>
@@ -23274,8 +24064,8 @@
         </p:nvSpPr>
         <p:spPr>
           <a:xfrm>
-            <a:off x="3529584" y="3364992"/>
-            <a:ext cx="73152" cy="475488"/>
+            <a:off x="3959352" y="3364992"/>
+            <a:ext cx="411480" cy="475488"/>
           </a:xfrm>
           <a:prstGeom prst="rect">
             <a:avLst/>
@@ -23313,8 +24103,8 @@
         </p:nvSpPr>
         <p:spPr>
           <a:xfrm>
-            <a:off x="3602736" y="3364992"/>
-            <a:ext cx="1554480" cy="475488"/>
+            <a:off x="4370832" y="3364992"/>
+            <a:ext cx="1645920" cy="475488"/>
           </a:xfrm>
           <a:prstGeom prst="rect">
             <a:avLst>
@@ -23340,8 +24130,8 @@
         </p:nvSpPr>
         <p:spPr>
           <a:xfrm>
-            <a:off x="3602736" y="3364992"/>
-            <a:ext cx="1554480" cy="475488"/>
+            <a:off x="4370832" y="3364992"/>
+            <a:ext cx="1645920" cy="475488"/>
           </a:xfrm>
           <a:prstGeom prst="rect">
             <a:avLst/>
@@ -23379,8 +24169,8 @@
         </p:nvSpPr>
         <p:spPr>
           <a:xfrm>
-            <a:off x="5157216" y="3364992"/>
-            <a:ext cx="73152" cy="475488"/>
+            <a:off x="6016752" y="3364992"/>
+            <a:ext cx="411480" cy="475488"/>
           </a:xfrm>
           <a:prstGeom prst="rect">
             <a:avLst/>
@@ -23418,8 +24208,8 @@
         </p:nvSpPr>
         <p:spPr>
           <a:xfrm>
-            <a:off x="5230368" y="3364992"/>
-            <a:ext cx="1554480" cy="475488"/>
+            <a:off x="6428232" y="3364992"/>
+            <a:ext cx="1645920" cy="475488"/>
           </a:xfrm>
           <a:prstGeom prst="rect">
             <a:avLst>
@@ -23445,8 +24235,8 @@
         </p:nvSpPr>
         <p:spPr>
           <a:xfrm>
-            <a:off x="5230368" y="3364992"/>
-            <a:ext cx="1554480" cy="475488"/>
+            <a:off x="6428232" y="3364992"/>
+            <a:ext cx="1645920" cy="475488"/>
           </a:xfrm>
           <a:prstGeom prst="rect">
             <a:avLst/>
@@ -23470,7 +24260,7 @@
                 <a:ea typeface="Trebuchet MS" pitchFamily="34" charset="-122"/>
                 <a:cs typeface="Trebuchet MS" pitchFamily="34" charset="-120"/>
               </a:rPr>
-              <a:t>sion</a:t>
+              <a:t>sions</a:t>
             </a:r>
             <a:endParaRPr lang="en-US" sz="1400" dirty="0"/>
           </a:p>
@@ -23478,193 +24268,247 @@
       </p:sp>
       <p:sp>
         <p:nvSpPr>
-          <p:cNvPr id="39" name="Text 37"/>
-          <p:cNvSpPr/>
-          <p:nvPr/>
-        </p:nvSpPr>
-        <p:spPr>
-          <a:xfrm>
-            <a:off x="6784848" y="3364992"/>
-            <a:ext cx="73152" cy="475488"/>
-          </a:xfrm>
-          <a:prstGeom prst="rect">
-            <a:avLst/>
-          </a:prstGeom>
-          <a:noFill/>
-          <a:ln/>
-        </p:spPr>
-        <p:txBody>
-          <a:bodyPr wrap="square" lIns="0" tIns="0" rIns="0" bIns="0" rtlCol="0" anchor="ctr"/>
-          <a:lstStyle/>
-          <a:p>
-            <a:pPr algn="ctr" indent="0" marL="0">
-              <a:buNone/>
-            </a:pPr>
-            <a:r>
-              <a:rPr lang="en-US" sz="1600" b="1" dirty="0">
-                <a:solidFill>
-                  <a:srgbClr val="0D9488"/>
+          <p:cNvPr id="39" name="Shape 37"/>
+          <p:cNvSpPr/>
+          <p:nvPr/>
+        </p:nvSpPr>
+        <p:spPr>
+          <a:xfrm>
+            <a:off x="365760" y="4096512"/>
+            <a:ext cx="1371600" cy="804672"/>
+          </a:xfrm>
+          <a:prstGeom prst="rect">
+            <a:avLst>
+              <a:gd name="adj" fmla="val 6818"/>
+            </a:avLst>
+          </a:prstGeom>
+          <a:solidFill>
+            <a:srgbClr val="E2E8F0"/>
+          </a:solidFill>
+          <a:ln w="12700">
+            <a:solidFill>
+              <a:srgbClr val="E2E8F0"/>
+            </a:solidFill>
+            <a:prstDash val="solid"/>
+          </a:ln>
+        </p:spPr>
+      </p:sp>
+      <p:sp>
+        <p:nvSpPr>
+          <p:cNvPr id="40" name="Text 38"/>
+          <p:cNvSpPr/>
+          <p:nvPr/>
+        </p:nvSpPr>
+        <p:spPr>
+          <a:xfrm>
+            <a:off x="365760" y="4096512"/>
+            <a:ext cx="1371600" cy="804672"/>
+          </a:xfrm>
+          <a:prstGeom prst="rect">
+            <a:avLst/>
+          </a:prstGeom>
+          <a:noFill/>
+          <a:ln/>
+        </p:spPr>
+        <p:txBody>
+          <a:bodyPr wrap="square" lIns="0" tIns="0" rIns="0" bIns="0" rtlCol="0" anchor="ctr"/>
+          <a:lstStyle/>
+          <a:p>
+            <a:pPr algn="ctr" indent="0" marL="0">
+              <a:buNone/>
+            </a:pPr>
+            <a:r>
+              <a:rPr lang="en-US" sz="1100" b="1" dirty="0">
+                <a:solidFill>
+                  <a:srgbClr val="475569"/>
                 </a:solidFill>
                 <a:latin typeface="Trebuchet MS" pitchFamily="34" charset="0"/>
                 <a:ea typeface="Trebuchet MS" pitchFamily="34" charset="-122"/>
                 <a:cs typeface="Trebuchet MS" pitchFamily="34" charset="-120"/>
               </a:rPr>
-              <a:t>·</a:t>
-            </a:r>
-            <a:endParaRPr lang="en-US" sz="1600" dirty="0"/>
-          </a:p>
-        </p:txBody>
-      </p:sp>
-      <p:sp>
-        <p:nvSpPr>
-          <p:cNvPr id="40" name="Shape 38"/>
-          <p:cNvSpPr/>
-          <p:nvPr/>
-        </p:nvSpPr>
-        <p:spPr>
-          <a:xfrm>
-            <a:off x="6858000" y="3364992"/>
-            <a:ext cx="1554480" cy="475488"/>
+              <a:t>Phonemes</a:t>
+            </a:r>
+            <a:endParaRPr lang="en-US" sz="1100" dirty="0"/>
+          </a:p>
+        </p:txBody>
+      </p:sp>
+      <p:sp>
+        <p:nvSpPr>
+          <p:cNvPr id="41" name="Shape 39"/>
+          <p:cNvSpPr/>
+          <p:nvPr/>
+        </p:nvSpPr>
+        <p:spPr>
+          <a:xfrm>
+            <a:off x="1874520" y="4096512"/>
+            <a:ext cx="6903720" cy="658368"/>
           </a:xfrm>
           <a:prstGeom prst="rect">
             <a:avLst>
-              <a:gd name="adj" fmla="val 9615"/>
+              <a:gd name="adj" fmla="val 8333"/>
             </a:avLst>
           </a:prstGeom>
           <a:solidFill>
+            <a:srgbClr val="FCE7F3"/>
+          </a:solidFill>
+          <a:ln w="12700">
+            <a:solidFill>
+              <a:srgbClr val="DB2777"/>
+            </a:solidFill>
+            <a:prstDash val="solid"/>
+          </a:ln>
+        </p:spPr>
+      </p:sp>
+      <p:sp>
+        <p:nvSpPr>
+          <p:cNvPr id="42" name="Shape 40"/>
+          <p:cNvSpPr/>
+          <p:nvPr/>
+        </p:nvSpPr>
+        <p:spPr>
+          <a:xfrm>
+            <a:off x="1952244" y="4169664"/>
+            <a:ext cx="543652" cy="475488"/>
+          </a:xfrm>
+          <a:prstGeom prst="rect">
+            <a:avLst>
+              <a:gd name="adj" fmla="val 7692"/>
+            </a:avLst>
+          </a:prstGeom>
+          <a:solidFill>
             <a:srgbClr val="FFFFFF"/>
           </a:solidFill>
           <a:ln w="12700">
             <a:solidFill>
-              <a:srgbClr val="0D9488"/>
-            </a:solidFill>
-            <a:prstDash val="solid"/>
-          </a:ln>
-        </p:spPr>
-      </p:sp>
-      <p:sp>
-        <p:nvSpPr>
-          <p:cNvPr id="41" name="Text 39"/>
-          <p:cNvSpPr/>
-          <p:nvPr/>
-        </p:nvSpPr>
-        <p:spPr>
-          <a:xfrm>
-            <a:off x="6858000" y="3364992"/>
-            <a:ext cx="1554480" cy="475488"/>
-          </a:xfrm>
-          <a:prstGeom prst="rect">
-            <a:avLst/>
-          </a:prstGeom>
-          <a:noFill/>
-          <a:ln/>
-        </p:spPr>
-        <p:txBody>
-          <a:bodyPr wrap="square" lIns="0" tIns="0" rIns="0" bIns="0" rtlCol="0" anchor="ctr"/>
-          <a:lstStyle/>
-          <a:p>
-            <a:pPr algn="ctr" indent="0" marL="0">
-              <a:buNone/>
-            </a:pPr>
-            <a:r>
-              <a:rPr lang="en-US" sz="1400" b="1" dirty="0">
-                <a:solidFill>
-                  <a:srgbClr val="0D9488"/>
+              <a:srgbClr val="DB2777"/>
+            </a:solidFill>
+            <a:prstDash val="solid"/>
+          </a:ln>
+        </p:spPr>
+      </p:sp>
+      <p:sp>
+        <p:nvSpPr>
+          <p:cNvPr id="43" name="Text 41"/>
+          <p:cNvSpPr/>
+          <p:nvPr/>
+        </p:nvSpPr>
+        <p:spPr>
+          <a:xfrm>
+            <a:off x="1952244" y="4169664"/>
+            <a:ext cx="543652" cy="475488"/>
+          </a:xfrm>
+          <a:prstGeom prst="rect">
+            <a:avLst/>
+          </a:prstGeom>
+          <a:noFill/>
+          <a:ln/>
+        </p:spPr>
+        <p:txBody>
+          <a:bodyPr wrap="square" lIns="0" tIns="0" rIns="0" bIns="0" rtlCol="0" anchor="ctr"/>
+          <a:lstStyle/>
+          <a:p>
+            <a:pPr algn="ctr" indent="0" marL="0">
+              <a:buNone/>
+            </a:pPr>
+            <a:r>
+              <a:rPr lang="en-US" sz="900" b="1" dirty="0">
+                <a:solidFill>
+                  <a:srgbClr val="9D174D"/>
                 </a:solidFill>
                 <a:latin typeface="Trebuchet MS" pitchFamily="34" charset="0"/>
                 <a:ea typeface="Trebuchet MS" pitchFamily="34" charset="-122"/>
                 <a:cs typeface="Trebuchet MS" pitchFamily="34" charset="-120"/>
               </a:rPr>
-              <a:t>er</a:t>
-            </a:r>
-            <a:endParaRPr lang="en-US" sz="1400" dirty="0"/>
-          </a:p>
-        </p:txBody>
-      </p:sp>
-      <p:sp>
-        <p:nvSpPr>
-          <p:cNvPr id="42" name="Shape 40"/>
-          <p:cNvSpPr/>
-          <p:nvPr/>
-        </p:nvSpPr>
-        <p:spPr>
-          <a:xfrm>
-            <a:off x="365760" y="4096512"/>
-            <a:ext cx="1371600" cy="804672"/>
+              <a:t>t</a:t>
+            </a:r>
+            <a:endParaRPr lang="en-US" sz="900" dirty="0"/>
+          </a:p>
+        </p:txBody>
+      </p:sp>
+      <p:sp>
+        <p:nvSpPr>
+          <p:cNvPr id="44" name="Shape 42"/>
+          <p:cNvSpPr/>
+          <p:nvPr/>
+        </p:nvSpPr>
+        <p:spPr>
+          <a:xfrm>
+            <a:off x="2546188" y="4169664"/>
+            <a:ext cx="543652" cy="475488"/>
           </a:xfrm>
           <a:prstGeom prst="rect">
             <a:avLst>
-              <a:gd name="adj" fmla="val 6818"/>
+              <a:gd name="adj" fmla="val 7692"/>
             </a:avLst>
           </a:prstGeom>
           <a:solidFill>
-            <a:srgbClr val="E2E8F0"/>
-          </a:solidFill>
-          <a:ln w="12700">
-            <a:solidFill>
-              <a:srgbClr val="E2E8F0"/>
-            </a:solidFill>
-            <a:prstDash val="solid"/>
-          </a:ln>
-        </p:spPr>
-      </p:sp>
-      <p:sp>
-        <p:nvSpPr>
-          <p:cNvPr id="43" name="Text 41"/>
-          <p:cNvSpPr/>
-          <p:nvPr/>
-        </p:nvSpPr>
-        <p:spPr>
-          <a:xfrm>
-            <a:off x="365760" y="4096512"/>
-            <a:ext cx="1371600" cy="804672"/>
-          </a:xfrm>
-          <a:prstGeom prst="rect">
-            <a:avLst/>
-          </a:prstGeom>
-          <a:noFill/>
-          <a:ln/>
-        </p:spPr>
-        <p:txBody>
-          <a:bodyPr wrap="square" lIns="0" tIns="0" rIns="0" bIns="0" rtlCol="0" anchor="ctr"/>
-          <a:lstStyle/>
-          <a:p>
-            <a:pPr algn="ctr" indent="0" marL="0">
-              <a:buNone/>
-            </a:pPr>
-            <a:r>
-              <a:rPr lang="en-US" sz="1100" b="1" dirty="0">
-                <a:solidFill>
-                  <a:srgbClr val="475569"/>
+            <a:srgbClr val="FFFFFF"/>
+          </a:solidFill>
+          <a:ln w="12700">
+            <a:solidFill>
+              <a:srgbClr val="DB2777"/>
+            </a:solidFill>
+            <a:prstDash val="solid"/>
+          </a:ln>
+        </p:spPr>
+      </p:sp>
+      <p:sp>
+        <p:nvSpPr>
+          <p:cNvPr id="45" name="Text 43"/>
+          <p:cNvSpPr/>
+          <p:nvPr/>
+        </p:nvSpPr>
+        <p:spPr>
+          <a:xfrm>
+            <a:off x="2546188" y="4169664"/>
+            <a:ext cx="543652" cy="475488"/>
+          </a:xfrm>
+          <a:prstGeom prst="rect">
+            <a:avLst/>
+          </a:prstGeom>
+          <a:noFill/>
+          <a:ln/>
+        </p:spPr>
+        <p:txBody>
+          <a:bodyPr wrap="square" lIns="0" tIns="0" rIns="0" bIns="0" rtlCol="0" anchor="ctr"/>
+          <a:lstStyle/>
+          <a:p>
+            <a:pPr algn="ctr" indent="0" marL="0">
+              <a:buNone/>
+            </a:pPr>
+            <a:r>
+              <a:rPr lang="en-US" sz="900" b="1" dirty="0">
+                <a:solidFill>
+                  <a:srgbClr val="9D174D"/>
                 </a:solidFill>
                 <a:latin typeface="Trebuchet MS" pitchFamily="34" charset="0"/>
                 <a:ea typeface="Trebuchet MS" pitchFamily="34" charset="-122"/>
                 <a:cs typeface="Trebuchet MS" pitchFamily="34" charset="-120"/>
               </a:rPr>
-              <a:t>Phonemes</a:t>
-            </a:r>
-            <a:endParaRPr lang="en-US" sz="1100" dirty="0"/>
-          </a:p>
-        </p:txBody>
-      </p:sp>
-      <p:sp>
-        <p:nvSpPr>
-          <p:cNvPr id="44" name="Shape 42"/>
-          <p:cNvSpPr/>
-          <p:nvPr/>
-        </p:nvSpPr>
-        <p:spPr>
-          <a:xfrm>
-            <a:off x="1874520" y="4096512"/>
-            <a:ext cx="6903720" cy="804672"/>
+              <a:t>r</a:t>
+            </a:r>
+            <a:endParaRPr lang="en-US" sz="900" dirty="0"/>
+          </a:p>
+        </p:txBody>
+      </p:sp>
+      <p:sp>
+        <p:nvSpPr>
+          <p:cNvPr id="46" name="Shape 44"/>
+          <p:cNvSpPr/>
+          <p:nvPr/>
+        </p:nvSpPr>
+        <p:spPr>
+          <a:xfrm>
+            <a:off x="3140133" y="4169664"/>
+            <a:ext cx="543652" cy="475488"/>
           </a:xfrm>
           <a:prstGeom prst="rect">
             <a:avLst>
-              <a:gd name="adj" fmla="val 6818"/>
+              <a:gd name="adj" fmla="val 7692"/>
             </a:avLst>
           </a:prstGeom>
           <a:solidFill>
-            <a:srgbClr val="FCE7F3"/>
+            <a:srgbClr val="FFFFFF"/>
           </a:solidFill>
           <a:ln w="12700">
             <a:solidFill>
@@ -23676,41 +24520,14 @@
       </p:sp>
       <p:sp>
         <p:nvSpPr>
-          <p:cNvPr id="45" name="Shape 43"/>
-          <p:cNvSpPr/>
-          <p:nvPr/>
-        </p:nvSpPr>
-        <p:spPr>
-          <a:xfrm>
-            <a:off x="2124837" y="4169664"/>
-            <a:ext cx="685800" cy="384048"/>
-          </a:xfrm>
-          <a:prstGeom prst="rect">
-            <a:avLst>
-              <a:gd name="adj" fmla="val 9524"/>
-            </a:avLst>
-          </a:prstGeom>
-          <a:solidFill>
-            <a:srgbClr val="FFFFFF"/>
-          </a:solidFill>
-          <a:ln w="12700">
-            <a:solidFill>
-              <a:srgbClr val="DB2777"/>
-            </a:solidFill>
-            <a:prstDash val="solid"/>
-          </a:ln>
-        </p:spPr>
-      </p:sp>
-      <p:sp>
-        <p:nvSpPr>
-          <p:cNvPr id="46" name="Text 44"/>
-          <p:cNvSpPr/>
-          <p:nvPr/>
-        </p:nvSpPr>
-        <p:spPr>
-          <a:xfrm>
-            <a:off x="2124837" y="4169664"/>
-            <a:ext cx="685800" cy="384048"/>
+          <p:cNvPr id="47" name="Text 45"/>
+          <p:cNvSpPr/>
+          <p:nvPr/>
+        </p:nvSpPr>
+        <p:spPr>
+          <a:xfrm>
+            <a:off x="3140133" y="4169664"/>
+            <a:ext cx="543652" cy="475488"/>
           </a:xfrm>
           <a:prstGeom prst="rect">
             <a:avLst/>
@@ -23734,7 +24551,7 @@
                 <a:ea typeface="Trebuchet MS" pitchFamily="34" charset="-122"/>
                 <a:cs typeface="Trebuchet MS" pitchFamily="34" charset="-120"/>
               </a:rPr>
-              <a:t>c</a:t>
+              <a:t>a</a:t>
             </a:r>
             <a:endParaRPr lang="en-US" sz="900" dirty="0"/>
           </a:p>
@@ -23742,57 +24559,18 @@
       </p:sp>
       <p:sp>
         <p:nvSpPr>
-          <p:cNvPr id="47" name="Text 45"/>
-          <p:cNvSpPr/>
-          <p:nvPr/>
-        </p:nvSpPr>
-        <p:spPr>
-          <a:xfrm>
-            <a:off x="2124837" y="4572000"/>
-            <a:ext cx="685800" cy="219456"/>
-          </a:xfrm>
-          <a:prstGeom prst="rect">
-            <a:avLst/>
-          </a:prstGeom>
-          <a:noFill/>
-          <a:ln/>
-        </p:spPr>
-        <p:txBody>
-          <a:bodyPr wrap="square" lIns="0" tIns="0" rIns="0" bIns="0" rtlCol="0" anchor="t"/>
-          <a:lstStyle/>
-          <a:p>
-            <a:pPr algn="ctr" indent="0" marL="0">
-              <a:buNone/>
-            </a:pPr>
-            <a:r>
-              <a:rPr lang="en-US" sz="750" i="1" dirty="0">
-                <a:solidFill>
-                  <a:srgbClr val="94A3B8"/>
-                </a:solidFill>
-                <a:latin typeface="Calibri" pitchFamily="34" charset="0"/>
-                <a:ea typeface="Calibri" pitchFamily="34" charset="-122"/>
-                <a:cs typeface="Calibri" pitchFamily="34" charset="-120"/>
-              </a:rPr>
-              <a:t>/k/</a:t>
-            </a:r>
-            <a:endParaRPr lang="en-US" sz="750" dirty="0"/>
-          </a:p>
-        </p:txBody>
-      </p:sp>
-      <p:sp>
-        <p:nvSpPr>
           <p:cNvPr id="48" name="Shape 46"/>
           <p:cNvSpPr/>
           <p:nvPr/>
         </p:nvSpPr>
         <p:spPr>
           <a:xfrm>
-            <a:off x="3033522" y="4169664"/>
-            <a:ext cx="685800" cy="384048"/>
+            <a:off x="3734077" y="4169664"/>
+            <a:ext cx="543652" cy="475488"/>
           </a:xfrm>
           <a:prstGeom prst="rect">
             <a:avLst>
-              <a:gd name="adj" fmla="val 9524"/>
+              <a:gd name="adj" fmla="val 7692"/>
             </a:avLst>
           </a:prstGeom>
           <a:solidFill>
@@ -23814,8 +24592,8 @@
         </p:nvSpPr>
         <p:spPr>
           <a:xfrm>
-            <a:off x="3033522" y="4169664"/>
-            <a:ext cx="685800" cy="384048"/>
+            <a:off x="3734077" y="4169664"/>
+            <a:ext cx="543652" cy="475488"/>
           </a:xfrm>
           <a:prstGeom prst="rect">
             <a:avLst/>
@@ -23839,7 +24617,7 @@
                 <a:ea typeface="Trebuchet MS" pitchFamily="34" charset="-122"/>
                 <a:cs typeface="Trebuchet MS" pitchFamily="34" charset="-120"/>
               </a:rPr>
-              <a:t>o</a:t>
+              <a:t>n</a:t>
             </a:r>
             <a:endParaRPr lang="en-US" sz="900" dirty="0"/>
           </a:p>
@@ -23853,12 +24631,12 @@
         </p:nvSpPr>
         <p:spPr>
           <a:xfrm>
-            <a:off x="3942207" y="4169664"/>
-            <a:ext cx="685800" cy="384048"/>
+            <a:off x="4328021" y="4169664"/>
+            <a:ext cx="543652" cy="475488"/>
           </a:xfrm>
           <a:prstGeom prst="rect">
             <a:avLst>
-              <a:gd name="adj" fmla="val 9524"/>
+              <a:gd name="adj" fmla="val 7692"/>
             </a:avLst>
           </a:prstGeom>
           <a:solidFill>
@@ -23880,8 +24658,8 @@
         </p:nvSpPr>
         <p:spPr>
           <a:xfrm>
-            <a:off x="3942207" y="4169664"/>
-            <a:ext cx="685800" cy="384048"/>
+            <a:off x="4328021" y="4169664"/>
+            <a:ext cx="543652" cy="475488"/>
           </a:xfrm>
           <a:prstGeom prst="rect">
             <a:avLst/>
@@ -23905,7 +24683,7 @@
                 <a:ea typeface="Trebuchet MS" pitchFamily="34" charset="-122"/>
                 <a:cs typeface="Trebuchet MS" pitchFamily="34" charset="-120"/>
               </a:rPr>
-              <a:t>mm</a:t>
+              <a:t>s</a:t>
             </a:r>
             <a:endParaRPr lang="en-US" sz="900" dirty="0"/>
           </a:p>
@@ -23919,12 +24697,12 @@
         </p:nvSpPr>
         <p:spPr>
           <a:xfrm>
-            <a:off x="4850892" y="4169664"/>
-            <a:ext cx="685800" cy="384048"/>
+            <a:off x="4921966" y="4169664"/>
+            <a:ext cx="543652" cy="475488"/>
           </a:xfrm>
           <a:prstGeom prst="rect">
             <a:avLst>
-              <a:gd name="adj" fmla="val 9524"/>
+              <a:gd name="adj" fmla="val 7692"/>
             </a:avLst>
           </a:prstGeom>
           <a:solidFill>
@@ -23946,8 +24724,8 @@
         </p:nvSpPr>
         <p:spPr>
           <a:xfrm>
-            <a:off x="4850892" y="4169664"/>
-            <a:ext cx="685800" cy="384048"/>
+            <a:off x="4921966" y="4169664"/>
+            <a:ext cx="543652" cy="475488"/>
           </a:xfrm>
           <a:prstGeom prst="rect">
             <a:avLst/>
@@ -23971,7 +24749,7 @@
                 <a:ea typeface="Trebuchet MS" pitchFamily="34" charset="-122"/>
                 <a:cs typeface="Trebuchet MS" pitchFamily="34" charset="-120"/>
               </a:rPr>
-              <a:t>i</a:t>
+              <a:t>m</a:t>
             </a:r>
             <a:endParaRPr lang="en-US" sz="900" dirty="0"/>
           </a:p>
@@ -23985,12 +24763,12 @@
         </p:nvSpPr>
         <p:spPr>
           <a:xfrm>
-            <a:off x="5759577" y="4169664"/>
-            <a:ext cx="685800" cy="384048"/>
+            <a:off x="5515910" y="4169664"/>
+            <a:ext cx="543652" cy="475488"/>
           </a:xfrm>
           <a:prstGeom prst="rect">
             <a:avLst>
-              <a:gd name="adj" fmla="val 9524"/>
+              <a:gd name="adj" fmla="val 7692"/>
             </a:avLst>
           </a:prstGeom>
           <a:solidFill>
@@ -24012,8 +24790,8 @@
         </p:nvSpPr>
         <p:spPr>
           <a:xfrm>
-            <a:off x="5759577" y="4169664"/>
-            <a:ext cx="685800" cy="384048"/>
+            <a:off x="5515910" y="4169664"/>
+            <a:ext cx="543652" cy="475488"/>
           </a:xfrm>
           <a:prstGeom prst="rect">
             <a:avLst/>
@@ -24037,7 +24815,7 @@
                 <a:ea typeface="Trebuchet MS" pitchFamily="34" charset="-122"/>
                 <a:cs typeface="Trebuchet MS" pitchFamily="34" charset="-120"/>
               </a:rPr>
-              <a:t>ss</a:t>
+              <a:t>i</a:t>
             </a:r>
             <a:endParaRPr lang="en-US" sz="900" dirty="0"/>
           </a:p>
@@ -24051,12 +24829,12 @@
         </p:nvSpPr>
         <p:spPr>
           <a:xfrm>
-            <a:off x="6668262" y="4169664"/>
-            <a:ext cx="685800" cy="384048"/>
+            <a:off x="6109855" y="4169664"/>
+            <a:ext cx="543652" cy="475488"/>
           </a:xfrm>
           <a:prstGeom prst="rect">
             <a:avLst>
-              <a:gd name="adj" fmla="val 9524"/>
+              <a:gd name="adj" fmla="val 7692"/>
             </a:avLst>
           </a:prstGeom>
           <a:solidFill>
@@ -24078,8 +24856,8 @@
         </p:nvSpPr>
         <p:spPr>
           <a:xfrm>
-            <a:off x="6668262" y="4169664"/>
-            <a:ext cx="685800" cy="384048"/>
+            <a:off x="6109855" y="4169664"/>
+            <a:ext cx="543652" cy="475488"/>
           </a:xfrm>
           <a:prstGeom prst="rect">
             <a:avLst/>
@@ -24103,7 +24881,7 @@
                 <a:ea typeface="Trebuchet MS" pitchFamily="34" charset="-122"/>
                 <a:cs typeface="Trebuchet MS" pitchFamily="34" charset="-120"/>
               </a:rPr>
-              <a:t>ion</a:t>
+              <a:t>ssi</a:t>
             </a:r>
             <a:endParaRPr lang="en-US" sz="900" dirty="0"/>
           </a:p>
@@ -24111,57 +24889,18 @@
       </p:sp>
       <p:sp>
         <p:nvSpPr>
-          <p:cNvPr id="58" name="Text 56"/>
-          <p:cNvSpPr/>
-          <p:nvPr/>
-        </p:nvSpPr>
-        <p:spPr>
-          <a:xfrm>
-            <a:off x="6668262" y="4572000"/>
-            <a:ext cx="685800" cy="219456"/>
-          </a:xfrm>
-          <a:prstGeom prst="rect">
-            <a:avLst/>
-          </a:prstGeom>
-          <a:noFill/>
-          <a:ln/>
-        </p:spPr>
-        <p:txBody>
-          <a:bodyPr wrap="square" lIns="0" tIns="0" rIns="0" bIns="0" rtlCol="0" anchor="t"/>
-          <a:lstStyle/>
-          <a:p>
-            <a:pPr algn="ctr" indent="0" marL="0">
-              <a:buNone/>
-            </a:pPr>
-            <a:r>
-              <a:rPr lang="en-US" sz="750" i="1" dirty="0">
-                <a:solidFill>
-                  <a:srgbClr val="94A3B8"/>
-                </a:solidFill>
-                <a:latin typeface="Calibri" pitchFamily="34" charset="0"/>
-                <a:ea typeface="Calibri" pitchFamily="34" charset="-122"/>
-                <a:cs typeface="Calibri" pitchFamily="34" charset="-120"/>
-              </a:rPr>
-              <a:t>/shun/</a:t>
-            </a:r>
-            <a:endParaRPr lang="en-US" sz="750" dirty="0"/>
-          </a:p>
-        </p:txBody>
-      </p:sp>
-      <p:sp>
-        <p:nvSpPr>
-          <p:cNvPr id="59" name="Shape 57"/>
-          <p:cNvSpPr/>
-          <p:nvPr/>
-        </p:nvSpPr>
-        <p:spPr>
-          <a:xfrm>
-            <a:off x="7576947" y="4169664"/>
-            <a:ext cx="685800" cy="384048"/>
+          <p:cNvPr id="58" name="Shape 56"/>
+          <p:cNvSpPr/>
+          <p:nvPr/>
+        </p:nvSpPr>
+        <p:spPr>
+          <a:xfrm>
+            <a:off x="6703799" y="4169664"/>
+            <a:ext cx="543652" cy="475488"/>
           </a:xfrm>
           <a:prstGeom prst="rect">
             <a:avLst>
-              <a:gd name="adj" fmla="val 9524"/>
+              <a:gd name="adj" fmla="val 7692"/>
             </a:avLst>
           </a:prstGeom>
           <a:solidFill>
@@ -24177,14 +24916,14 @@
       </p:sp>
       <p:sp>
         <p:nvSpPr>
-          <p:cNvPr id="60" name="Text 58"/>
-          <p:cNvSpPr/>
-          <p:nvPr/>
-        </p:nvSpPr>
-        <p:spPr>
-          <a:xfrm>
-            <a:off x="7576947" y="4169664"/>
-            <a:ext cx="685800" cy="384048"/>
+          <p:cNvPr id="59" name="Text 57"/>
+          <p:cNvSpPr/>
+          <p:nvPr/>
+        </p:nvSpPr>
+        <p:spPr>
+          <a:xfrm>
+            <a:off x="6703799" y="4169664"/>
+            <a:ext cx="543652" cy="475488"/>
           </a:xfrm>
           <a:prstGeom prst="rect">
             <a:avLst/>
@@ -24208,7 +24947,139 @@
                 <a:ea typeface="Trebuchet MS" pitchFamily="34" charset="-122"/>
                 <a:cs typeface="Trebuchet MS" pitchFamily="34" charset="-120"/>
               </a:rPr>
-              <a:t>er</a:t>
+              <a:t>o</a:t>
+            </a:r>
+            <a:endParaRPr lang="en-US" sz="900" dirty="0"/>
+          </a:p>
+        </p:txBody>
+      </p:sp>
+      <p:sp>
+        <p:nvSpPr>
+          <p:cNvPr id="60" name="Shape 58"/>
+          <p:cNvSpPr/>
+          <p:nvPr/>
+        </p:nvSpPr>
+        <p:spPr>
+          <a:xfrm>
+            <a:off x="7297743" y="4169664"/>
+            <a:ext cx="543652" cy="475488"/>
+          </a:xfrm>
+          <a:prstGeom prst="rect">
+            <a:avLst>
+              <a:gd name="adj" fmla="val 7692"/>
+            </a:avLst>
+          </a:prstGeom>
+          <a:solidFill>
+            <a:srgbClr val="FFFFFF"/>
+          </a:solidFill>
+          <a:ln w="12700">
+            <a:solidFill>
+              <a:srgbClr val="DB2777"/>
+            </a:solidFill>
+            <a:prstDash val="solid"/>
+          </a:ln>
+        </p:spPr>
+      </p:sp>
+      <p:sp>
+        <p:nvSpPr>
+          <p:cNvPr id="61" name="Text 59"/>
+          <p:cNvSpPr/>
+          <p:nvPr/>
+        </p:nvSpPr>
+        <p:spPr>
+          <a:xfrm>
+            <a:off x="7297743" y="4169664"/>
+            <a:ext cx="543652" cy="475488"/>
+          </a:xfrm>
+          <a:prstGeom prst="rect">
+            <a:avLst/>
+          </a:prstGeom>
+          <a:noFill/>
+          <a:ln/>
+        </p:spPr>
+        <p:txBody>
+          <a:bodyPr wrap="square" lIns="0" tIns="0" rIns="0" bIns="0" rtlCol="0" anchor="ctr"/>
+          <a:lstStyle/>
+          <a:p>
+            <a:pPr algn="ctr" indent="0" marL="0">
+              <a:buNone/>
+            </a:pPr>
+            <a:r>
+              <a:rPr lang="en-US" sz="900" b="1" dirty="0">
+                <a:solidFill>
+                  <a:srgbClr val="9D174D"/>
+                </a:solidFill>
+                <a:latin typeface="Trebuchet MS" pitchFamily="34" charset="0"/>
+                <a:ea typeface="Trebuchet MS" pitchFamily="34" charset="-122"/>
+                <a:cs typeface="Trebuchet MS" pitchFamily="34" charset="-120"/>
+              </a:rPr>
+              <a:t>n</a:t>
+            </a:r>
+            <a:endParaRPr lang="en-US" sz="900" dirty="0"/>
+          </a:p>
+        </p:txBody>
+      </p:sp>
+      <p:sp>
+        <p:nvSpPr>
+          <p:cNvPr id="62" name="Shape 60"/>
+          <p:cNvSpPr/>
+          <p:nvPr/>
+        </p:nvSpPr>
+        <p:spPr>
+          <a:xfrm>
+            <a:off x="7891688" y="4169664"/>
+            <a:ext cx="543652" cy="475488"/>
+          </a:xfrm>
+          <a:prstGeom prst="rect">
+            <a:avLst>
+              <a:gd name="adj" fmla="val 7692"/>
+            </a:avLst>
+          </a:prstGeom>
+          <a:solidFill>
+            <a:srgbClr val="FFFFFF"/>
+          </a:solidFill>
+          <a:ln w="12700">
+            <a:solidFill>
+              <a:srgbClr val="DB2777"/>
+            </a:solidFill>
+            <a:prstDash val="solid"/>
+          </a:ln>
+        </p:spPr>
+      </p:sp>
+      <p:sp>
+        <p:nvSpPr>
+          <p:cNvPr id="63" name="Text 61"/>
+          <p:cNvSpPr/>
+          <p:nvPr/>
+        </p:nvSpPr>
+        <p:spPr>
+          <a:xfrm>
+            <a:off x="7891688" y="4169664"/>
+            <a:ext cx="543652" cy="475488"/>
+          </a:xfrm>
+          <a:prstGeom prst="rect">
+            <a:avLst/>
+          </a:prstGeom>
+          <a:noFill/>
+          <a:ln/>
+        </p:spPr>
+        <p:txBody>
+          <a:bodyPr wrap="square" lIns="0" tIns="0" rIns="0" bIns="0" rtlCol="0" anchor="ctr"/>
+          <a:lstStyle/>
+          <a:p>
+            <a:pPr algn="ctr" indent="0" marL="0">
+              <a:buNone/>
+            </a:pPr>
+            <a:r>
+              <a:rPr lang="en-US" sz="900" b="1" dirty="0">
+                <a:solidFill>
+                  <a:srgbClr val="9D174D"/>
+                </a:solidFill>
+                <a:latin typeface="Trebuchet MS" pitchFamily="34" charset="0"/>
+                <a:ea typeface="Trebuchet MS" pitchFamily="34" charset="-122"/>
+                <a:cs typeface="Trebuchet MS" pitchFamily="34" charset="-120"/>
+              </a:rPr>
+              <a:t>s</a:t>
             </a:r>
             <a:endParaRPr lang="en-US" sz="900" dirty="0"/>
           </a:p>
@@ -24500,7 +25371,7 @@
                 <a:ea typeface="Calibri" pitchFamily="34" charset="-122"/>
                 <a:cs typeface="Calibri" pitchFamily="34" charset="-120"/>
               </a:rPr>
-              <a:t>Word Labs  •  wordlabs.app  •  Root: 'miss' = send, let go, release</a:t>
+              <a:t>Word Labs  •  wordlabs.app  •  Root: 'miss' = send</a:t>
             </a:r>
             <a:endParaRPr lang="en-US" sz="800" dirty="0"/>
           </a:p>
@@ -24639,7 +25510,7 @@
                 <a:ea typeface="Trebuchet MS" pitchFamily="34" charset="-122"/>
                 <a:cs typeface="Trebuchet MS" pitchFamily="34" charset="-120"/>
               </a:rPr>
-              <a:t>mission</a:t>
+              <a:t>emission</a:t>
             </a:r>
             <a:endParaRPr lang="en-US" sz="2800" dirty="0"/>
           </a:p>
@@ -25327,7 +26198,7 @@
                 <a:ea typeface="Calibri" pitchFamily="34" charset="-122"/>
                 <a:cs typeface="Calibri" pitchFamily="34" charset="-120"/>
               </a:rPr>
-              <a:t>Word Labs  •  wordlabs.app  •  Root: 'miss' = send, let go, release</a:t>
+              <a:t>Word Labs  •  wordlabs.app  •  Root: 'miss' = send</a:t>
             </a:r>
             <a:endParaRPr lang="en-US" sz="800" dirty="0"/>
           </a:p>
@@ -25466,7 +26337,7 @@
                 <a:ea typeface="Trebuchet MS" pitchFamily="34" charset="-122"/>
                 <a:cs typeface="Trebuchet MS" pitchFamily="34" charset="-120"/>
               </a:rPr>
-              <a:t>mission</a:t>
+              <a:t>emission</a:t>
             </a:r>
             <a:endParaRPr lang="en-US" sz="2800" dirty="0"/>
           </a:p>
@@ -25546,7 +26417,7 @@
         </p:nvSpPr>
         <p:spPr>
           <a:xfrm>
-            <a:off x="2938272" y="2258568"/>
+            <a:off x="2221992" y="2258568"/>
             <a:ext cx="1828800" cy="292608"/>
           </a:xfrm>
           <a:prstGeom prst="rect">
@@ -25555,11 +26426,11 @@
             </a:avLst>
           </a:prstGeom>
           <a:solidFill>
-            <a:srgbClr val="CCFBF1"/>
+            <a:srgbClr val="DDD6FE"/>
           </a:solidFill>
           <a:ln w="19050">
             <a:solidFill>
-              <a:srgbClr val="0D9488"/>
+              <a:srgbClr val="7C3AED"/>
             </a:solidFill>
             <a:prstDash val="solid"/>
           </a:ln>
@@ -25580,7 +26451,7 @@
         </p:nvSpPr>
         <p:spPr>
           <a:xfrm>
-            <a:off x="2938272" y="2258568"/>
+            <a:off x="2221992" y="2258568"/>
             <a:ext cx="1828800" cy="292608"/>
           </a:xfrm>
           <a:prstGeom prst="rect">
@@ -25599,13 +26470,13 @@
             <a:r>
               <a:rPr lang="en-US" sz="1300" b="1" dirty="0">
                 <a:solidFill>
-                  <a:srgbClr val="0F766E"/>
+                  <a:srgbClr val="4C1D95"/>
                 </a:solidFill>
                 <a:latin typeface="Trebuchet MS" pitchFamily="34" charset="0"/>
                 <a:ea typeface="Trebuchet MS" pitchFamily="34" charset="-122"/>
                 <a:cs typeface="Trebuchet MS" pitchFamily="34" charset="-120"/>
               </a:rPr>
-              <a:t>miss</a:t>
+              <a:t>e</a:t>
             </a:r>
             <a:endParaRPr lang="en-US" sz="1300" dirty="0"/>
           </a:p>
@@ -25619,7 +26490,7 @@
         </p:nvSpPr>
         <p:spPr>
           <a:xfrm>
-            <a:off x="2938272" y="2569464"/>
+            <a:off x="2221992" y="2569464"/>
             <a:ext cx="1828800" cy="201168"/>
           </a:xfrm>
           <a:prstGeom prst="rect">
@@ -25644,7 +26515,7 @@
                 <a:ea typeface="Calibri" pitchFamily="34" charset="-122"/>
                 <a:cs typeface="Calibri" pitchFamily="34" charset="-120"/>
               </a:rPr>
-              <a:t>send, let go</a:t>
+              <a:t>electronic; online</a:t>
             </a:r>
             <a:endParaRPr lang="en-US" sz="850" dirty="0"/>
           </a:p>
@@ -25658,7 +26529,7 @@
         </p:nvSpPr>
         <p:spPr>
           <a:xfrm>
-            <a:off x="5803392" y="2258568"/>
+            <a:off x="4370832" y="2258568"/>
             <a:ext cx="1828800" cy="292608"/>
           </a:xfrm>
           <a:prstGeom prst="rect">
@@ -25667,11 +26538,11 @@
             </a:avLst>
           </a:prstGeom>
           <a:solidFill>
-            <a:srgbClr val="FCE7F3"/>
+            <a:srgbClr val="CCFBF1"/>
           </a:solidFill>
           <a:ln w="19050">
             <a:solidFill>
-              <a:srgbClr val="DB2777"/>
+              <a:srgbClr val="0D9488"/>
             </a:solidFill>
             <a:prstDash val="solid"/>
           </a:ln>
@@ -25692,7 +26563,7 @@
         </p:nvSpPr>
         <p:spPr>
           <a:xfrm>
-            <a:off x="5803392" y="2258568"/>
+            <a:off x="4370832" y="2258568"/>
             <a:ext cx="1828800" cy="292608"/>
           </a:xfrm>
           <a:prstGeom prst="rect">
@@ -25711,13 +26582,13 @@
             <a:r>
               <a:rPr lang="en-US" sz="1300" b="1" dirty="0">
                 <a:solidFill>
-                  <a:srgbClr val="9D174D"/>
+                  <a:srgbClr val="0F766E"/>
                 </a:solidFill>
                 <a:latin typeface="Trebuchet MS" pitchFamily="34" charset="0"/>
                 <a:ea typeface="Trebuchet MS" pitchFamily="34" charset="-122"/>
                 <a:cs typeface="Trebuchet MS" pitchFamily="34" charset="-120"/>
               </a:rPr>
-              <a:t>ion</a:t>
+              <a:t>miss</a:t>
             </a:r>
             <a:endParaRPr lang="en-US" sz="1300" dirty="0"/>
           </a:p>
@@ -25731,7 +26602,7 @@
         </p:nvSpPr>
         <p:spPr>
           <a:xfrm>
-            <a:off x="5803392" y="2569464"/>
+            <a:off x="4370832" y="2569464"/>
             <a:ext cx="1828800" cy="201168"/>
           </a:xfrm>
           <a:prstGeom prst="rect">
@@ -25756,7 +26627,7 @@
                 <a:ea typeface="Calibri" pitchFamily="34" charset="-122"/>
                 <a:cs typeface="Calibri" pitchFamily="34" charset="-120"/>
               </a:rPr>
-              <a:t>act or state of</a:t>
+              <a:t>send</a:t>
             </a:r>
             <a:endParaRPr lang="en-US" sz="850" dirty="0"/>
           </a:p>
@@ -25765,6 +26636,118 @@
       <p:sp>
         <p:nvSpPr>
           <p:cNvPr id="22" name="Shape 20"/>
+          <p:cNvSpPr/>
+          <p:nvPr/>
+        </p:nvSpPr>
+        <p:spPr>
+          <a:xfrm>
+            <a:off x="6519672" y="2258568"/>
+            <a:ext cx="1828800" cy="292608"/>
+          </a:xfrm>
+          <a:prstGeom prst="rect">
+            <a:avLst>
+              <a:gd name="adj" fmla="val 25000"/>
+            </a:avLst>
+          </a:prstGeom>
+          <a:solidFill>
+            <a:srgbClr val="FCE7F3"/>
+          </a:solidFill>
+          <a:ln w="19050">
+            <a:solidFill>
+              <a:srgbClr val="DB2777"/>
+            </a:solidFill>
+            <a:prstDash val="solid"/>
+          </a:ln>
+          <a:effectLst>
+            <a:outerShdw sx="100000" sy="100000" kx="0" ky="0" algn="bl" rotWithShape="0" blurRad="101600" dist="38100" dir="8100000">
+              <a:srgbClr val="000000">
+                <a:alpha val="12000"/>
+              </a:srgbClr>
+            </a:outerShdw>
+          </a:effectLst>
+        </p:spPr>
+      </p:sp>
+      <p:sp>
+        <p:nvSpPr>
+          <p:cNvPr id="23" name="Text 21"/>
+          <p:cNvSpPr/>
+          <p:nvPr/>
+        </p:nvSpPr>
+        <p:spPr>
+          <a:xfrm>
+            <a:off x="6519672" y="2258568"/>
+            <a:ext cx="1828800" cy="292608"/>
+          </a:xfrm>
+          <a:prstGeom prst="rect">
+            <a:avLst/>
+          </a:prstGeom>
+          <a:noFill/>
+          <a:ln/>
+        </p:spPr>
+        <p:txBody>
+          <a:bodyPr wrap="square" lIns="0" tIns="0" rIns="0" bIns="0" rtlCol="0" anchor="ctr"/>
+          <a:lstStyle/>
+          <a:p>
+            <a:pPr algn="ctr" indent="0" marL="0">
+              <a:buNone/>
+            </a:pPr>
+            <a:r>
+              <a:rPr lang="en-US" sz="1300" b="1" dirty="0">
+                <a:solidFill>
+                  <a:srgbClr val="9D174D"/>
+                </a:solidFill>
+                <a:latin typeface="Trebuchet MS" pitchFamily="34" charset="0"/>
+                <a:ea typeface="Trebuchet MS" pitchFamily="34" charset="-122"/>
+                <a:cs typeface="Trebuchet MS" pitchFamily="34" charset="-120"/>
+              </a:rPr>
+              <a:t>ion</a:t>
+            </a:r>
+            <a:endParaRPr lang="en-US" sz="1300" dirty="0"/>
+          </a:p>
+        </p:txBody>
+      </p:sp>
+      <p:sp>
+        <p:nvSpPr>
+          <p:cNvPr id="24" name="Text 22"/>
+          <p:cNvSpPr/>
+          <p:nvPr/>
+        </p:nvSpPr>
+        <p:spPr>
+          <a:xfrm>
+            <a:off x="6519672" y="2569464"/>
+            <a:ext cx="1828800" cy="201168"/>
+          </a:xfrm>
+          <a:prstGeom prst="rect">
+            <a:avLst/>
+          </a:prstGeom>
+          <a:noFill/>
+          <a:ln/>
+        </p:spPr>
+        <p:txBody>
+          <a:bodyPr wrap="square" lIns="0" tIns="0" rIns="0" bIns="0" rtlCol="0" anchor="t"/>
+          <a:lstStyle/>
+          <a:p>
+            <a:pPr algn="ctr" indent="0" marL="0">
+              <a:buNone/>
+            </a:pPr>
+            <a:r>
+              <a:rPr lang="en-US" sz="850" dirty="0">
+                <a:solidFill>
+                  <a:srgbClr val="475569"/>
+                </a:solidFill>
+                <a:latin typeface="Calibri" pitchFamily="34" charset="0"/>
+                <a:ea typeface="Calibri" pitchFamily="34" charset="-122"/>
+                <a:cs typeface="Calibri" pitchFamily="34" charset="-120"/>
+              </a:rPr>
+              <a:t>act or result of</a:t>
+            </a:r>
+            <a:endParaRPr lang="en-US" sz="850" dirty="0"/>
+          </a:p>
+        </p:txBody>
+      </p:sp>
+      <p:sp>
+        <p:nvSpPr>
+          <p:cNvPr id="25" name="Shape 23"/>
           <p:cNvSpPr/>
           <p:nvPr/>
         </p:nvSpPr>
@@ -25791,7 +26774,7 @@
       </p:sp>
       <p:sp>
         <p:nvSpPr>
-          <p:cNvPr id="23" name="Text 21"/>
+          <p:cNvPr id="26" name="Text 24"/>
           <p:cNvSpPr/>
           <p:nvPr/>
         </p:nvSpPr>
@@ -25830,7 +26813,7 @@
       </p:sp>
       <p:sp>
         <p:nvSpPr>
-          <p:cNvPr id="24" name="Shape 22"/>
+          <p:cNvPr id="27" name="Shape 25"/>
           <p:cNvSpPr/>
           <p:nvPr/>
         </p:nvSpPr>
@@ -25857,7 +26840,7 @@
       </p:sp>
       <p:sp>
         <p:nvSpPr>
-          <p:cNvPr id="25" name="Text 23"/>
+          <p:cNvPr id="28" name="Text 26"/>
           <p:cNvSpPr/>
           <p:nvPr/>
         </p:nvSpPr>
@@ -25896,7 +26879,7 @@
       </p:sp>
       <p:sp>
         <p:nvSpPr>
-          <p:cNvPr id="26" name="Shape 24"/>
+          <p:cNvPr id="29" name="Shape 27"/>
           <p:cNvSpPr/>
           <p:nvPr/>
         </p:nvSpPr>
@@ -25923,7 +26906,7 @@
       </p:sp>
       <p:sp>
         <p:nvSpPr>
-          <p:cNvPr id="27" name="Text 25"/>
+          <p:cNvPr id="30" name="Text 28"/>
           <p:cNvSpPr/>
           <p:nvPr/>
         </p:nvSpPr>
@@ -25962,7 +26945,7 @@
       </p:sp>
       <p:sp>
         <p:nvSpPr>
-          <p:cNvPr id="28" name="Shape 26"/>
+          <p:cNvPr id="31" name="Shape 29"/>
           <p:cNvSpPr/>
           <p:nvPr/>
         </p:nvSpPr>
@@ -25989,7 +26972,7 @@
       </p:sp>
       <p:sp>
         <p:nvSpPr>
-          <p:cNvPr id="29" name="Text 27"/>
+          <p:cNvPr id="32" name="Text 30"/>
           <p:cNvSpPr/>
           <p:nvPr/>
         </p:nvSpPr>
@@ -26312,7 +27295,7 @@
                 <a:ea typeface="Calibri" pitchFamily="34" charset="-122"/>
                 <a:cs typeface="Calibri" pitchFamily="34" charset="-120"/>
               </a:rPr>
-              <a:t>Word Labs  •  wordlabs.app  •  Root: 'miss' = send, let go, release</a:t>
+              <a:t>Word Labs  •  wordlabs.app  •  Root: 'miss' = send</a:t>
             </a:r>
             <a:endParaRPr lang="en-US" sz="800" dirty="0"/>
           </a:p>
@@ -26385,7 +27368,7 @@
                 <a:ea typeface="Trebuchet MS" pitchFamily="34" charset="-122"/>
                 <a:cs typeface="Trebuchet MS" pitchFamily="34" charset="-120"/>
               </a:rPr>
-              <a:t>We are learning that the root 'miss' means 'send, let go, release'.</a:t>
+              <a:t>We are learning that the root 'miss' means 'send'.</a:t>
             </a:r>
             <a:endParaRPr lang="en-US" sz="2000" dirty="0"/>
           </a:p>
@@ -27031,7 +28014,7 @@
                 <a:ea typeface="Calibri" pitchFamily="34" charset="-122"/>
                 <a:cs typeface="Calibri" pitchFamily="34" charset="-120"/>
               </a:rPr>
-              <a:t>Word Labs  •  wordlabs.app  •  Root: 'miss' = send, let go, release</a:t>
+              <a:t>Word Labs  •  wordlabs.app  •  Root: 'miss' = send</a:t>
             </a:r>
             <a:endParaRPr lang="en-US" sz="800" dirty="0"/>
           </a:p>
@@ -27170,7 +28153,7 @@
                 <a:ea typeface="Trebuchet MS" pitchFamily="34" charset="-122"/>
                 <a:cs typeface="Trebuchet MS" pitchFamily="34" charset="-120"/>
               </a:rPr>
-              <a:t>mission</a:t>
+              <a:t>emission</a:t>
             </a:r>
             <a:endParaRPr lang="en-US" sz="2800" dirty="0"/>
           </a:p>
@@ -27250,7 +28233,7 @@
         </p:nvSpPr>
         <p:spPr>
           <a:xfrm>
-            <a:off x="2938272" y="2258568"/>
+            <a:off x="2221992" y="2258568"/>
             <a:ext cx="1828800" cy="292608"/>
           </a:xfrm>
           <a:prstGeom prst="rect">
@@ -27259,11 +28242,11 @@
             </a:avLst>
           </a:prstGeom>
           <a:solidFill>
-            <a:srgbClr val="CCFBF1"/>
+            <a:srgbClr val="DDD6FE"/>
           </a:solidFill>
           <a:ln w="19050">
             <a:solidFill>
-              <a:srgbClr val="0D9488"/>
+              <a:srgbClr val="7C3AED"/>
             </a:solidFill>
             <a:prstDash val="solid"/>
           </a:ln>
@@ -27284,7 +28267,7 @@
         </p:nvSpPr>
         <p:spPr>
           <a:xfrm>
-            <a:off x="2938272" y="2258568"/>
+            <a:off x="2221992" y="2258568"/>
             <a:ext cx="1828800" cy="292608"/>
           </a:xfrm>
           <a:prstGeom prst="rect">
@@ -27303,13 +28286,13 @@
             <a:r>
               <a:rPr lang="en-US" sz="1300" b="1" dirty="0">
                 <a:solidFill>
-                  <a:srgbClr val="0F766E"/>
+                  <a:srgbClr val="4C1D95"/>
                 </a:solidFill>
                 <a:latin typeface="Trebuchet MS" pitchFamily="34" charset="0"/>
                 <a:ea typeface="Trebuchet MS" pitchFamily="34" charset="-122"/>
                 <a:cs typeface="Trebuchet MS" pitchFamily="34" charset="-120"/>
               </a:rPr>
-              <a:t>miss</a:t>
+              <a:t>e</a:t>
             </a:r>
             <a:endParaRPr lang="en-US" sz="1300" dirty="0"/>
           </a:p>
@@ -27323,7 +28306,7 @@
         </p:nvSpPr>
         <p:spPr>
           <a:xfrm>
-            <a:off x="2938272" y="2569464"/>
+            <a:off x="2221992" y="2569464"/>
             <a:ext cx="1828800" cy="201168"/>
           </a:xfrm>
           <a:prstGeom prst="rect">
@@ -27348,7 +28331,7 @@
                 <a:ea typeface="Calibri" pitchFamily="34" charset="-122"/>
                 <a:cs typeface="Calibri" pitchFamily="34" charset="-120"/>
               </a:rPr>
-              <a:t>send, let go</a:t>
+              <a:t>electronic; online</a:t>
             </a:r>
             <a:endParaRPr lang="en-US" sz="850" dirty="0"/>
           </a:p>
@@ -27362,7 +28345,7 @@
         </p:nvSpPr>
         <p:spPr>
           <a:xfrm>
-            <a:off x="5803392" y="2258568"/>
+            <a:off x="4370832" y="2258568"/>
             <a:ext cx="1828800" cy="292608"/>
           </a:xfrm>
           <a:prstGeom prst="rect">
@@ -27371,11 +28354,11 @@
             </a:avLst>
           </a:prstGeom>
           <a:solidFill>
-            <a:srgbClr val="FCE7F3"/>
+            <a:srgbClr val="CCFBF1"/>
           </a:solidFill>
           <a:ln w="19050">
             <a:solidFill>
-              <a:srgbClr val="DB2777"/>
+              <a:srgbClr val="0D9488"/>
             </a:solidFill>
             <a:prstDash val="solid"/>
           </a:ln>
@@ -27396,7 +28379,7 @@
         </p:nvSpPr>
         <p:spPr>
           <a:xfrm>
-            <a:off x="5803392" y="2258568"/>
+            <a:off x="4370832" y="2258568"/>
             <a:ext cx="1828800" cy="292608"/>
           </a:xfrm>
           <a:prstGeom prst="rect">
@@ -27415,13 +28398,13 @@
             <a:r>
               <a:rPr lang="en-US" sz="1300" b="1" dirty="0">
                 <a:solidFill>
-                  <a:srgbClr val="9D174D"/>
+                  <a:srgbClr val="0F766E"/>
                 </a:solidFill>
                 <a:latin typeface="Trebuchet MS" pitchFamily="34" charset="0"/>
                 <a:ea typeface="Trebuchet MS" pitchFamily="34" charset="-122"/>
                 <a:cs typeface="Trebuchet MS" pitchFamily="34" charset="-120"/>
               </a:rPr>
-              <a:t>ion</a:t>
+              <a:t>miss</a:t>
             </a:r>
             <a:endParaRPr lang="en-US" sz="1300" dirty="0"/>
           </a:p>
@@ -27435,7 +28418,7 @@
         </p:nvSpPr>
         <p:spPr>
           <a:xfrm>
-            <a:off x="5803392" y="2569464"/>
+            <a:off x="4370832" y="2569464"/>
             <a:ext cx="1828800" cy="201168"/>
           </a:xfrm>
           <a:prstGeom prst="rect">
@@ -27460,7 +28443,7 @@
                 <a:ea typeface="Calibri" pitchFamily="34" charset="-122"/>
                 <a:cs typeface="Calibri" pitchFamily="34" charset="-120"/>
               </a:rPr>
-              <a:t>act or state of</a:t>
+              <a:t>send</a:t>
             </a:r>
             <a:endParaRPr lang="en-US" sz="850" dirty="0"/>
           </a:p>
@@ -27469,6 +28452,118 @@
       <p:sp>
         <p:nvSpPr>
           <p:cNvPr id="22" name="Shape 20"/>
+          <p:cNvSpPr/>
+          <p:nvPr/>
+        </p:nvSpPr>
+        <p:spPr>
+          <a:xfrm>
+            <a:off x="6519672" y="2258568"/>
+            <a:ext cx="1828800" cy="292608"/>
+          </a:xfrm>
+          <a:prstGeom prst="rect">
+            <a:avLst>
+              <a:gd name="adj" fmla="val 25000"/>
+            </a:avLst>
+          </a:prstGeom>
+          <a:solidFill>
+            <a:srgbClr val="FCE7F3"/>
+          </a:solidFill>
+          <a:ln w="19050">
+            <a:solidFill>
+              <a:srgbClr val="DB2777"/>
+            </a:solidFill>
+            <a:prstDash val="solid"/>
+          </a:ln>
+          <a:effectLst>
+            <a:outerShdw sx="100000" sy="100000" kx="0" ky="0" algn="bl" rotWithShape="0" blurRad="101600" dist="38100" dir="8100000">
+              <a:srgbClr val="000000">
+                <a:alpha val="12000"/>
+              </a:srgbClr>
+            </a:outerShdw>
+          </a:effectLst>
+        </p:spPr>
+      </p:sp>
+      <p:sp>
+        <p:nvSpPr>
+          <p:cNvPr id="23" name="Text 21"/>
+          <p:cNvSpPr/>
+          <p:nvPr/>
+        </p:nvSpPr>
+        <p:spPr>
+          <a:xfrm>
+            <a:off x="6519672" y="2258568"/>
+            <a:ext cx="1828800" cy="292608"/>
+          </a:xfrm>
+          <a:prstGeom prst="rect">
+            <a:avLst/>
+          </a:prstGeom>
+          <a:noFill/>
+          <a:ln/>
+        </p:spPr>
+        <p:txBody>
+          <a:bodyPr wrap="square" lIns="0" tIns="0" rIns="0" bIns="0" rtlCol="0" anchor="ctr"/>
+          <a:lstStyle/>
+          <a:p>
+            <a:pPr algn="ctr" indent="0" marL="0">
+              <a:buNone/>
+            </a:pPr>
+            <a:r>
+              <a:rPr lang="en-US" sz="1300" b="1" dirty="0">
+                <a:solidFill>
+                  <a:srgbClr val="9D174D"/>
+                </a:solidFill>
+                <a:latin typeface="Trebuchet MS" pitchFamily="34" charset="0"/>
+                <a:ea typeface="Trebuchet MS" pitchFamily="34" charset="-122"/>
+                <a:cs typeface="Trebuchet MS" pitchFamily="34" charset="-120"/>
+              </a:rPr>
+              <a:t>ion</a:t>
+            </a:r>
+            <a:endParaRPr lang="en-US" sz="1300" dirty="0"/>
+          </a:p>
+        </p:txBody>
+      </p:sp>
+      <p:sp>
+        <p:nvSpPr>
+          <p:cNvPr id="24" name="Text 22"/>
+          <p:cNvSpPr/>
+          <p:nvPr/>
+        </p:nvSpPr>
+        <p:spPr>
+          <a:xfrm>
+            <a:off x="6519672" y="2569464"/>
+            <a:ext cx="1828800" cy="201168"/>
+          </a:xfrm>
+          <a:prstGeom prst="rect">
+            <a:avLst/>
+          </a:prstGeom>
+          <a:noFill/>
+          <a:ln/>
+        </p:spPr>
+        <p:txBody>
+          <a:bodyPr wrap="square" lIns="0" tIns="0" rIns="0" bIns="0" rtlCol="0" anchor="t"/>
+          <a:lstStyle/>
+          <a:p>
+            <a:pPr algn="ctr" indent="0" marL="0">
+              <a:buNone/>
+            </a:pPr>
+            <a:r>
+              <a:rPr lang="en-US" sz="850" dirty="0">
+                <a:solidFill>
+                  <a:srgbClr val="475569"/>
+                </a:solidFill>
+                <a:latin typeface="Calibri" pitchFamily="34" charset="0"/>
+                <a:ea typeface="Calibri" pitchFamily="34" charset="-122"/>
+                <a:cs typeface="Calibri" pitchFamily="34" charset="-120"/>
+              </a:rPr>
+              <a:t>act or result of</a:t>
+            </a:r>
+            <a:endParaRPr lang="en-US" sz="850" dirty="0"/>
+          </a:p>
+        </p:txBody>
+      </p:sp>
+      <p:sp>
+        <p:nvSpPr>
+          <p:cNvPr id="25" name="Shape 23"/>
           <p:cNvSpPr/>
           <p:nvPr/>
         </p:nvSpPr>
@@ -27495,7 +28590,7 @@
       </p:sp>
       <p:sp>
         <p:nvSpPr>
-          <p:cNvPr id="23" name="Text 21"/>
+          <p:cNvPr id="26" name="Text 24"/>
           <p:cNvSpPr/>
           <p:nvPr/>
         </p:nvSpPr>
@@ -27534,7 +28629,7 @@
       </p:sp>
       <p:sp>
         <p:nvSpPr>
-          <p:cNvPr id="24" name="Shape 22"/>
+          <p:cNvPr id="27" name="Shape 25"/>
           <p:cNvSpPr/>
           <p:nvPr/>
         </p:nvSpPr>
@@ -27561,13 +28656,13 @@
       </p:sp>
       <p:sp>
         <p:nvSpPr>
-          <p:cNvPr id="25" name="Shape 23"/>
-          <p:cNvSpPr/>
-          <p:nvPr/>
-        </p:nvSpPr>
-        <p:spPr>
-          <a:xfrm>
-            <a:off x="2999232" y="3364992"/>
+          <p:cNvPr id="28" name="Shape 26"/>
+          <p:cNvSpPr/>
+          <p:nvPr/>
+        </p:nvSpPr>
+        <p:spPr>
+          <a:xfrm>
+            <a:off x="2313432" y="3364992"/>
             <a:ext cx="1645920" cy="475488"/>
           </a:xfrm>
           <a:prstGeom prst="rect">
@@ -27588,13 +28683,13 @@
       </p:sp>
       <p:sp>
         <p:nvSpPr>
-          <p:cNvPr id="26" name="Text 24"/>
-          <p:cNvSpPr/>
-          <p:nvPr/>
-        </p:nvSpPr>
-        <p:spPr>
-          <a:xfrm>
-            <a:off x="2999232" y="3364992"/>
+          <p:cNvPr id="29" name="Text 27"/>
+          <p:cNvSpPr/>
+          <p:nvPr/>
+        </p:nvSpPr>
+        <p:spPr>
+          <a:xfrm>
+            <a:off x="2313432" y="3364992"/>
             <a:ext cx="1645920" cy="475488"/>
           </a:xfrm>
           <a:prstGeom prst="rect">
@@ -27619,7 +28714,7 @@
                 <a:ea typeface="Trebuchet MS" pitchFamily="34" charset="-122"/>
                 <a:cs typeface="Trebuchet MS" pitchFamily="34" charset="-120"/>
               </a:rPr>
-              <a:t>mis</a:t>
+              <a:t>e</a:t>
             </a:r>
             <a:endParaRPr lang="en-US" sz="1400" dirty="0"/>
           </a:p>
@@ -27627,14 +28722,14 @@
       </p:sp>
       <p:sp>
         <p:nvSpPr>
-          <p:cNvPr id="27" name="Text 25"/>
-          <p:cNvSpPr/>
-          <p:nvPr/>
-        </p:nvSpPr>
-        <p:spPr>
-          <a:xfrm>
-            <a:off x="4645152" y="3364992"/>
-            <a:ext cx="1097280" cy="475488"/>
+          <p:cNvPr id="30" name="Text 28"/>
+          <p:cNvSpPr/>
+          <p:nvPr/>
+        </p:nvSpPr>
+        <p:spPr>
+          <a:xfrm>
+            <a:off x="3959352" y="3364992"/>
+            <a:ext cx="411480" cy="475488"/>
           </a:xfrm>
           <a:prstGeom prst="rect">
             <a:avLst/>
@@ -27666,13 +28761,13 @@
       </p:sp>
       <p:sp>
         <p:nvSpPr>
-          <p:cNvPr id="28" name="Shape 26"/>
-          <p:cNvSpPr/>
-          <p:nvPr/>
-        </p:nvSpPr>
-        <p:spPr>
-          <a:xfrm>
-            <a:off x="5742432" y="3364992"/>
+          <p:cNvPr id="31" name="Shape 29"/>
+          <p:cNvSpPr/>
+          <p:nvPr/>
+        </p:nvSpPr>
+        <p:spPr>
+          <a:xfrm>
+            <a:off x="4370832" y="3364992"/>
             <a:ext cx="1645920" cy="475488"/>
           </a:xfrm>
           <a:prstGeom prst="rect">
@@ -27693,13 +28788,13 @@
       </p:sp>
       <p:sp>
         <p:nvSpPr>
-          <p:cNvPr id="29" name="Text 27"/>
-          <p:cNvSpPr/>
-          <p:nvPr/>
-        </p:nvSpPr>
-        <p:spPr>
-          <a:xfrm>
-            <a:off x="5742432" y="3364992"/>
+          <p:cNvPr id="32" name="Text 30"/>
+          <p:cNvSpPr/>
+          <p:nvPr/>
+        </p:nvSpPr>
+        <p:spPr>
+          <a:xfrm>
+            <a:off x="4370832" y="3364992"/>
             <a:ext cx="1645920" cy="475488"/>
           </a:xfrm>
           <a:prstGeom prst="rect">
@@ -27724,6 +28819,111 @@
                 <a:ea typeface="Trebuchet MS" pitchFamily="34" charset="-122"/>
                 <a:cs typeface="Trebuchet MS" pitchFamily="34" charset="-120"/>
               </a:rPr>
+              <a:t>mis</a:t>
+            </a:r>
+            <a:endParaRPr lang="en-US" sz="1400" dirty="0"/>
+          </a:p>
+        </p:txBody>
+      </p:sp>
+      <p:sp>
+        <p:nvSpPr>
+          <p:cNvPr id="33" name="Text 31"/>
+          <p:cNvSpPr/>
+          <p:nvPr/>
+        </p:nvSpPr>
+        <p:spPr>
+          <a:xfrm>
+            <a:off x="6016752" y="3364992"/>
+            <a:ext cx="411480" cy="475488"/>
+          </a:xfrm>
+          <a:prstGeom prst="rect">
+            <a:avLst/>
+          </a:prstGeom>
+          <a:noFill/>
+          <a:ln/>
+        </p:spPr>
+        <p:txBody>
+          <a:bodyPr wrap="square" lIns="0" tIns="0" rIns="0" bIns="0" rtlCol="0" anchor="ctr"/>
+          <a:lstStyle/>
+          <a:p>
+            <a:pPr algn="ctr" indent="0" marL="0">
+              <a:buNone/>
+            </a:pPr>
+            <a:r>
+              <a:rPr lang="en-US" sz="1600" b="1" dirty="0">
+                <a:solidFill>
+                  <a:srgbClr val="0D9488"/>
+                </a:solidFill>
+                <a:latin typeface="Trebuchet MS" pitchFamily="34" charset="0"/>
+                <a:ea typeface="Trebuchet MS" pitchFamily="34" charset="-122"/>
+                <a:cs typeface="Trebuchet MS" pitchFamily="34" charset="-120"/>
+              </a:rPr>
+              <a:t>·</a:t>
+            </a:r>
+            <a:endParaRPr lang="en-US" sz="1600" dirty="0"/>
+          </a:p>
+        </p:txBody>
+      </p:sp>
+      <p:sp>
+        <p:nvSpPr>
+          <p:cNvPr id="34" name="Shape 32"/>
+          <p:cNvSpPr/>
+          <p:nvPr/>
+        </p:nvSpPr>
+        <p:spPr>
+          <a:xfrm>
+            <a:off x="6428232" y="3364992"/>
+            <a:ext cx="1645920" cy="475488"/>
+          </a:xfrm>
+          <a:prstGeom prst="rect">
+            <a:avLst>
+              <a:gd name="adj" fmla="val 9615"/>
+            </a:avLst>
+          </a:prstGeom>
+          <a:solidFill>
+            <a:srgbClr val="FFFFFF"/>
+          </a:solidFill>
+          <a:ln w="12700">
+            <a:solidFill>
+              <a:srgbClr val="0D9488"/>
+            </a:solidFill>
+            <a:prstDash val="solid"/>
+          </a:ln>
+        </p:spPr>
+      </p:sp>
+      <p:sp>
+        <p:nvSpPr>
+          <p:cNvPr id="35" name="Text 33"/>
+          <p:cNvSpPr/>
+          <p:nvPr/>
+        </p:nvSpPr>
+        <p:spPr>
+          <a:xfrm>
+            <a:off x="6428232" y="3364992"/>
+            <a:ext cx="1645920" cy="475488"/>
+          </a:xfrm>
+          <a:prstGeom prst="rect">
+            <a:avLst/>
+          </a:prstGeom>
+          <a:noFill/>
+          <a:ln/>
+        </p:spPr>
+        <p:txBody>
+          <a:bodyPr wrap="square" lIns="0" tIns="0" rIns="0" bIns="0" rtlCol="0" anchor="ctr"/>
+          <a:lstStyle/>
+          <a:p>
+            <a:pPr algn="ctr" indent="0" marL="0">
+              <a:buNone/>
+            </a:pPr>
+            <a:r>
+              <a:rPr lang="en-US" sz="1400" b="1" dirty="0">
+                <a:solidFill>
+                  <a:srgbClr val="0D9488"/>
+                </a:solidFill>
+                <a:latin typeface="Trebuchet MS" pitchFamily="34" charset="0"/>
+                <a:ea typeface="Trebuchet MS" pitchFamily="34" charset="-122"/>
+                <a:cs typeface="Trebuchet MS" pitchFamily="34" charset="-120"/>
+              </a:rPr>
               <a:t>sion</a:t>
             </a:r>
             <a:endParaRPr lang="en-US" sz="1400" dirty="0"/>
@@ -27732,7 +28932,7 @@
       </p:sp>
       <p:sp>
         <p:nvSpPr>
-          <p:cNvPr id="30" name="Shape 28"/>
+          <p:cNvPr id="36" name="Shape 34"/>
           <p:cNvSpPr/>
           <p:nvPr/>
         </p:nvSpPr>
@@ -27759,7 +28959,7 @@
       </p:sp>
       <p:sp>
         <p:nvSpPr>
-          <p:cNvPr id="31" name="Text 29"/>
+          <p:cNvPr id="37" name="Text 35"/>
           <p:cNvSpPr/>
           <p:nvPr/>
         </p:nvSpPr>
@@ -27798,7 +28998,7 @@
       </p:sp>
       <p:sp>
         <p:nvSpPr>
-          <p:cNvPr id="32" name="Shape 30"/>
+          <p:cNvPr id="38" name="Shape 36"/>
           <p:cNvSpPr/>
           <p:nvPr/>
         </p:nvSpPr>
@@ -27825,7 +29025,7 @@
       </p:sp>
       <p:sp>
         <p:nvSpPr>
-          <p:cNvPr id="33" name="Text 31"/>
+          <p:cNvPr id="39" name="Text 37"/>
           <p:cNvSpPr/>
           <p:nvPr/>
         </p:nvSpPr>
@@ -28148,7 +29348,7 @@
                 <a:ea typeface="Calibri" pitchFamily="34" charset="-122"/>
                 <a:cs typeface="Calibri" pitchFamily="34" charset="-120"/>
               </a:rPr>
-              <a:t>Word Labs  •  wordlabs.app  •  Root: 'miss' = send, let go, release</a:t>
+              <a:t>Word Labs  •  wordlabs.app  •  Root: 'miss' = send</a:t>
             </a:r>
             <a:endParaRPr lang="en-US" sz="800" dirty="0"/>
           </a:p>
@@ -28287,7 +29487,7 @@
                 <a:ea typeface="Trebuchet MS" pitchFamily="34" charset="-122"/>
                 <a:cs typeface="Trebuchet MS" pitchFamily="34" charset="-120"/>
               </a:rPr>
-              <a:t>mission</a:t>
+              <a:t>emission</a:t>
             </a:r>
             <a:endParaRPr lang="en-US" sz="2800" dirty="0"/>
           </a:p>
@@ -28367,7 +29567,7 @@
         </p:nvSpPr>
         <p:spPr>
           <a:xfrm>
-            <a:off x="2938272" y="2258568"/>
+            <a:off x="2221992" y="2258568"/>
             <a:ext cx="1828800" cy="292608"/>
           </a:xfrm>
           <a:prstGeom prst="rect">
@@ -28376,11 +29576,11 @@
             </a:avLst>
           </a:prstGeom>
           <a:solidFill>
-            <a:srgbClr val="CCFBF1"/>
+            <a:srgbClr val="DDD6FE"/>
           </a:solidFill>
           <a:ln w="19050">
             <a:solidFill>
-              <a:srgbClr val="0D9488"/>
+              <a:srgbClr val="7C3AED"/>
             </a:solidFill>
             <a:prstDash val="solid"/>
           </a:ln>
@@ -28401,7 +29601,7 @@
         </p:nvSpPr>
         <p:spPr>
           <a:xfrm>
-            <a:off x="2938272" y="2258568"/>
+            <a:off x="2221992" y="2258568"/>
             <a:ext cx="1828800" cy="292608"/>
           </a:xfrm>
           <a:prstGeom prst="rect">
@@ -28420,13 +29620,13 @@
             <a:r>
               <a:rPr lang="en-US" sz="1300" b="1" dirty="0">
                 <a:solidFill>
-                  <a:srgbClr val="0F766E"/>
+                  <a:srgbClr val="4C1D95"/>
                 </a:solidFill>
                 <a:latin typeface="Trebuchet MS" pitchFamily="34" charset="0"/>
                 <a:ea typeface="Trebuchet MS" pitchFamily="34" charset="-122"/>
                 <a:cs typeface="Trebuchet MS" pitchFamily="34" charset="-120"/>
               </a:rPr>
-              <a:t>miss</a:t>
+              <a:t>e</a:t>
             </a:r>
             <a:endParaRPr lang="en-US" sz="1300" dirty="0"/>
           </a:p>
@@ -28440,7 +29640,7 @@
         </p:nvSpPr>
         <p:spPr>
           <a:xfrm>
-            <a:off x="2938272" y="2569464"/>
+            <a:off x="2221992" y="2569464"/>
             <a:ext cx="1828800" cy="201168"/>
           </a:xfrm>
           <a:prstGeom prst="rect">
@@ -28465,7 +29665,7 @@
                 <a:ea typeface="Calibri" pitchFamily="34" charset="-122"/>
                 <a:cs typeface="Calibri" pitchFamily="34" charset="-120"/>
               </a:rPr>
-              <a:t>send, let go</a:t>
+              <a:t>electronic; online</a:t>
             </a:r>
             <a:endParaRPr lang="en-US" sz="850" dirty="0"/>
           </a:p>
@@ -28479,7 +29679,7 @@
         </p:nvSpPr>
         <p:spPr>
           <a:xfrm>
-            <a:off x="5803392" y="2258568"/>
+            <a:off x="4370832" y="2258568"/>
             <a:ext cx="1828800" cy="292608"/>
           </a:xfrm>
           <a:prstGeom prst="rect">
@@ -28488,11 +29688,11 @@
             </a:avLst>
           </a:prstGeom>
           <a:solidFill>
-            <a:srgbClr val="FCE7F3"/>
+            <a:srgbClr val="CCFBF1"/>
           </a:solidFill>
           <a:ln w="19050">
             <a:solidFill>
-              <a:srgbClr val="DB2777"/>
+              <a:srgbClr val="0D9488"/>
             </a:solidFill>
             <a:prstDash val="solid"/>
           </a:ln>
@@ -28513,7 +29713,7 @@
         </p:nvSpPr>
         <p:spPr>
           <a:xfrm>
-            <a:off x="5803392" y="2258568"/>
+            <a:off x="4370832" y="2258568"/>
             <a:ext cx="1828800" cy="292608"/>
           </a:xfrm>
           <a:prstGeom prst="rect">
@@ -28532,13 +29732,13 @@
             <a:r>
               <a:rPr lang="en-US" sz="1300" b="1" dirty="0">
                 <a:solidFill>
-                  <a:srgbClr val="9D174D"/>
+                  <a:srgbClr val="0F766E"/>
                 </a:solidFill>
                 <a:latin typeface="Trebuchet MS" pitchFamily="34" charset="0"/>
                 <a:ea typeface="Trebuchet MS" pitchFamily="34" charset="-122"/>
                 <a:cs typeface="Trebuchet MS" pitchFamily="34" charset="-120"/>
               </a:rPr>
-              <a:t>ion</a:t>
+              <a:t>miss</a:t>
             </a:r>
             <a:endParaRPr lang="en-US" sz="1300" dirty="0"/>
           </a:p>
@@ -28552,7 +29752,7 @@
         </p:nvSpPr>
         <p:spPr>
           <a:xfrm>
-            <a:off x="5803392" y="2569464"/>
+            <a:off x="4370832" y="2569464"/>
             <a:ext cx="1828800" cy="201168"/>
           </a:xfrm>
           <a:prstGeom prst="rect">
@@ -28577,7 +29777,7 @@
                 <a:ea typeface="Calibri" pitchFamily="34" charset="-122"/>
                 <a:cs typeface="Calibri" pitchFamily="34" charset="-120"/>
               </a:rPr>
-              <a:t>act or state of</a:t>
+              <a:t>send</a:t>
             </a:r>
             <a:endParaRPr lang="en-US" sz="850" dirty="0"/>
           </a:p>
@@ -28586,6 +29786,118 @@
       <p:sp>
         <p:nvSpPr>
           <p:cNvPr id="22" name="Shape 20"/>
+          <p:cNvSpPr/>
+          <p:nvPr/>
+        </p:nvSpPr>
+        <p:spPr>
+          <a:xfrm>
+            <a:off x="6519672" y="2258568"/>
+            <a:ext cx="1828800" cy="292608"/>
+          </a:xfrm>
+          <a:prstGeom prst="rect">
+            <a:avLst>
+              <a:gd name="adj" fmla="val 25000"/>
+            </a:avLst>
+          </a:prstGeom>
+          <a:solidFill>
+            <a:srgbClr val="FCE7F3"/>
+          </a:solidFill>
+          <a:ln w="19050">
+            <a:solidFill>
+              <a:srgbClr val="DB2777"/>
+            </a:solidFill>
+            <a:prstDash val="solid"/>
+          </a:ln>
+          <a:effectLst>
+            <a:outerShdw sx="100000" sy="100000" kx="0" ky="0" algn="bl" rotWithShape="0" blurRad="101600" dist="38100" dir="8100000">
+              <a:srgbClr val="000000">
+                <a:alpha val="12000"/>
+              </a:srgbClr>
+            </a:outerShdw>
+          </a:effectLst>
+        </p:spPr>
+      </p:sp>
+      <p:sp>
+        <p:nvSpPr>
+          <p:cNvPr id="23" name="Text 21"/>
+          <p:cNvSpPr/>
+          <p:nvPr/>
+        </p:nvSpPr>
+        <p:spPr>
+          <a:xfrm>
+            <a:off x="6519672" y="2258568"/>
+            <a:ext cx="1828800" cy="292608"/>
+          </a:xfrm>
+          <a:prstGeom prst="rect">
+            <a:avLst/>
+          </a:prstGeom>
+          <a:noFill/>
+          <a:ln/>
+        </p:spPr>
+        <p:txBody>
+          <a:bodyPr wrap="square" lIns="0" tIns="0" rIns="0" bIns="0" rtlCol="0" anchor="ctr"/>
+          <a:lstStyle/>
+          <a:p>
+            <a:pPr algn="ctr" indent="0" marL="0">
+              <a:buNone/>
+            </a:pPr>
+            <a:r>
+              <a:rPr lang="en-US" sz="1300" b="1" dirty="0">
+                <a:solidFill>
+                  <a:srgbClr val="9D174D"/>
+                </a:solidFill>
+                <a:latin typeface="Trebuchet MS" pitchFamily="34" charset="0"/>
+                <a:ea typeface="Trebuchet MS" pitchFamily="34" charset="-122"/>
+                <a:cs typeface="Trebuchet MS" pitchFamily="34" charset="-120"/>
+              </a:rPr>
+              <a:t>ion</a:t>
+            </a:r>
+            <a:endParaRPr lang="en-US" sz="1300" dirty="0"/>
+          </a:p>
+        </p:txBody>
+      </p:sp>
+      <p:sp>
+        <p:nvSpPr>
+          <p:cNvPr id="24" name="Text 22"/>
+          <p:cNvSpPr/>
+          <p:nvPr/>
+        </p:nvSpPr>
+        <p:spPr>
+          <a:xfrm>
+            <a:off x="6519672" y="2569464"/>
+            <a:ext cx="1828800" cy="201168"/>
+          </a:xfrm>
+          <a:prstGeom prst="rect">
+            <a:avLst/>
+          </a:prstGeom>
+          <a:noFill/>
+          <a:ln/>
+        </p:spPr>
+        <p:txBody>
+          <a:bodyPr wrap="square" lIns="0" tIns="0" rIns="0" bIns="0" rtlCol="0" anchor="t"/>
+          <a:lstStyle/>
+          <a:p>
+            <a:pPr algn="ctr" indent="0" marL="0">
+              <a:buNone/>
+            </a:pPr>
+            <a:r>
+              <a:rPr lang="en-US" sz="850" dirty="0">
+                <a:solidFill>
+                  <a:srgbClr val="475569"/>
+                </a:solidFill>
+                <a:latin typeface="Calibri" pitchFamily="34" charset="0"/>
+                <a:ea typeface="Calibri" pitchFamily="34" charset="-122"/>
+                <a:cs typeface="Calibri" pitchFamily="34" charset="-120"/>
+              </a:rPr>
+              <a:t>act or result of</a:t>
+            </a:r>
+            <a:endParaRPr lang="en-US" sz="850" dirty="0"/>
+          </a:p>
+        </p:txBody>
+      </p:sp>
+      <p:sp>
+        <p:nvSpPr>
+          <p:cNvPr id="25" name="Shape 23"/>
           <p:cNvSpPr/>
           <p:nvPr/>
         </p:nvSpPr>
@@ -28612,7 +29924,7 @@
       </p:sp>
       <p:sp>
         <p:nvSpPr>
-          <p:cNvPr id="23" name="Text 21"/>
+          <p:cNvPr id="26" name="Text 24"/>
           <p:cNvSpPr/>
           <p:nvPr/>
         </p:nvSpPr>
@@ -28651,7 +29963,7 @@
       </p:sp>
       <p:sp>
         <p:nvSpPr>
-          <p:cNvPr id="24" name="Shape 22"/>
+          <p:cNvPr id="27" name="Shape 25"/>
           <p:cNvSpPr/>
           <p:nvPr/>
         </p:nvSpPr>
@@ -28678,13 +29990,13 @@
       </p:sp>
       <p:sp>
         <p:nvSpPr>
-          <p:cNvPr id="25" name="Shape 23"/>
-          <p:cNvSpPr/>
-          <p:nvPr/>
-        </p:nvSpPr>
-        <p:spPr>
-          <a:xfrm>
-            <a:off x="2999232" y="3364992"/>
+          <p:cNvPr id="28" name="Shape 26"/>
+          <p:cNvSpPr/>
+          <p:nvPr/>
+        </p:nvSpPr>
+        <p:spPr>
+          <a:xfrm>
+            <a:off x="2313432" y="3364992"/>
             <a:ext cx="1645920" cy="475488"/>
           </a:xfrm>
           <a:prstGeom prst="rect">
@@ -28705,13 +30017,13 @@
       </p:sp>
       <p:sp>
         <p:nvSpPr>
-          <p:cNvPr id="26" name="Text 24"/>
-          <p:cNvSpPr/>
-          <p:nvPr/>
-        </p:nvSpPr>
-        <p:spPr>
-          <a:xfrm>
-            <a:off x="2999232" y="3364992"/>
+          <p:cNvPr id="29" name="Text 27"/>
+          <p:cNvSpPr/>
+          <p:nvPr/>
+        </p:nvSpPr>
+        <p:spPr>
+          <a:xfrm>
+            <a:off x="2313432" y="3364992"/>
             <a:ext cx="1645920" cy="475488"/>
           </a:xfrm>
           <a:prstGeom prst="rect">
@@ -28736,7 +30048,7 @@
                 <a:ea typeface="Trebuchet MS" pitchFamily="34" charset="-122"/>
                 <a:cs typeface="Trebuchet MS" pitchFamily="34" charset="-120"/>
               </a:rPr>
-              <a:t>mis</a:t>
+              <a:t>e</a:t>
             </a:r>
             <a:endParaRPr lang="en-US" sz="1400" dirty="0"/>
           </a:p>
@@ -28744,14 +30056,14 @@
       </p:sp>
       <p:sp>
         <p:nvSpPr>
-          <p:cNvPr id="27" name="Text 25"/>
-          <p:cNvSpPr/>
-          <p:nvPr/>
-        </p:nvSpPr>
-        <p:spPr>
-          <a:xfrm>
-            <a:off x="4645152" y="3364992"/>
-            <a:ext cx="1097280" cy="475488"/>
+          <p:cNvPr id="30" name="Text 28"/>
+          <p:cNvSpPr/>
+          <p:nvPr/>
+        </p:nvSpPr>
+        <p:spPr>
+          <a:xfrm>
+            <a:off x="3959352" y="3364992"/>
+            <a:ext cx="411480" cy="475488"/>
           </a:xfrm>
           <a:prstGeom prst="rect">
             <a:avLst/>
@@ -28783,13 +30095,13 @@
       </p:sp>
       <p:sp>
         <p:nvSpPr>
-          <p:cNvPr id="28" name="Shape 26"/>
-          <p:cNvSpPr/>
-          <p:nvPr/>
-        </p:nvSpPr>
-        <p:spPr>
-          <a:xfrm>
-            <a:off x="5742432" y="3364992"/>
+          <p:cNvPr id="31" name="Shape 29"/>
+          <p:cNvSpPr/>
+          <p:nvPr/>
+        </p:nvSpPr>
+        <p:spPr>
+          <a:xfrm>
+            <a:off x="4370832" y="3364992"/>
             <a:ext cx="1645920" cy="475488"/>
           </a:xfrm>
           <a:prstGeom prst="rect">
@@ -28810,13 +30122,13 @@
       </p:sp>
       <p:sp>
         <p:nvSpPr>
-          <p:cNvPr id="29" name="Text 27"/>
-          <p:cNvSpPr/>
-          <p:nvPr/>
-        </p:nvSpPr>
-        <p:spPr>
-          <a:xfrm>
-            <a:off x="5742432" y="3364992"/>
+          <p:cNvPr id="32" name="Text 30"/>
+          <p:cNvSpPr/>
+          <p:nvPr/>
+        </p:nvSpPr>
+        <p:spPr>
+          <a:xfrm>
+            <a:off x="4370832" y="3364992"/>
             <a:ext cx="1645920" cy="475488"/>
           </a:xfrm>
           <a:prstGeom prst="rect">
@@ -28841,6 +30153,111 @@
                 <a:ea typeface="Trebuchet MS" pitchFamily="34" charset="-122"/>
                 <a:cs typeface="Trebuchet MS" pitchFamily="34" charset="-120"/>
               </a:rPr>
+              <a:t>mis</a:t>
+            </a:r>
+            <a:endParaRPr lang="en-US" sz="1400" dirty="0"/>
+          </a:p>
+        </p:txBody>
+      </p:sp>
+      <p:sp>
+        <p:nvSpPr>
+          <p:cNvPr id="33" name="Text 31"/>
+          <p:cNvSpPr/>
+          <p:nvPr/>
+        </p:nvSpPr>
+        <p:spPr>
+          <a:xfrm>
+            <a:off x="6016752" y="3364992"/>
+            <a:ext cx="411480" cy="475488"/>
+          </a:xfrm>
+          <a:prstGeom prst="rect">
+            <a:avLst/>
+          </a:prstGeom>
+          <a:noFill/>
+          <a:ln/>
+        </p:spPr>
+        <p:txBody>
+          <a:bodyPr wrap="square" lIns="0" tIns="0" rIns="0" bIns="0" rtlCol="0" anchor="ctr"/>
+          <a:lstStyle/>
+          <a:p>
+            <a:pPr algn="ctr" indent="0" marL="0">
+              <a:buNone/>
+            </a:pPr>
+            <a:r>
+              <a:rPr lang="en-US" sz="1600" b="1" dirty="0">
+                <a:solidFill>
+                  <a:srgbClr val="0D9488"/>
+                </a:solidFill>
+                <a:latin typeface="Trebuchet MS" pitchFamily="34" charset="0"/>
+                <a:ea typeface="Trebuchet MS" pitchFamily="34" charset="-122"/>
+                <a:cs typeface="Trebuchet MS" pitchFamily="34" charset="-120"/>
+              </a:rPr>
+              <a:t>·</a:t>
+            </a:r>
+            <a:endParaRPr lang="en-US" sz="1600" dirty="0"/>
+          </a:p>
+        </p:txBody>
+      </p:sp>
+      <p:sp>
+        <p:nvSpPr>
+          <p:cNvPr id="34" name="Shape 32"/>
+          <p:cNvSpPr/>
+          <p:nvPr/>
+        </p:nvSpPr>
+        <p:spPr>
+          <a:xfrm>
+            <a:off x="6428232" y="3364992"/>
+            <a:ext cx="1645920" cy="475488"/>
+          </a:xfrm>
+          <a:prstGeom prst="rect">
+            <a:avLst>
+              <a:gd name="adj" fmla="val 9615"/>
+            </a:avLst>
+          </a:prstGeom>
+          <a:solidFill>
+            <a:srgbClr val="FFFFFF"/>
+          </a:solidFill>
+          <a:ln w="12700">
+            <a:solidFill>
+              <a:srgbClr val="0D9488"/>
+            </a:solidFill>
+            <a:prstDash val="solid"/>
+          </a:ln>
+        </p:spPr>
+      </p:sp>
+      <p:sp>
+        <p:nvSpPr>
+          <p:cNvPr id="35" name="Text 33"/>
+          <p:cNvSpPr/>
+          <p:nvPr/>
+        </p:nvSpPr>
+        <p:spPr>
+          <a:xfrm>
+            <a:off x="6428232" y="3364992"/>
+            <a:ext cx="1645920" cy="475488"/>
+          </a:xfrm>
+          <a:prstGeom prst="rect">
+            <a:avLst/>
+          </a:prstGeom>
+          <a:noFill/>
+          <a:ln/>
+        </p:spPr>
+        <p:txBody>
+          <a:bodyPr wrap="square" lIns="0" tIns="0" rIns="0" bIns="0" rtlCol="0" anchor="ctr"/>
+          <a:lstStyle/>
+          <a:p>
+            <a:pPr algn="ctr" indent="0" marL="0">
+              <a:buNone/>
+            </a:pPr>
+            <a:r>
+              <a:rPr lang="en-US" sz="1400" b="1" dirty="0">
+                <a:solidFill>
+                  <a:srgbClr val="0D9488"/>
+                </a:solidFill>
+                <a:latin typeface="Trebuchet MS" pitchFamily="34" charset="0"/>
+                <a:ea typeface="Trebuchet MS" pitchFamily="34" charset="-122"/>
+                <a:cs typeface="Trebuchet MS" pitchFamily="34" charset="-120"/>
+              </a:rPr>
               <a:t>sion</a:t>
             </a:r>
             <a:endParaRPr lang="en-US" sz="1400" dirty="0"/>
@@ -28849,7 +30266,7 @@
       </p:sp>
       <p:sp>
         <p:nvSpPr>
-          <p:cNvPr id="30" name="Shape 28"/>
+          <p:cNvPr id="36" name="Shape 34"/>
           <p:cNvSpPr/>
           <p:nvPr/>
         </p:nvSpPr>
@@ -28876,7 +30293,7 @@
       </p:sp>
       <p:sp>
         <p:nvSpPr>
-          <p:cNvPr id="31" name="Text 29"/>
+          <p:cNvPr id="37" name="Text 35"/>
           <p:cNvSpPr/>
           <p:nvPr/>
         </p:nvSpPr>
@@ -28915,18 +30332,18 @@
       </p:sp>
       <p:sp>
         <p:nvSpPr>
-          <p:cNvPr id="32" name="Shape 30"/>
+          <p:cNvPr id="38" name="Shape 36"/>
           <p:cNvSpPr/>
           <p:nvPr/>
         </p:nvSpPr>
         <p:spPr>
           <a:xfrm>
             <a:off x="1874520" y="4096512"/>
-            <a:ext cx="6903720" cy="804672"/>
+            <a:ext cx="6903720" cy="658368"/>
           </a:xfrm>
           <a:prstGeom prst="rect">
             <a:avLst>
-              <a:gd name="adj" fmla="val 6818"/>
+              <a:gd name="adj" fmla="val 8333"/>
             </a:avLst>
           </a:prstGeom>
           <a:solidFill>
@@ -28942,18 +30359,18 @@
       </p:sp>
       <p:sp>
         <p:nvSpPr>
-          <p:cNvPr id="33" name="Shape 31"/>
-          <p:cNvSpPr/>
-          <p:nvPr/>
-        </p:nvSpPr>
-        <p:spPr>
-          <a:xfrm>
-            <a:off x="2670048" y="4169664"/>
-            <a:ext cx="685800" cy="384048"/>
+          <p:cNvPr id="39" name="Shape 37"/>
+          <p:cNvSpPr/>
+          <p:nvPr/>
+        </p:nvSpPr>
+        <p:spPr>
+          <a:xfrm>
+            <a:off x="2124837" y="4169664"/>
+            <a:ext cx="685800" cy="475488"/>
           </a:xfrm>
           <a:prstGeom prst="rect">
             <a:avLst>
-              <a:gd name="adj" fmla="val 9524"/>
+              <a:gd name="adj" fmla="val 7692"/>
             </a:avLst>
           </a:prstGeom>
           <a:solidFill>
@@ -28969,14 +30386,14 @@
       </p:sp>
       <p:sp>
         <p:nvSpPr>
-          <p:cNvPr id="34" name="Text 32"/>
-          <p:cNvSpPr/>
-          <p:nvPr/>
-        </p:nvSpPr>
-        <p:spPr>
-          <a:xfrm>
-            <a:off x="2670048" y="4169664"/>
-            <a:ext cx="685800" cy="384048"/>
+          <p:cNvPr id="40" name="Text 38"/>
+          <p:cNvSpPr/>
+          <p:nvPr/>
+        </p:nvSpPr>
+        <p:spPr>
+          <a:xfrm>
+            <a:off x="2124837" y="4169664"/>
+            <a:ext cx="685800" cy="475488"/>
           </a:xfrm>
           <a:prstGeom prst="rect">
             <a:avLst/>
@@ -29000,7 +30417,7 @@
                 <a:ea typeface="Trebuchet MS" pitchFamily="34" charset="-122"/>
                 <a:cs typeface="Trebuchet MS" pitchFamily="34" charset="-120"/>
               </a:rPr>
-              <a:t>m</a:t>
+              <a:t>e</a:t>
             </a:r>
             <a:endParaRPr lang="en-US" sz="900" dirty="0"/>
           </a:p>
@@ -29008,18 +30425,18 @@
       </p:sp>
       <p:sp>
         <p:nvSpPr>
-          <p:cNvPr id="35" name="Shape 33"/>
-          <p:cNvSpPr/>
-          <p:nvPr/>
-        </p:nvSpPr>
-        <p:spPr>
-          <a:xfrm>
-            <a:off x="4123944" y="4169664"/>
-            <a:ext cx="685800" cy="384048"/>
+          <p:cNvPr id="41" name="Shape 39"/>
+          <p:cNvSpPr/>
+          <p:nvPr/>
+        </p:nvSpPr>
+        <p:spPr>
+          <a:xfrm>
+            <a:off x="3033522" y="4169664"/>
+            <a:ext cx="685800" cy="475488"/>
           </a:xfrm>
           <a:prstGeom prst="rect">
             <a:avLst>
-              <a:gd name="adj" fmla="val 9524"/>
+              <a:gd name="adj" fmla="val 7692"/>
             </a:avLst>
           </a:prstGeom>
           <a:solidFill>
@@ -29035,14 +30452,14 @@
       </p:sp>
       <p:sp>
         <p:nvSpPr>
-          <p:cNvPr id="36" name="Text 34"/>
-          <p:cNvSpPr/>
-          <p:nvPr/>
-        </p:nvSpPr>
-        <p:spPr>
-          <a:xfrm>
-            <a:off x="4123944" y="4169664"/>
-            <a:ext cx="685800" cy="384048"/>
+          <p:cNvPr id="42" name="Text 40"/>
+          <p:cNvSpPr/>
+          <p:nvPr/>
+        </p:nvSpPr>
+        <p:spPr>
+          <a:xfrm>
+            <a:off x="3033522" y="4169664"/>
+            <a:ext cx="685800" cy="475488"/>
           </a:xfrm>
           <a:prstGeom prst="rect">
             <a:avLst/>
@@ -29066,7 +30483,7 @@
                 <a:ea typeface="Trebuchet MS" pitchFamily="34" charset="-122"/>
                 <a:cs typeface="Trebuchet MS" pitchFamily="34" charset="-120"/>
               </a:rPr>
-              <a:t>i</a:t>
+              <a:t>m</a:t>
             </a:r>
             <a:endParaRPr lang="en-US" sz="900" dirty="0"/>
           </a:p>
@@ -29074,18 +30491,18 @@
       </p:sp>
       <p:sp>
         <p:nvSpPr>
-          <p:cNvPr id="37" name="Shape 35"/>
-          <p:cNvSpPr/>
-          <p:nvPr/>
-        </p:nvSpPr>
-        <p:spPr>
-          <a:xfrm>
-            <a:off x="5577840" y="4169664"/>
-            <a:ext cx="685800" cy="384048"/>
+          <p:cNvPr id="43" name="Shape 41"/>
+          <p:cNvSpPr/>
+          <p:nvPr/>
+        </p:nvSpPr>
+        <p:spPr>
+          <a:xfrm>
+            <a:off x="3942207" y="4169664"/>
+            <a:ext cx="685800" cy="475488"/>
           </a:xfrm>
           <a:prstGeom prst="rect">
             <a:avLst>
-              <a:gd name="adj" fmla="val 9524"/>
+              <a:gd name="adj" fmla="val 7692"/>
             </a:avLst>
           </a:prstGeom>
           <a:solidFill>
@@ -29101,14 +30518,14 @@
       </p:sp>
       <p:sp>
         <p:nvSpPr>
-          <p:cNvPr id="38" name="Text 36"/>
-          <p:cNvSpPr/>
-          <p:nvPr/>
-        </p:nvSpPr>
-        <p:spPr>
-          <a:xfrm>
-            <a:off x="5577840" y="4169664"/>
-            <a:ext cx="685800" cy="384048"/>
+          <p:cNvPr id="44" name="Text 42"/>
+          <p:cNvSpPr/>
+          <p:nvPr/>
+        </p:nvSpPr>
+        <p:spPr>
+          <a:xfrm>
+            <a:off x="3942207" y="4169664"/>
+            <a:ext cx="685800" cy="475488"/>
           </a:xfrm>
           <a:prstGeom prst="rect">
             <a:avLst/>
@@ -29132,7 +30549,7 @@
                 <a:ea typeface="Trebuchet MS" pitchFamily="34" charset="-122"/>
                 <a:cs typeface="Trebuchet MS" pitchFamily="34" charset="-120"/>
               </a:rPr>
-              <a:t>ss</a:t>
+              <a:t>i</a:t>
             </a:r>
             <a:endParaRPr lang="en-US" sz="900" dirty="0"/>
           </a:p>
@@ -29140,18 +30557,18 @@
       </p:sp>
       <p:sp>
         <p:nvSpPr>
-          <p:cNvPr id="39" name="Shape 37"/>
-          <p:cNvSpPr/>
-          <p:nvPr/>
-        </p:nvSpPr>
-        <p:spPr>
-          <a:xfrm>
-            <a:off x="7031736" y="4169664"/>
-            <a:ext cx="685800" cy="384048"/>
+          <p:cNvPr id="45" name="Shape 43"/>
+          <p:cNvSpPr/>
+          <p:nvPr/>
+        </p:nvSpPr>
+        <p:spPr>
+          <a:xfrm>
+            <a:off x="4850892" y="4169664"/>
+            <a:ext cx="685800" cy="475488"/>
           </a:xfrm>
           <a:prstGeom prst="rect">
             <a:avLst>
-              <a:gd name="adj" fmla="val 9524"/>
+              <a:gd name="adj" fmla="val 7692"/>
             </a:avLst>
           </a:prstGeom>
           <a:solidFill>
@@ -29167,14 +30584,14 @@
       </p:sp>
       <p:sp>
         <p:nvSpPr>
-          <p:cNvPr id="40" name="Text 38"/>
-          <p:cNvSpPr/>
-          <p:nvPr/>
-        </p:nvSpPr>
-        <p:spPr>
-          <a:xfrm>
-            <a:off x="7031736" y="4169664"/>
-            <a:ext cx="685800" cy="384048"/>
+          <p:cNvPr id="46" name="Text 44"/>
+          <p:cNvSpPr/>
+          <p:nvPr/>
+        </p:nvSpPr>
+        <p:spPr>
+          <a:xfrm>
+            <a:off x="4850892" y="4169664"/>
+            <a:ext cx="685800" cy="475488"/>
           </a:xfrm>
           <a:prstGeom prst="rect">
             <a:avLst/>
@@ -29198,7 +30615,7 @@
                 <a:ea typeface="Trebuchet MS" pitchFamily="34" charset="-122"/>
                 <a:cs typeface="Trebuchet MS" pitchFamily="34" charset="-120"/>
               </a:rPr>
-              <a:t>ion</a:t>
+              <a:t>s</a:t>
             </a:r>
             <a:endParaRPr lang="en-US" sz="900" dirty="0"/>
           </a:p>
@@ -29206,40 +30623,199 @@
       </p:sp>
       <p:sp>
         <p:nvSpPr>
-          <p:cNvPr id="41" name="Text 39"/>
-          <p:cNvSpPr/>
-          <p:nvPr/>
-        </p:nvSpPr>
-        <p:spPr>
-          <a:xfrm>
-            <a:off x="7031736" y="4572000"/>
-            <a:ext cx="685800" cy="219456"/>
-          </a:xfrm>
-          <a:prstGeom prst="rect">
-            <a:avLst/>
-          </a:prstGeom>
-          <a:noFill/>
-          <a:ln/>
-        </p:spPr>
-        <p:txBody>
-          <a:bodyPr wrap="square" lIns="0" tIns="0" rIns="0" bIns="0" rtlCol="0" anchor="t"/>
-          <a:lstStyle/>
-          <a:p>
-            <a:pPr algn="ctr" indent="0" marL="0">
-              <a:buNone/>
-            </a:pPr>
-            <a:r>
-              <a:rPr lang="en-US" sz="750" i="1" dirty="0">
-                <a:solidFill>
-                  <a:srgbClr val="94A3B8"/>
-                </a:solidFill>
-                <a:latin typeface="Calibri" pitchFamily="34" charset="0"/>
-                <a:ea typeface="Calibri" pitchFamily="34" charset="-122"/>
-                <a:cs typeface="Calibri" pitchFamily="34" charset="-120"/>
-              </a:rPr>
-              <a:t>/shun/</a:t>
-            </a:r>
-            <a:endParaRPr lang="en-US" sz="750" dirty="0"/>
+          <p:cNvPr id="47" name="Shape 45"/>
+          <p:cNvSpPr/>
+          <p:nvPr/>
+        </p:nvSpPr>
+        <p:spPr>
+          <a:xfrm>
+            <a:off x="5759577" y="4169664"/>
+            <a:ext cx="685800" cy="475488"/>
+          </a:xfrm>
+          <a:prstGeom prst="rect">
+            <a:avLst>
+              <a:gd name="adj" fmla="val 7692"/>
+            </a:avLst>
+          </a:prstGeom>
+          <a:solidFill>
+            <a:srgbClr val="FFFFFF"/>
+          </a:solidFill>
+          <a:ln w="12700">
+            <a:solidFill>
+              <a:srgbClr val="DB2777"/>
+            </a:solidFill>
+            <a:prstDash val="solid"/>
+          </a:ln>
+        </p:spPr>
+      </p:sp>
+      <p:sp>
+        <p:nvSpPr>
+          <p:cNvPr id="48" name="Text 46"/>
+          <p:cNvSpPr/>
+          <p:nvPr/>
+        </p:nvSpPr>
+        <p:spPr>
+          <a:xfrm>
+            <a:off x="5759577" y="4169664"/>
+            <a:ext cx="685800" cy="475488"/>
+          </a:xfrm>
+          <a:prstGeom prst="rect">
+            <a:avLst/>
+          </a:prstGeom>
+          <a:noFill/>
+          <a:ln/>
+        </p:spPr>
+        <p:txBody>
+          <a:bodyPr wrap="square" lIns="0" tIns="0" rIns="0" bIns="0" rtlCol="0" anchor="ctr"/>
+          <a:lstStyle/>
+          <a:p>
+            <a:pPr algn="ctr" indent="0" marL="0">
+              <a:buNone/>
+            </a:pPr>
+            <a:r>
+              <a:rPr lang="en-US" sz="900" b="1" dirty="0">
+                <a:solidFill>
+                  <a:srgbClr val="9D174D"/>
+                </a:solidFill>
+                <a:latin typeface="Trebuchet MS" pitchFamily="34" charset="0"/>
+                <a:ea typeface="Trebuchet MS" pitchFamily="34" charset="-122"/>
+                <a:cs typeface="Trebuchet MS" pitchFamily="34" charset="-120"/>
+              </a:rPr>
+              <a:t>si</a:t>
+            </a:r>
+            <a:endParaRPr lang="en-US" sz="900" dirty="0"/>
+          </a:p>
+        </p:txBody>
+      </p:sp>
+      <p:sp>
+        <p:nvSpPr>
+          <p:cNvPr id="49" name="Shape 47"/>
+          <p:cNvSpPr/>
+          <p:nvPr/>
+        </p:nvSpPr>
+        <p:spPr>
+          <a:xfrm>
+            <a:off x="6668262" y="4169664"/>
+            <a:ext cx="685800" cy="475488"/>
+          </a:xfrm>
+          <a:prstGeom prst="rect">
+            <a:avLst>
+              <a:gd name="adj" fmla="val 7692"/>
+            </a:avLst>
+          </a:prstGeom>
+          <a:solidFill>
+            <a:srgbClr val="FFFFFF"/>
+          </a:solidFill>
+          <a:ln w="12700">
+            <a:solidFill>
+              <a:srgbClr val="DB2777"/>
+            </a:solidFill>
+            <a:prstDash val="solid"/>
+          </a:ln>
+        </p:spPr>
+      </p:sp>
+      <p:sp>
+        <p:nvSpPr>
+          <p:cNvPr id="50" name="Text 48"/>
+          <p:cNvSpPr/>
+          <p:nvPr/>
+        </p:nvSpPr>
+        <p:spPr>
+          <a:xfrm>
+            <a:off x="6668262" y="4169664"/>
+            <a:ext cx="685800" cy="475488"/>
+          </a:xfrm>
+          <a:prstGeom prst="rect">
+            <a:avLst/>
+          </a:prstGeom>
+          <a:noFill/>
+          <a:ln/>
+        </p:spPr>
+        <p:txBody>
+          <a:bodyPr wrap="square" lIns="0" tIns="0" rIns="0" bIns="0" rtlCol="0" anchor="ctr"/>
+          <a:lstStyle/>
+          <a:p>
+            <a:pPr algn="ctr" indent="0" marL="0">
+              <a:buNone/>
+            </a:pPr>
+            <a:r>
+              <a:rPr lang="en-US" sz="900" b="1" dirty="0">
+                <a:solidFill>
+                  <a:srgbClr val="9D174D"/>
+                </a:solidFill>
+                <a:latin typeface="Trebuchet MS" pitchFamily="34" charset="0"/>
+                <a:ea typeface="Trebuchet MS" pitchFamily="34" charset="-122"/>
+                <a:cs typeface="Trebuchet MS" pitchFamily="34" charset="-120"/>
+              </a:rPr>
+              <a:t>o</a:t>
+            </a:r>
+            <a:endParaRPr lang="en-US" sz="900" dirty="0"/>
+          </a:p>
+        </p:txBody>
+      </p:sp>
+      <p:sp>
+        <p:nvSpPr>
+          <p:cNvPr id="51" name="Shape 49"/>
+          <p:cNvSpPr/>
+          <p:nvPr/>
+        </p:nvSpPr>
+        <p:spPr>
+          <a:xfrm>
+            <a:off x="7576947" y="4169664"/>
+            <a:ext cx="685800" cy="475488"/>
+          </a:xfrm>
+          <a:prstGeom prst="rect">
+            <a:avLst>
+              <a:gd name="adj" fmla="val 7692"/>
+            </a:avLst>
+          </a:prstGeom>
+          <a:solidFill>
+            <a:srgbClr val="FFFFFF"/>
+          </a:solidFill>
+          <a:ln w="12700">
+            <a:solidFill>
+              <a:srgbClr val="DB2777"/>
+            </a:solidFill>
+            <a:prstDash val="solid"/>
+          </a:ln>
+        </p:spPr>
+      </p:sp>
+      <p:sp>
+        <p:nvSpPr>
+          <p:cNvPr id="52" name="Text 50"/>
+          <p:cNvSpPr/>
+          <p:nvPr/>
+        </p:nvSpPr>
+        <p:spPr>
+          <a:xfrm>
+            <a:off x="7576947" y="4169664"/>
+            <a:ext cx="685800" cy="475488"/>
+          </a:xfrm>
+          <a:prstGeom prst="rect">
+            <a:avLst/>
+          </a:prstGeom>
+          <a:noFill/>
+          <a:ln/>
+        </p:spPr>
+        <p:txBody>
+          <a:bodyPr wrap="square" lIns="0" tIns="0" rIns="0" bIns="0" rtlCol="0" anchor="ctr"/>
+          <a:lstStyle/>
+          <a:p>
+            <a:pPr algn="ctr" indent="0" marL="0">
+              <a:buNone/>
+            </a:pPr>
+            <a:r>
+              <a:rPr lang="en-US" sz="900" b="1" dirty="0">
+                <a:solidFill>
+                  <a:srgbClr val="9D174D"/>
+                </a:solidFill>
+                <a:latin typeface="Trebuchet MS" pitchFamily="34" charset="0"/>
+                <a:ea typeface="Trebuchet MS" pitchFamily="34" charset="-122"/>
+                <a:cs typeface="Trebuchet MS" pitchFamily="34" charset="-120"/>
+              </a:rPr>
+              <a:t>n</a:t>
+            </a:r>
+            <a:endParaRPr lang="en-US" sz="900" dirty="0"/>
           </a:p>
         </p:txBody>
       </p:sp>
@@ -29529,7 +31105,7 @@
                 <a:ea typeface="Calibri" pitchFamily="34" charset="-122"/>
                 <a:cs typeface="Calibri" pitchFamily="34" charset="-120"/>
               </a:rPr>
-              <a:t>Word Labs  •  wordlabs.app  •  Root: 'miss' = send, let go, release</a:t>
+              <a:t>Word Labs  •  wordlabs.app  •  Root: 'miss' = send</a:t>
             </a:r>
             <a:endParaRPr lang="en-US" sz="800" dirty="0"/>
           </a:p>
@@ -29668,7 +31244,7 @@
                 <a:ea typeface="Trebuchet MS" pitchFamily="34" charset="-122"/>
                 <a:cs typeface="Trebuchet MS" pitchFamily="34" charset="-120"/>
               </a:rPr>
-              <a:t>admission</a:t>
+              <a:t>emissions</a:t>
             </a:r>
             <a:endParaRPr lang="en-US" sz="2800" dirty="0"/>
           </a:p>
@@ -30356,7 +31932,7 @@
                 <a:ea typeface="Calibri" pitchFamily="34" charset="-122"/>
                 <a:cs typeface="Calibri" pitchFamily="34" charset="-120"/>
               </a:rPr>
-              <a:t>Word Labs  •  wordlabs.app  •  Root: 'miss' = send, let go, release</a:t>
+              <a:t>Word Labs  •  wordlabs.app  •  Root: 'miss' = send</a:t>
             </a:r>
             <a:endParaRPr lang="en-US" sz="800" dirty="0"/>
           </a:p>
@@ -30495,7 +32071,7 @@
                 <a:ea typeface="Trebuchet MS" pitchFamily="34" charset="-122"/>
                 <a:cs typeface="Trebuchet MS" pitchFamily="34" charset="-120"/>
               </a:rPr>
-              <a:t>admission</a:t>
+              <a:t>emissions</a:t>
             </a:r>
             <a:endParaRPr lang="en-US" sz="2800" dirty="0"/>
           </a:p>
@@ -30575,8 +32151,8 @@
         </p:nvSpPr>
         <p:spPr>
           <a:xfrm>
-            <a:off x="2221992" y="2258568"/>
-            <a:ext cx="1828800" cy="292608"/>
+            <a:off x="1989734" y="2258568"/>
+            <a:ext cx="1581912" cy="292608"/>
           </a:xfrm>
           <a:prstGeom prst="rect">
             <a:avLst>
@@ -30609,8 +32185,8 @@
         </p:nvSpPr>
         <p:spPr>
           <a:xfrm>
-            <a:off x="2221992" y="2258568"/>
-            <a:ext cx="1828800" cy="292608"/>
+            <a:off x="1989734" y="2258568"/>
+            <a:ext cx="1581912" cy="292608"/>
           </a:xfrm>
           <a:prstGeom prst="rect">
             <a:avLst/>
@@ -30634,7 +32210,7 @@
                 <a:ea typeface="Trebuchet MS" pitchFamily="34" charset="-122"/>
                 <a:cs typeface="Trebuchet MS" pitchFamily="34" charset="-120"/>
               </a:rPr>
-              <a:t>ad</a:t>
+              <a:t>e</a:t>
             </a:r>
             <a:endParaRPr lang="en-US" sz="1300" dirty="0"/>
           </a:p>
@@ -30648,8 +32224,8 @@
         </p:nvSpPr>
         <p:spPr>
           <a:xfrm>
-            <a:off x="2221992" y="2569464"/>
-            <a:ext cx="1828800" cy="201168"/>
+            <a:off x="1989734" y="2569464"/>
+            <a:ext cx="1581912" cy="201168"/>
           </a:xfrm>
           <a:prstGeom prst="rect">
             <a:avLst/>
@@ -30673,7 +32249,7 @@
                 <a:ea typeface="Calibri" pitchFamily="34" charset="-122"/>
                 <a:cs typeface="Calibri" pitchFamily="34" charset="-120"/>
               </a:rPr>
-              <a:t>to, towards</a:t>
+              <a:t>electronic; online</a:t>
             </a:r>
             <a:endParaRPr lang="en-US" sz="850" dirty="0"/>
           </a:p>
@@ -30687,8 +32263,8 @@
         </p:nvSpPr>
         <p:spPr>
           <a:xfrm>
-            <a:off x="4370832" y="2258568"/>
-            <a:ext cx="1828800" cy="292608"/>
+            <a:off x="3659429" y="2258568"/>
+            <a:ext cx="1581912" cy="292608"/>
           </a:xfrm>
           <a:prstGeom prst="rect">
             <a:avLst>
@@ -30721,8 +32297,8 @@
         </p:nvSpPr>
         <p:spPr>
           <a:xfrm>
-            <a:off x="4370832" y="2258568"/>
-            <a:ext cx="1828800" cy="292608"/>
+            <a:off x="3659429" y="2258568"/>
+            <a:ext cx="1581912" cy="292608"/>
           </a:xfrm>
           <a:prstGeom prst="rect">
             <a:avLst/>
@@ -30760,8 +32336,8 @@
         </p:nvSpPr>
         <p:spPr>
           <a:xfrm>
-            <a:off x="4370832" y="2569464"/>
-            <a:ext cx="1828800" cy="201168"/>
+            <a:off x="3659429" y="2569464"/>
+            <a:ext cx="1581912" cy="201168"/>
           </a:xfrm>
           <a:prstGeom prst="rect">
             <a:avLst/>
@@ -30785,7 +32361,7 @@
                 <a:ea typeface="Calibri" pitchFamily="34" charset="-122"/>
                 <a:cs typeface="Calibri" pitchFamily="34" charset="-120"/>
               </a:rPr>
-              <a:t>send, let go</a:t>
+              <a:t>send</a:t>
             </a:r>
             <a:endParaRPr lang="en-US" sz="850" dirty="0"/>
           </a:p>
@@ -30799,8 +32375,8 @@
         </p:nvSpPr>
         <p:spPr>
           <a:xfrm>
-            <a:off x="6519672" y="2258568"/>
-            <a:ext cx="1828800" cy="292608"/>
+            <a:off x="5329123" y="2258568"/>
+            <a:ext cx="1581912" cy="292608"/>
           </a:xfrm>
           <a:prstGeom prst="rect">
             <a:avLst>
@@ -30833,8 +32409,8 @@
         </p:nvSpPr>
         <p:spPr>
           <a:xfrm>
-            <a:off x="6519672" y="2258568"/>
-            <a:ext cx="1828800" cy="292608"/>
+            <a:off x="5329123" y="2258568"/>
+            <a:ext cx="1581912" cy="292608"/>
           </a:xfrm>
           <a:prstGeom prst="rect">
             <a:avLst/>
@@ -30872,8 +32448,8 @@
         </p:nvSpPr>
         <p:spPr>
           <a:xfrm>
-            <a:off x="6519672" y="2569464"/>
-            <a:ext cx="1828800" cy="201168"/>
+            <a:off x="5329123" y="2569464"/>
+            <a:ext cx="1581912" cy="201168"/>
           </a:xfrm>
           <a:prstGeom prst="rect">
             <a:avLst/>
@@ -30897,7 +32473,7 @@
                 <a:ea typeface="Calibri" pitchFamily="34" charset="-122"/>
                 <a:cs typeface="Calibri" pitchFamily="34" charset="-120"/>
               </a:rPr>
-              <a:t>act or state of</a:t>
+              <a:t>act or result of</a:t>
             </a:r>
             <a:endParaRPr lang="en-US" sz="850" dirty="0"/>
           </a:p>
@@ -30906,6 +32482,118 @@
       <p:sp>
         <p:nvSpPr>
           <p:cNvPr id="25" name="Shape 23"/>
+          <p:cNvSpPr/>
+          <p:nvPr/>
+        </p:nvSpPr>
+        <p:spPr>
+          <a:xfrm>
+            <a:off x="6998818" y="2258568"/>
+            <a:ext cx="1581912" cy="292608"/>
+          </a:xfrm>
+          <a:prstGeom prst="rect">
+            <a:avLst>
+              <a:gd name="adj" fmla="val 25000"/>
+            </a:avLst>
+          </a:prstGeom>
+          <a:solidFill>
+            <a:srgbClr val="FCE7F3"/>
+          </a:solidFill>
+          <a:ln w="19050">
+            <a:solidFill>
+              <a:srgbClr val="DB2777"/>
+            </a:solidFill>
+            <a:prstDash val="solid"/>
+          </a:ln>
+          <a:effectLst>
+            <a:outerShdw sx="100000" sy="100000" kx="0" ky="0" algn="bl" rotWithShape="0" blurRad="101600" dist="38100" dir="8100000">
+              <a:srgbClr val="000000">
+                <a:alpha val="12000"/>
+              </a:srgbClr>
+            </a:outerShdw>
+          </a:effectLst>
+        </p:spPr>
+      </p:sp>
+      <p:sp>
+        <p:nvSpPr>
+          <p:cNvPr id="26" name="Text 24"/>
+          <p:cNvSpPr/>
+          <p:nvPr/>
+        </p:nvSpPr>
+        <p:spPr>
+          <a:xfrm>
+            <a:off x="6998818" y="2258568"/>
+            <a:ext cx="1581912" cy="292608"/>
+          </a:xfrm>
+          <a:prstGeom prst="rect">
+            <a:avLst/>
+          </a:prstGeom>
+          <a:noFill/>
+          <a:ln/>
+        </p:spPr>
+        <p:txBody>
+          <a:bodyPr wrap="square" lIns="0" tIns="0" rIns="0" bIns="0" rtlCol="0" anchor="ctr"/>
+          <a:lstStyle/>
+          <a:p>
+            <a:pPr algn="ctr" indent="0" marL="0">
+              <a:buNone/>
+            </a:pPr>
+            <a:r>
+              <a:rPr lang="en-US" sz="1300" b="1" dirty="0">
+                <a:solidFill>
+                  <a:srgbClr val="9D174D"/>
+                </a:solidFill>
+                <a:latin typeface="Trebuchet MS" pitchFamily="34" charset="0"/>
+                <a:ea typeface="Trebuchet MS" pitchFamily="34" charset="-122"/>
+                <a:cs typeface="Trebuchet MS" pitchFamily="34" charset="-120"/>
+              </a:rPr>
+              <a:t>s</a:t>
+            </a:r>
+            <a:endParaRPr lang="en-US" sz="1300" dirty="0"/>
+          </a:p>
+        </p:txBody>
+      </p:sp>
+      <p:sp>
+        <p:nvSpPr>
+          <p:cNvPr id="27" name="Text 25"/>
+          <p:cNvSpPr/>
+          <p:nvPr/>
+        </p:nvSpPr>
+        <p:spPr>
+          <a:xfrm>
+            <a:off x="6998818" y="2569464"/>
+            <a:ext cx="1581912" cy="201168"/>
+          </a:xfrm>
+          <a:prstGeom prst="rect">
+            <a:avLst/>
+          </a:prstGeom>
+          <a:noFill/>
+          <a:ln/>
+        </p:spPr>
+        <p:txBody>
+          <a:bodyPr wrap="square" lIns="0" tIns="0" rIns="0" bIns="0" rtlCol="0" anchor="t"/>
+          <a:lstStyle/>
+          <a:p>
+            <a:pPr algn="ctr" indent="0" marL="0">
+              <a:buNone/>
+            </a:pPr>
+            <a:r>
+              <a:rPr lang="en-US" sz="850" dirty="0">
+                <a:solidFill>
+                  <a:srgbClr val="475569"/>
+                </a:solidFill>
+                <a:latin typeface="Calibri" pitchFamily="34" charset="0"/>
+                <a:ea typeface="Calibri" pitchFamily="34" charset="-122"/>
+                <a:cs typeface="Calibri" pitchFamily="34" charset="-120"/>
+              </a:rPr>
+              <a:t>plural or present tense</a:t>
+            </a:r>
+            <a:endParaRPr lang="en-US" sz="850" dirty="0"/>
+          </a:p>
+        </p:txBody>
+      </p:sp>
+      <p:sp>
+        <p:nvSpPr>
+          <p:cNvPr id="28" name="Shape 26"/>
           <p:cNvSpPr/>
           <p:nvPr/>
         </p:nvSpPr>
@@ -30932,7 +32620,7 @@
       </p:sp>
       <p:sp>
         <p:nvSpPr>
-          <p:cNvPr id="26" name="Text 24"/>
+          <p:cNvPr id="29" name="Text 27"/>
           <p:cNvSpPr/>
           <p:nvPr/>
         </p:nvSpPr>
@@ -30971,7 +32659,7 @@
       </p:sp>
       <p:sp>
         <p:nvSpPr>
-          <p:cNvPr id="27" name="Shape 25"/>
+          <p:cNvPr id="30" name="Shape 28"/>
           <p:cNvSpPr/>
           <p:nvPr/>
         </p:nvSpPr>
@@ -30998,7 +32686,7 @@
       </p:sp>
       <p:sp>
         <p:nvSpPr>
-          <p:cNvPr id="28" name="Text 26"/>
+          <p:cNvPr id="31" name="Text 29"/>
           <p:cNvSpPr/>
           <p:nvPr/>
         </p:nvSpPr>
@@ -31037,7 +32725,7 @@
       </p:sp>
       <p:sp>
         <p:nvSpPr>
-          <p:cNvPr id="29" name="Shape 27"/>
+          <p:cNvPr id="32" name="Shape 30"/>
           <p:cNvSpPr/>
           <p:nvPr/>
         </p:nvSpPr>
@@ -31064,7 +32752,7 @@
       </p:sp>
       <p:sp>
         <p:nvSpPr>
-          <p:cNvPr id="30" name="Text 28"/>
+          <p:cNvPr id="33" name="Text 31"/>
           <p:cNvSpPr/>
           <p:nvPr/>
         </p:nvSpPr>
@@ -31103,7 +32791,7 @@
       </p:sp>
       <p:sp>
         <p:nvSpPr>
-          <p:cNvPr id="31" name="Shape 29"/>
+          <p:cNvPr id="34" name="Shape 32"/>
           <p:cNvSpPr/>
           <p:nvPr/>
         </p:nvSpPr>
@@ -31130,7 +32818,7 @@
       </p:sp>
       <p:sp>
         <p:nvSpPr>
-          <p:cNvPr id="32" name="Text 30"/>
+          <p:cNvPr id="35" name="Text 33"/>
           <p:cNvSpPr/>
           <p:nvPr/>
         </p:nvSpPr>
@@ -31453,7 +33141,7 @@
                 <a:ea typeface="Calibri" pitchFamily="34" charset="-122"/>
                 <a:cs typeface="Calibri" pitchFamily="34" charset="-120"/>
               </a:rPr>
-              <a:t>Word Labs  •  wordlabs.app  •  Root: 'miss' = send, let go, release</a:t>
+              <a:t>Word Labs  •  wordlabs.app  •  Root: 'miss' = send</a:t>
             </a:r>
             <a:endParaRPr lang="en-US" sz="800" dirty="0"/>
           </a:p>
@@ -31592,7 +33280,7 @@
                 <a:ea typeface="Trebuchet MS" pitchFamily="34" charset="-122"/>
                 <a:cs typeface="Trebuchet MS" pitchFamily="34" charset="-120"/>
               </a:rPr>
-              <a:t>admission</a:t>
+              <a:t>emissions</a:t>
             </a:r>
             <a:endParaRPr lang="en-US" sz="2800" dirty="0"/>
           </a:p>
@@ -31672,8 +33360,8 @@
         </p:nvSpPr>
         <p:spPr>
           <a:xfrm>
-            <a:off x="2221992" y="2258568"/>
-            <a:ext cx="1828800" cy="292608"/>
+            <a:off x="1989734" y="2258568"/>
+            <a:ext cx="1581912" cy="292608"/>
           </a:xfrm>
           <a:prstGeom prst="rect">
             <a:avLst>
@@ -31706,8 +33394,8 @@
         </p:nvSpPr>
         <p:spPr>
           <a:xfrm>
-            <a:off x="2221992" y="2258568"/>
-            <a:ext cx="1828800" cy="292608"/>
+            <a:off x="1989734" y="2258568"/>
+            <a:ext cx="1581912" cy="292608"/>
           </a:xfrm>
           <a:prstGeom prst="rect">
             <a:avLst/>
@@ -31731,7 +33419,7 @@
                 <a:ea typeface="Trebuchet MS" pitchFamily="34" charset="-122"/>
                 <a:cs typeface="Trebuchet MS" pitchFamily="34" charset="-120"/>
               </a:rPr>
-              <a:t>ad</a:t>
+              <a:t>e</a:t>
             </a:r>
             <a:endParaRPr lang="en-US" sz="1300" dirty="0"/>
           </a:p>
@@ -31745,8 +33433,8 @@
         </p:nvSpPr>
         <p:spPr>
           <a:xfrm>
-            <a:off x="2221992" y="2569464"/>
-            <a:ext cx="1828800" cy="201168"/>
+            <a:off x="1989734" y="2569464"/>
+            <a:ext cx="1581912" cy="201168"/>
           </a:xfrm>
           <a:prstGeom prst="rect">
             <a:avLst/>
@@ -31770,7 +33458,7 @@
                 <a:ea typeface="Calibri" pitchFamily="34" charset="-122"/>
                 <a:cs typeface="Calibri" pitchFamily="34" charset="-120"/>
               </a:rPr>
-              <a:t>to, towards</a:t>
+              <a:t>electronic; online</a:t>
             </a:r>
             <a:endParaRPr lang="en-US" sz="850" dirty="0"/>
           </a:p>
@@ -31784,8 +33472,8 @@
         </p:nvSpPr>
         <p:spPr>
           <a:xfrm>
-            <a:off x="4370832" y="2258568"/>
-            <a:ext cx="1828800" cy="292608"/>
+            <a:off x="3659429" y="2258568"/>
+            <a:ext cx="1581912" cy="292608"/>
           </a:xfrm>
           <a:prstGeom prst="rect">
             <a:avLst>
@@ -31818,8 +33506,8 @@
         </p:nvSpPr>
         <p:spPr>
           <a:xfrm>
-            <a:off x="4370832" y="2258568"/>
-            <a:ext cx="1828800" cy="292608"/>
+            <a:off x="3659429" y="2258568"/>
+            <a:ext cx="1581912" cy="292608"/>
           </a:xfrm>
           <a:prstGeom prst="rect">
             <a:avLst/>
@@ -31857,8 +33545,8 @@
         </p:nvSpPr>
         <p:spPr>
           <a:xfrm>
-            <a:off x="4370832" y="2569464"/>
-            <a:ext cx="1828800" cy="201168"/>
+            <a:off x="3659429" y="2569464"/>
+            <a:ext cx="1581912" cy="201168"/>
           </a:xfrm>
           <a:prstGeom prst="rect">
             <a:avLst/>
@@ -31882,7 +33570,7 @@
                 <a:ea typeface="Calibri" pitchFamily="34" charset="-122"/>
                 <a:cs typeface="Calibri" pitchFamily="34" charset="-120"/>
               </a:rPr>
-              <a:t>send, let go</a:t>
+              <a:t>send</a:t>
             </a:r>
             <a:endParaRPr lang="en-US" sz="850" dirty="0"/>
           </a:p>
@@ -31896,8 +33584,8 @@
         </p:nvSpPr>
         <p:spPr>
           <a:xfrm>
-            <a:off x="6519672" y="2258568"/>
-            <a:ext cx="1828800" cy="292608"/>
+            <a:off x="5329123" y="2258568"/>
+            <a:ext cx="1581912" cy="292608"/>
           </a:xfrm>
           <a:prstGeom prst="rect">
             <a:avLst>
@@ -31930,8 +33618,8 @@
         </p:nvSpPr>
         <p:spPr>
           <a:xfrm>
-            <a:off x="6519672" y="2258568"/>
-            <a:ext cx="1828800" cy="292608"/>
+            <a:off x="5329123" y="2258568"/>
+            <a:ext cx="1581912" cy="292608"/>
           </a:xfrm>
           <a:prstGeom prst="rect">
             <a:avLst/>
@@ -31969,8 +33657,8 @@
         </p:nvSpPr>
         <p:spPr>
           <a:xfrm>
-            <a:off x="6519672" y="2569464"/>
-            <a:ext cx="1828800" cy="201168"/>
+            <a:off x="5329123" y="2569464"/>
+            <a:ext cx="1581912" cy="201168"/>
           </a:xfrm>
           <a:prstGeom prst="rect">
             <a:avLst/>
@@ -31994,7 +33682,7 @@
                 <a:ea typeface="Calibri" pitchFamily="34" charset="-122"/>
                 <a:cs typeface="Calibri" pitchFamily="34" charset="-120"/>
               </a:rPr>
-              <a:t>act or state of</a:t>
+              <a:t>act or result of</a:t>
             </a:r>
             <a:endParaRPr lang="en-US" sz="850" dirty="0"/>
           </a:p>
@@ -32003,6 +33691,118 @@
       <p:sp>
         <p:nvSpPr>
           <p:cNvPr id="25" name="Shape 23"/>
+          <p:cNvSpPr/>
+          <p:nvPr/>
+        </p:nvSpPr>
+        <p:spPr>
+          <a:xfrm>
+            <a:off x="6998818" y="2258568"/>
+            <a:ext cx="1581912" cy="292608"/>
+          </a:xfrm>
+          <a:prstGeom prst="rect">
+            <a:avLst>
+              <a:gd name="adj" fmla="val 25000"/>
+            </a:avLst>
+          </a:prstGeom>
+          <a:solidFill>
+            <a:srgbClr val="FCE7F3"/>
+          </a:solidFill>
+          <a:ln w="19050">
+            <a:solidFill>
+              <a:srgbClr val="DB2777"/>
+            </a:solidFill>
+            <a:prstDash val="solid"/>
+          </a:ln>
+          <a:effectLst>
+            <a:outerShdw sx="100000" sy="100000" kx="0" ky="0" algn="bl" rotWithShape="0" blurRad="101600" dist="38100" dir="8100000">
+              <a:srgbClr val="000000">
+                <a:alpha val="12000"/>
+              </a:srgbClr>
+            </a:outerShdw>
+          </a:effectLst>
+        </p:spPr>
+      </p:sp>
+      <p:sp>
+        <p:nvSpPr>
+          <p:cNvPr id="26" name="Text 24"/>
+          <p:cNvSpPr/>
+          <p:nvPr/>
+        </p:nvSpPr>
+        <p:spPr>
+          <a:xfrm>
+            <a:off x="6998818" y="2258568"/>
+            <a:ext cx="1581912" cy="292608"/>
+          </a:xfrm>
+          <a:prstGeom prst="rect">
+            <a:avLst/>
+          </a:prstGeom>
+          <a:noFill/>
+          <a:ln/>
+        </p:spPr>
+        <p:txBody>
+          <a:bodyPr wrap="square" lIns="0" tIns="0" rIns="0" bIns="0" rtlCol="0" anchor="ctr"/>
+          <a:lstStyle/>
+          <a:p>
+            <a:pPr algn="ctr" indent="0" marL="0">
+              <a:buNone/>
+            </a:pPr>
+            <a:r>
+              <a:rPr lang="en-US" sz="1300" b="1" dirty="0">
+                <a:solidFill>
+                  <a:srgbClr val="9D174D"/>
+                </a:solidFill>
+                <a:latin typeface="Trebuchet MS" pitchFamily="34" charset="0"/>
+                <a:ea typeface="Trebuchet MS" pitchFamily="34" charset="-122"/>
+                <a:cs typeface="Trebuchet MS" pitchFamily="34" charset="-120"/>
+              </a:rPr>
+              <a:t>s</a:t>
+            </a:r>
+            <a:endParaRPr lang="en-US" sz="1300" dirty="0"/>
+          </a:p>
+        </p:txBody>
+      </p:sp>
+      <p:sp>
+        <p:nvSpPr>
+          <p:cNvPr id="27" name="Text 25"/>
+          <p:cNvSpPr/>
+          <p:nvPr/>
+        </p:nvSpPr>
+        <p:spPr>
+          <a:xfrm>
+            <a:off x="6998818" y="2569464"/>
+            <a:ext cx="1581912" cy="201168"/>
+          </a:xfrm>
+          <a:prstGeom prst="rect">
+            <a:avLst/>
+          </a:prstGeom>
+          <a:noFill/>
+          <a:ln/>
+        </p:spPr>
+        <p:txBody>
+          <a:bodyPr wrap="square" lIns="0" tIns="0" rIns="0" bIns="0" rtlCol="0" anchor="t"/>
+          <a:lstStyle/>
+          <a:p>
+            <a:pPr algn="ctr" indent="0" marL="0">
+              <a:buNone/>
+            </a:pPr>
+            <a:r>
+              <a:rPr lang="en-US" sz="850" dirty="0">
+                <a:solidFill>
+                  <a:srgbClr val="475569"/>
+                </a:solidFill>
+                <a:latin typeface="Calibri" pitchFamily="34" charset="0"/>
+                <a:ea typeface="Calibri" pitchFamily="34" charset="-122"/>
+                <a:cs typeface="Calibri" pitchFamily="34" charset="-120"/>
+              </a:rPr>
+              <a:t>plural or present tense</a:t>
+            </a:r>
+            <a:endParaRPr lang="en-US" sz="850" dirty="0"/>
+          </a:p>
+        </p:txBody>
+      </p:sp>
+      <p:sp>
+        <p:nvSpPr>
+          <p:cNvPr id="28" name="Shape 26"/>
           <p:cNvSpPr/>
           <p:nvPr/>
         </p:nvSpPr>
@@ -32029,7 +33829,7 @@
       </p:sp>
       <p:sp>
         <p:nvSpPr>
-          <p:cNvPr id="26" name="Text 24"/>
+          <p:cNvPr id="29" name="Text 27"/>
           <p:cNvSpPr/>
           <p:nvPr/>
         </p:nvSpPr>
@@ -32068,7 +33868,7 @@
       </p:sp>
       <p:sp>
         <p:nvSpPr>
-          <p:cNvPr id="27" name="Shape 25"/>
+          <p:cNvPr id="30" name="Shape 28"/>
           <p:cNvSpPr/>
           <p:nvPr/>
         </p:nvSpPr>
@@ -32095,7 +33895,7 @@
       </p:sp>
       <p:sp>
         <p:nvSpPr>
-          <p:cNvPr id="28" name="Shape 26"/>
+          <p:cNvPr id="31" name="Shape 29"/>
           <p:cNvSpPr/>
           <p:nvPr/>
         </p:nvSpPr>
@@ -32122,7 +33922,7 @@
       </p:sp>
       <p:sp>
         <p:nvSpPr>
-          <p:cNvPr id="29" name="Text 27"/>
+          <p:cNvPr id="32" name="Text 30"/>
           <p:cNvSpPr/>
           <p:nvPr/>
         </p:nvSpPr>
@@ -32153,7 +33953,7 @@
                 <a:ea typeface="Trebuchet MS" pitchFamily="34" charset="-122"/>
                 <a:cs typeface="Trebuchet MS" pitchFamily="34" charset="-120"/>
               </a:rPr>
-              <a:t>ad</a:t>
+              <a:t>e</a:t>
             </a:r>
             <a:endParaRPr lang="en-US" sz="1400" dirty="0"/>
           </a:p>
@@ -32161,7 +33961,7 @@
       </p:sp>
       <p:sp>
         <p:nvSpPr>
-          <p:cNvPr id="30" name="Text 28"/>
+          <p:cNvPr id="33" name="Text 31"/>
           <p:cNvSpPr/>
           <p:nvPr/>
         </p:nvSpPr>
@@ -32200,7 +34000,7 @@
       </p:sp>
       <p:sp>
         <p:nvSpPr>
-          <p:cNvPr id="31" name="Shape 29"/>
+          <p:cNvPr id="34" name="Shape 32"/>
           <p:cNvSpPr/>
           <p:nvPr/>
         </p:nvSpPr>
@@ -32227,7 +34027,7 @@
       </p:sp>
       <p:sp>
         <p:nvSpPr>
-          <p:cNvPr id="32" name="Text 30"/>
+          <p:cNvPr id="35" name="Text 33"/>
           <p:cNvSpPr/>
           <p:nvPr/>
         </p:nvSpPr>
@@ -32266,7 +34066,7 @@
       </p:sp>
       <p:sp>
         <p:nvSpPr>
-          <p:cNvPr id="33" name="Text 31"/>
+          <p:cNvPr id="36" name="Text 34"/>
           <p:cNvSpPr/>
           <p:nvPr/>
         </p:nvSpPr>
@@ -32305,7 +34105,7 @@
       </p:sp>
       <p:sp>
         <p:nvSpPr>
-          <p:cNvPr id="34" name="Shape 32"/>
+          <p:cNvPr id="37" name="Shape 35"/>
           <p:cNvSpPr/>
           <p:nvPr/>
         </p:nvSpPr>
@@ -32332,7 +34132,7 @@
       </p:sp>
       <p:sp>
         <p:nvSpPr>
-          <p:cNvPr id="35" name="Text 33"/>
+          <p:cNvPr id="38" name="Text 36"/>
           <p:cNvSpPr/>
           <p:nvPr/>
         </p:nvSpPr>
@@ -32363,7 +34163,7 @@
                 <a:ea typeface="Trebuchet MS" pitchFamily="34" charset="-122"/>
                 <a:cs typeface="Trebuchet MS" pitchFamily="34" charset="-120"/>
               </a:rPr>
-              <a:t>sion</a:t>
+              <a:t>sions</a:t>
             </a:r>
             <a:endParaRPr lang="en-US" sz="1400" dirty="0"/>
           </a:p>
@@ -32371,7 +34171,7 @@
       </p:sp>
       <p:sp>
         <p:nvSpPr>
-          <p:cNvPr id="36" name="Shape 34"/>
+          <p:cNvPr id="39" name="Shape 37"/>
           <p:cNvSpPr/>
           <p:nvPr/>
         </p:nvSpPr>
@@ -32398,7 +34198,7 @@
       </p:sp>
       <p:sp>
         <p:nvSpPr>
-          <p:cNvPr id="37" name="Text 35"/>
+          <p:cNvPr id="40" name="Text 38"/>
           <p:cNvSpPr/>
           <p:nvPr/>
         </p:nvSpPr>
@@ -32437,7 +34237,7 @@
       </p:sp>
       <p:sp>
         <p:nvSpPr>
-          <p:cNvPr id="38" name="Shape 36"/>
+          <p:cNvPr id="41" name="Shape 39"/>
           <p:cNvSpPr/>
           <p:nvPr/>
         </p:nvSpPr>
@@ -32464,7 +34264,7 @@
       </p:sp>
       <p:sp>
         <p:nvSpPr>
-          <p:cNvPr id="39" name="Text 37"/>
+          <p:cNvPr id="42" name="Text 40"/>
           <p:cNvSpPr/>
           <p:nvPr/>
         </p:nvSpPr>
@@ -32787,7 +34587,7 @@
                 <a:ea typeface="Calibri" pitchFamily="34" charset="-122"/>
                 <a:cs typeface="Calibri" pitchFamily="34" charset="-120"/>
               </a:rPr>
-              <a:t>Word Labs  •  wordlabs.app  •  Root: 'miss' = send, let go, release</a:t>
+              <a:t>Word Labs  •  wordlabs.app  •  Root: 'miss' = send</a:t>
             </a:r>
             <a:endParaRPr lang="en-US" sz="800" dirty="0"/>
           </a:p>
@@ -32926,7 +34726,7 @@
                 <a:ea typeface="Trebuchet MS" pitchFamily="34" charset="-122"/>
                 <a:cs typeface="Trebuchet MS" pitchFamily="34" charset="-120"/>
               </a:rPr>
-              <a:t>admission</a:t>
+              <a:t>emissions</a:t>
             </a:r>
             <a:endParaRPr lang="en-US" sz="2800" dirty="0"/>
           </a:p>
@@ -33006,8 +34806,8 @@
         </p:nvSpPr>
         <p:spPr>
           <a:xfrm>
-            <a:off x="2221992" y="2258568"/>
-            <a:ext cx="1828800" cy="292608"/>
+            <a:off x="1989734" y="2258568"/>
+            <a:ext cx="1581912" cy="292608"/>
           </a:xfrm>
           <a:prstGeom prst="rect">
             <a:avLst>
@@ -33040,8 +34840,8 @@
         </p:nvSpPr>
         <p:spPr>
           <a:xfrm>
-            <a:off x="2221992" y="2258568"/>
-            <a:ext cx="1828800" cy="292608"/>
+            <a:off x="1989734" y="2258568"/>
+            <a:ext cx="1581912" cy="292608"/>
           </a:xfrm>
           <a:prstGeom prst="rect">
             <a:avLst/>
@@ -33065,7 +34865,7 @@
                 <a:ea typeface="Trebuchet MS" pitchFamily="34" charset="-122"/>
                 <a:cs typeface="Trebuchet MS" pitchFamily="34" charset="-120"/>
               </a:rPr>
-              <a:t>ad</a:t>
+              <a:t>e</a:t>
             </a:r>
             <a:endParaRPr lang="en-US" sz="1300" dirty="0"/>
           </a:p>
@@ -33079,8 +34879,8 @@
         </p:nvSpPr>
         <p:spPr>
           <a:xfrm>
-            <a:off x="2221992" y="2569464"/>
-            <a:ext cx="1828800" cy="201168"/>
+            <a:off x="1989734" y="2569464"/>
+            <a:ext cx="1581912" cy="201168"/>
           </a:xfrm>
           <a:prstGeom prst="rect">
             <a:avLst/>
@@ -33104,7 +34904,7 @@
                 <a:ea typeface="Calibri" pitchFamily="34" charset="-122"/>
                 <a:cs typeface="Calibri" pitchFamily="34" charset="-120"/>
               </a:rPr>
-              <a:t>to, towards</a:t>
+              <a:t>electronic; online</a:t>
             </a:r>
             <a:endParaRPr lang="en-US" sz="850" dirty="0"/>
           </a:p>
@@ -33118,8 +34918,8 @@
         </p:nvSpPr>
         <p:spPr>
           <a:xfrm>
-            <a:off x="4370832" y="2258568"/>
-            <a:ext cx="1828800" cy="292608"/>
+            <a:off x="3659429" y="2258568"/>
+            <a:ext cx="1581912" cy="292608"/>
           </a:xfrm>
           <a:prstGeom prst="rect">
             <a:avLst>
@@ -33152,8 +34952,8 @@
         </p:nvSpPr>
         <p:spPr>
           <a:xfrm>
-            <a:off x="4370832" y="2258568"/>
-            <a:ext cx="1828800" cy="292608"/>
+            <a:off x="3659429" y="2258568"/>
+            <a:ext cx="1581912" cy="292608"/>
           </a:xfrm>
           <a:prstGeom prst="rect">
             <a:avLst/>
@@ -33191,8 +34991,8 @@
         </p:nvSpPr>
         <p:spPr>
           <a:xfrm>
-            <a:off x="4370832" y="2569464"/>
-            <a:ext cx="1828800" cy="201168"/>
+            <a:off x="3659429" y="2569464"/>
+            <a:ext cx="1581912" cy="201168"/>
           </a:xfrm>
           <a:prstGeom prst="rect">
             <a:avLst/>
@@ -33216,7 +35016,7 @@
                 <a:ea typeface="Calibri" pitchFamily="34" charset="-122"/>
                 <a:cs typeface="Calibri" pitchFamily="34" charset="-120"/>
               </a:rPr>
-              <a:t>send, let go</a:t>
+              <a:t>send</a:t>
             </a:r>
             <a:endParaRPr lang="en-US" sz="850" dirty="0"/>
           </a:p>
@@ -33230,8 +35030,8 @@
         </p:nvSpPr>
         <p:spPr>
           <a:xfrm>
-            <a:off x="6519672" y="2258568"/>
-            <a:ext cx="1828800" cy="292608"/>
+            <a:off x="5329123" y="2258568"/>
+            <a:ext cx="1581912" cy="292608"/>
           </a:xfrm>
           <a:prstGeom prst="rect">
             <a:avLst>
@@ -33264,8 +35064,8 @@
         </p:nvSpPr>
         <p:spPr>
           <a:xfrm>
-            <a:off x="6519672" y="2258568"/>
-            <a:ext cx="1828800" cy="292608"/>
+            <a:off x="5329123" y="2258568"/>
+            <a:ext cx="1581912" cy="292608"/>
           </a:xfrm>
           <a:prstGeom prst="rect">
             <a:avLst/>
@@ -33303,8 +35103,8 @@
         </p:nvSpPr>
         <p:spPr>
           <a:xfrm>
-            <a:off x="6519672" y="2569464"/>
-            <a:ext cx="1828800" cy="201168"/>
+            <a:off x="5329123" y="2569464"/>
+            <a:ext cx="1581912" cy="201168"/>
           </a:xfrm>
           <a:prstGeom prst="rect">
             <a:avLst/>
@@ -33328,7 +35128,7 @@
                 <a:ea typeface="Calibri" pitchFamily="34" charset="-122"/>
                 <a:cs typeface="Calibri" pitchFamily="34" charset="-120"/>
               </a:rPr>
-              <a:t>act or state of</a:t>
+              <a:t>act or result of</a:t>
             </a:r>
             <a:endParaRPr lang="en-US" sz="850" dirty="0"/>
           </a:p>
@@ -33337,6 +35137,118 @@
       <p:sp>
         <p:nvSpPr>
           <p:cNvPr id="25" name="Shape 23"/>
+          <p:cNvSpPr/>
+          <p:nvPr/>
+        </p:nvSpPr>
+        <p:spPr>
+          <a:xfrm>
+            <a:off x="6998818" y="2258568"/>
+            <a:ext cx="1581912" cy="292608"/>
+          </a:xfrm>
+          <a:prstGeom prst="rect">
+            <a:avLst>
+              <a:gd name="adj" fmla="val 25000"/>
+            </a:avLst>
+          </a:prstGeom>
+          <a:solidFill>
+            <a:srgbClr val="FCE7F3"/>
+          </a:solidFill>
+          <a:ln w="19050">
+            <a:solidFill>
+              <a:srgbClr val="DB2777"/>
+            </a:solidFill>
+            <a:prstDash val="solid"/>
+          </a:ln>
+          <a:effectLst>
+            <a:outerShdw sx="100000" sy="100000" kx="0" ky="0" algn="bl" rotWithShape="0" blurRad="101600" dist="38100" dir="8100000">
+              <a:srgbClr val="000000">
+                <a:alpha val="12000"/>
+              </a:srgbClr>
+            </a:outerShdw>
+          </a:effectLst>
+        </p:spPr>
+      </p:sp>
+      <p:sp>
+        <p:nvSpPr>
+          <p:cNvPr id="26" name="Text 24"/>
+          <p:cNvSpPr/>
+          <p:nvPr/>
+        </p:nvSpPr>
+        <p:spPr>
+          <a:xfrm>
+            <a:off x="6998818" y="2258568"/>
+            <a:ext cx="1581912" cy="292608"/>
+          </a:xfrm>
+          <a:prstGeom prst="rect">
+            <a:avLst/>
+          </a:prstGeom>
+          <a:noFill/>
+          <a:ln/>
+        </p:spPr>
+        <p:txBody>
+          <a:bodyPr wrap="square" lIns="0" tIns="0" rIns="0" bIns="0" rtlCol="0" anchor="ctr"/>
+          <a:lstStyle/>
+          <a:p>
+            <a:pPr algn="ctr" indent="0" marL="0">
+              <a:buNone/>
+            </a:pPr>
+            <a:r>
+              <a:rPr lang="en-US" sz="1300" b="1" dirty="0">
+                <a:solidFill>
+                  <a:srgbClr val="9D174D"/>
+                </a:solidFill>
+                <a:latin typeface="Trebuchet MS" pitchFamily="34" charset="0"/>
+                <a:ea typeface="Trebuchet MS" pitchFamily="34" charset="-122"/>
+                <a:cs typeface="Trebuchet MS" pitchFamily="34" charset="-120"/>
+              </a:rPr>
+              <a:t>s</a:t>
+            </a:r>
+            <a:endParaRPr lang="en-US" sz="1300" dirty="0"/>
+          </a:p>
+        </p:txBody>
+      </p:sp>
+      <p:sp>
+        <p:nvSpPr>
+          <p:cNvPr id="27" name="Text 25"/>
+          <p:cNvSpPr/>
+          <p:nvPr/>
+        </p:nvSpPr>
+        <p:spPr>
+          <a:xfrm>
+            <a:off x="6998818" y="2569464"/>
+            <a:ext cx="1581912" cy="201168"/>
+          </a:xfrm>
+          <a:prstGeom prst="rect">
+            <a:avLst/>
+          </a:prstGeom>
+          <a:noFill/>
+          <a:ln/>
+        </p:spPr>
+        <p:txBody>
+          <a:bodyPr wrap="square" lIns="0" tIns="0" rIns="0" bIns="0" rtlCol="0" anchor="t"/>
+          <a:lstStyle/>
+          <a:p>
+            <a:pPr algn="ctr" indent="0" marL="0">
+              <a:buNone/>
+            </a:pPr>
+            <a:r>
+              <a:rPr lang="en-US" sz="850" dirty="0">
+                <a:solidFill>
+                  <a:srgbClr val="475569"/>
+                </a:solidFill>
+                <a:latin typeface="Calibri" pitchFamily="34" charset="0"/>
+                <a:ea typeface="Calibri" pitchFamily="34" charset="-122"/>
+                <a:cs typeface="Calibri" pitchFamily="34" charset="-120"/>
+              </a:rPr>
+              <a:t>plural or present tense</a:t>
+            </a:r>
+            <a:endParaRPr lang="en-US" sz="850" dirty="0"/>
+          </a:p>
+        </p:txBody>
+      </p:sp>
+      <p:sp>
+        <p:nvSpPr>
+          <p:cNvPr id="28" name="Shape 26"/>
           <p:cNvSpPr/>
           <p:nvPr/>
         </p:nvSpPr>
@@ -33363,7 +35275,7 @@
       </p:sp>
       <p:sp>
         <p:nvSpPr>
-          <p:cNvPr id="26" name="Text 24"/>
+          <p:cNvPr id="29" name="Text 27"/>
           <p:cNvSpPr/>
           <p:nvPr/>
         </p:nvSpPr>
@@ -33402,7 +35314,7 @@
       </p:sp>
       <p:sp>
         <p:nvSpPr>
-          <p:cNvPr id="27" name="Shape 25"/>
+          <p:cNvPr id="30" name="Shape 28"/>
           <p:cNvSpPr/>
           <p:nvPr/>
         </p:nvSpPr>
@@ -33429,7 +35341,7 @@
       </p:sp>
       <p:sp>
         <p:nvSpPr>
-          <p:cNvPr id="28" name="Shape 26"/>
+          <p:cNvPr id="31" name="Shape 29"/>
           <p:cNvSpPr/>
           <p:nvPr/>
         </p:nvSpPr>
@@ -33456,7 +35368,7 @@
       </p:sp>
       <p:sp>
         <p:nvSpPr>
-          <p:cNvPr id="29" name="Text 27"/>
+          <p:cNvPr id="32" name="Text 30"/>
           <p:cNvSpPr/>
           <p:nvPr/>
         </p:nvSpPr>
@@ -33487,7 +35399,7 @@
                 <a:ea typeface="Trebuchet MS" pitchFamily="34" charset="-122"/>
                 <a:cs typeface="Trebuchet MS" pitchFamily="34" charset="-120"/>
               </a:rPr>
-              <a:t>ad</a:t>
+              <a:t>e</a:t>
             </a:r>
             <a:endParaRPr lang="en-US" sz="1400" dirty="0"/>
           </a:p>
@@ -33495,7 +35407,7 @@
       </p:sp>
       <p:sp>
         <p:nvSpPr>
-          <p:cNvPr id="30" name="Text 28"/>
+          <p:cNvPr id="33" name="Text 31"/>
           <p:cNvSpPr/>
           <p:nvPr/>
         </p:nvSpPr>
@@ -33534,7 +35446,7 @@
       </p:sp>
       <p:sp>
         <p:nvSpPr>
-          <p:cNvPr id="31" name="Shape 29"/>
+          <p:cNvPr id="34" name="Shape 32"/>
           <p:cNvSpPr/>
           <p:nvPr/>
         </p:nvSpPr>
@@ -33561,7 +35473,7 @@
       </p:sp>
       <p:sp>
         <p:nvSpPr>
-          <p:cNvPr id="32" name="Text 30"/>
+          <p:cNvPr id="35" name="Text 33"/>
           <p:cNvSpPr/>
           <p:nvPr/>
         </p:nvSpPr>
@@ -33600,7 +35512,7 @@
       </p:sp>
       <p:sp>
         <p:nvSpPr>
-          <p:cNvPr id="33" name="Text 31"/>
+          <p:cNvPr id="36" name="Text 34"/>
           <p:cNvSpPr/>
           <p:nvPr/>
         </p:nvSpPr>
@@ -33639,7 +35551,7 @@
       </p:sp>
       <p:sp>
         <p:nvSpPr>
-          <p:cNvPr id="34" name="Shape 32"/>
+          <p:cNvPr id="37" name="Shape 35"/>
           <p:cNvSpPr/>
           <p:nvPr/>
         </p:nvSpPr>
@@ -33666,7 +35578,7 @@
       </p:sp>
       <p:sp>
         <p:nvSpPr>
-          <p:cNvPr id="35" name="Text 33"/>
+          <p:cNvPr id="38" name="Text 36"/>
           <p:cNvSpPr/>
           <p:nvPr/>
         </p:nvSpPr>
@@ -33697,7 +35609,7 @@
                 <a:ea typeface="Trebuchet MS" pitchFamily="34" charset="-122"/>
                 <a:cs typeface="Trebuchet MS" pitchFamily="34" charset="-120"/>
               </a:rPr>
-              <a:t>sion</a:t>
+              <a:t>sions</a:t>
             </a:r>
             <a:endParaRPr lang="en-US" sz="1400" dirty="0"/>
           </a:p>
@@ -33705,7 +35617,7 @@
       </p:sp>
       <p:sp>
         <p:nvSpPr>
-          <p:cNvPr id="36" name="Shape 34"/>
+          <p:cNvPr id="39" name="Shape 37"/>
           <p:cNvSpPr/>
           <p:nvPr/>
         </p:nvSpPr>
@@ -33732,7 +35644,7 @@
       </p:sp>
       <p:sp>
         <p:nvSpPr>
-          <p:cNvPr id="37" name="Text 35"/>
+          <p:cNvPr id="40" name="Text 38"/>
           <p:cNvSpPr/>
           <p:nvPr/>
         </p:nvSpPr>
@@ -33771,18 +35683,18 @@
       </p:sp>
       <p:sp>
         <p:nvSpPr>
-          <p:cNvPr id="38" name="Shape 36"/>
+          <p:cNvPr id="41" name="Shape 39"/>
           <p:cNvSpPr/>
           <p:nvPr/>
         </p:nvSpPr>
         <p:spPr>
           <a:xfrm>
             <a:off x="1874520" y="4096512"/>
-            <a:ext cx="6903720" cy="804672"/>
+            <a:ext cx="6903720" cy="658368"/>
           </a:xfrm>
           <a:prstGeom prst="rect">
             <a:avLst>
-              <a:gd name="adj" fmla="val 6818"/>
+              <a:gd name="adj" fmla="val 8333"/>
             </a:avLst>
           </a:prstGeom>
           <a:solidFill>
@@ -33798,18 +35710,18 @@
       </p:sp>
       <p:sp>
         <p:nvSpPr>
-          <p:cNvPr id="39" name="Shape 37"/>
-          <p:cNvSpPr/>
-          <p:nvPr/>
-        </p:nvSpPr>
-        <p:spPr>
-          <a:xfrm>
-            <a:off x="2254649" y="4169664"/>
-            <a:ext cx="685800" cy="384048"/>
+          <p:cNvPr id="42" name="Shape 40"/>
+          <p:cNvSpPr/>
+          <p:nvPr/>
+        </p:nvSpPr>
+        <p:spPr>
+          <a:xfrm>
+            <a:off x="2023872" y="4169664"/>
+            <a:ext cx="685800" cy="475488"/>
           </a:xfrm>
           <a:prstGeom prst="rect">
             <a:avLst>
-              <a:gd name="adj" fmla="val 9524"/>
+              <a:gd name="adj" fmla="val 7692"/>
             </a:avLst>
           </a:prstGeom>
           <a:solidFill>
@@ -33825,14 +35737,14 @@
       </p:sp>
       <p:sp>
         <p:nvSpPr>
-          <p:cNvPr id="40" name="Text 38"/>
-          <p:cNvSpPr/>
-          <p:nvPr/>
-        </p:nvSpPr>
-        <p:spPr>
-          <a:xfrm>
-            <a:off x="2254649" y="4169664"/>
-            <a:ext cx="685800" cy="384048"/>
+          <p:cNvPr id="43" name="Text 41"/>
+          <p:cNvSpPr/>
+          <p:nvPr/>
+        </p:nvSpPr>
+        <p:spPr>
+          <a:xfrm>
+            <a:off x="2023872" y="4169664"/>
+            <a:ext cx="685800" cy="475488"/>
           </a:xfrm>
           <a:prstGeom prst="rect">
             <a:avLst/>
@@ -33856,7 +35768,7 @@
                 <a:ea typeface="Trebuchet MS" pitchFamily="34" charset="-122"/>
                 <a:cs typeface="Trebuchet MS" pitchFamily="34" charset="-120"/>
               </a:rPr>
-              <a:t>a</a:t>
+              <a:t>e</a:t>
             </a:r>
             <a:endParaRPr lang="en-US" sz="900" dirty="0"/>
           </a:p>
@@ -33864,18 +35776,18 @@
       </p:sp>
       <p:sp>
         <p:nvSpPr>
-          <p:cNvPr id="41" name="Shape 39"/>
-          <p:cNvSpPr/>
-          <p:nvPr/>
-        </p:nvSpPr>
-        <p:spPr>
-          <a:xfrm>
-            <a:off x="3293146" y="4169664"/>
-            <a:ext cx="685800" cy="384048"/>
+          <p:cNvPr id="44" name="Shape 42"/>
+          <p:cNvSpPr/>
+          <p:nvPr/>
+        </p:nvSpPr>
+        <p:spPr>
+          <a:xfrm>
+            <a:off x="2831592" y="4169664"/>
+            <a:ext cx="685800" cy="475488"/>
           </a:xfrm>
           <a:prstGeom prst="rect">
             <a:avLst>
-              <a:gd name="adj" fmla="val 9524"/>
+              <a:gd name="adj" fmla="val 7692"/>
             </a:avLst>
           </a:prstGeom>
           <a:solidFill>
@@ -33891,14 +35803,14 @@
       </p:sp>
       <p:sp>
         <p:nvSpPr>
-          <p:cNvPr id="42" name="Text 40"/>
-          <p:cNvSpPr/>
-          <p:nvPr/>
-        </p:nvSpPr>
-        <p:spPr>
-          <a:xfrm>
-            <a:off x="3293146" y="4169664"/>
-            <a:ext cx="685800" cy="384048"/>
+          <p:cNvPr id="45" name="Text 43"/>
+          <p:cNvSpPr/>
+          <p:nvPr/>
+        </p:nvSpPr>
+        <p:spPr>
+          <a:xfrm>
+            <a:off x="2831592" y="4169664"/>
+            <a:ext cx="685800" cy="475488"/>
           </a:xfrm>
           <a:prstGeom prst="rect">
             <a:avLst/>
@@ -33922,7 +35834,7 @@
                 <a:ea typeface="Trebuchet MS" pitchFamily="34" charset="-122"/>
                 <a:cs typeface="Trebuchet MS" pitchFamily="34" charset="-120"/>
               </a:rPr>
-              <a:t>d</a:t>
+              <a:t>m</a:t>
             </a:r>
             <a:endParaRPr lang="en-US" sz="900" dirty="0"/>
           </a:p>
@@ -33930,18 +35842,18 @@
       </p:sp>
       <p:sp>
         <p:nvSpPr>
-          <p:cNvPr id="43" name="Shape 41"/>
-          <p:cNvSpPr/>
-          <p:nvPr/>
-        </p:nvSpPr>
-        <p:spPr>
-          <a:xfrm>
-            <a:off x="4331643" y="4169664"/>
-            <a:ext cx="685800" cy="384048"/>
+          <p:cNvPr id="46" name="Shape 44"/>
+          <p:cNvSpPr/>
+          <p:nvPr/>
+        </p:nvSpPr>
+        <p:spPr>
+          <a:xfrm>
+            <a:off x="3639312" y="4169664"/>
+            <a:ext cx="685800" cy="475488"/>
           </a:xfrm>
           <a:prstGeom prst="rect">
             <a:avLst>
-              <a:gd name="adj" fmla="val 9524"/>
+              <a:gd name="adj" fmla="val 7692"/>
             </a:avLst>
           </a:prstGeom>
           <a:solidFill>
@@ -33957,14 +35869,14 @@
       </p:sp>
       <p:sp>
         <p:nvSpPr>
-          <p:cNvPr id="44" name="Text 42"/>
-          <p:cNvSpPr/>
-          <p:nvPr/>
-        </p:nvSpPr>
-        <p:spPr>
-          <a:xfrm>
-            <a:off x="4331643" y="4169664"/>
-            <a:ext cx="685800" cy="384048"/>
+          <p:cNvPr id="47" name="Text 45"/>
+          <p:cNvSpPr/>
+          <p:nvPr/>
+        </p:nvSpPr>
+        <p:spPr>
+          <a:xfrm>
+            <a:off x="3639312" y="4169664"/>
+            <a:ext cx="685800" cy="475488"/>
           </a:xfrm>
           <a:prstGeom prst="rect">
             <a:avLst/>
@@ -33988,7 +35900,7 @@
                 <a:ea typeface="Trebuchet MS" pitchFamily="34" charset="-122"/>
                 <a:cs typeface="Trebuchet MS" pitchFamily="34" charset="-120"/>
               </a:rPr>
-              <a:t>m</a:t>
+              <a:t>i</a:t>
             </a:r>
             <a:endParaRPr lang="en-US" sz="900" dirty="0"/>
           </a:p>
@@ -33996,18 +35908,18 @@
       </p:sp>
       <p:sp>
         <p:nvSpPr>
-          <p:cNvPr id="45" name="Shape 43"/>
-          <p:cNvSpPr/>
-          <p:nvPr/>
-        </p:nvSpPr>
-        <p:spPr>
-          <a:xfrm>
-            <a:off x="5370141" y="4169664"/>
-            <a:ext cx="685800" cy="384048"/>
+          <p:cNvPr id="48" name="Shape 46"/>
+          <p:cNvSpPr/>
+          <p:nvPr/>
+        </p:nvSpPr>
+        <p:spPr>
+          <a:xfrm>
+            <a:off x="4447032" y="4169664"/>
+            <a:ext cx="685800" cy="475488"/>
           </a:xfrm>
           <a:prstGeom prst="rect">
             <a:avLst>
-              <a:gd name="adj" fmla="val 9524"/>
+              <a:gd name="adj" fmla="val 7692"/>
             </a:avLst>
           </a:prstGeom>
           <a:solidFill>
@@ -34023,14 +35935,14 @@
       </p:sp>
       <p:sp>
         <p:nvSpPr>
-          <p:cNvPr id="46" name="Text 44"/>
-          <p:cNvSpPr/>
-          <p:nvPr/>
-        </p:nvSpPr>
-        <p:spPr>
-          <a:xfrm>
-            <a:off x="5370141" y="4169664"/>
-            <a:ext cx="685800" cy="384048"/>
+          <p:cNvPr id="49" name="Text 47"/>
+          <p:cNvSpPr/>
+          <p:nvPr/>
+        </p:nvSpPr>
+        <p:spPr>
+          <a:xfrm>
+            <a:off x="4447032" y="4169664"/>
+            <a:ext cx="685800" cy="475488"/>
           </a:xfrm>
           <a:prstGeom prst="rect">
             <a:avLst/>
@@ -34054,7 +35966,7 @@
                 <a:ea typeface="Trebuchet MS" pitchFamily="34" charset="-122"/>
                 <a:cs typeface="Trebuchet MS" pitchFamily="34" charset="-120"/>
               </a:rPr>
-              <a:t>i</a:t>
+              <a:t>s</a:t>
             </a:r>
             <a:endParaRPr lang="en-US" sz="900" dirty="0"/>
           </a:p>
@@ -34062,18 +35974,18 @@
       </p:sp>
       <p:sp>
         <p:nvSpPr>
-          <p:cNvPr id="47" name="Shape 45"/>
-          <p:cNvSpPr/>
-          <p:nvPr/>
-        </p:nvSpPr>
-        <p:spPr>
-          <a:xfrm>
-            <a:off x="6408638" y="4169664"/>
-            <a:ext cx="685800" cy="384048"/>
+          <p:cNvPr id="50" name="Shape 48"/>
+          <p:cNvSpPr/>
+          <p:nvPr/>
+        </p:nvSpPr>
+        <p:spPr>
+          <a:xfrm>
+            <a:off x="5254752" y="4169664"/>
+            <a:ext cx="685800" cy="475488"/>
           </a:xfrm>
           <a:prstGeom prst="rect">
             <a:avLst>
-              <a:gd name="adj" fmla="val 9524"/>
+              <a:gd name="adj" fmla="val 7692"/>
             </a:avLst>
           </a:prstGeom>
           <a:solidFill>
@@ -34089,14 +36001,14 @@
       </p:sp>
       <p:sp>
         <p:nvSpPr>
-          <p:cNvPr id="48" name="Text 46"/>
-          <p:cNvSpPr/>
-          <p:nvPr/>
-        </p:nvSpPr>
-        <p:spPr>
-          <a:xfrm>
-            <a:off x="6408638" y="4169664"/>
-            <a:ext cx="685800" cy="384048"/>
+          <p:cNvPr id="51" name="Text 49"/>
+          <p:cNvSpPr/>
+          <p:nvPr/>
+        </p:nvSpPr>
+        <p:spPr>
+          <a:xfrm>
+            <a:off x="5254752" y="4169664"/>
+            <a:ext cx="685800" cy="475488"/>
           </a:xfrm>
           <a:prstGeom prst="rect">
             <a:avLst/>
@@ -34120,7 +36032,7 @@
                 <a:ea typeface="Trebuchet MS" pitchFamily="34" charset="-122"/>
                 <a:cs typeface="Trebuchet MS" pitchFamily="34" charset="-120"/>
               </a:rPr>
-              <a:t>ss</a:t>
+              <a:t>si</a:t>
             </a:r>
             <a:endParaRPr lang="en-US" sz="900" dirty="0"/>
           </a:p>
@@ -34128,18 +36040,18 @@
       </p:sp>
       <p:sp>
         <p:nvSpPr>
-          <p:cNvPr id="49" name="Shape 47"/>
-          <p:cNvSpPr/>
-          <p:nvPr/>
-        </p:nvSpPr>
-        <p:spPr>
-          <a:xfrm>
-            <a:off x="7447135" y="4169664"/>
-            <a:ext cx="685800" cy="384048"/>
+          <p:cNvPr id="52" name="Shape 50"/>
+          <p:cNvSpPr/>
+          <p:nvPr/>
+        </p:nvSpPr>
+        <p:spPr>
+          <a:xfrm>
+            <a:off x="6062472" y="4169664"/>
+            <a:ext cx="685800" cy="475488"/>
           </a:xfrm>
           <a:prstGeom prst="rect">
             <a:avLst>
-              <a:gd name="adj" fmla="val 9524"/>
+              <a:gd name="adj" fmla="val 7692"/>
             </a:avLst>
           </a:prstGeom>
           <a:solidFill>
@@ -34155,14 +36067,14 @@
       </p:sp>
       <p:sp>
         <p:nvSpPr>
-          <p:cNvPr id="50" name="Text 48"/>
-          <p:cNvSpPr/>
-          <p:nvPr/>
-        </p:nvSpPr>
-        <p:spPr>
-          <a:xfrm>
-            <a:off x="7447135" y="4169664"/>
-            <a:ext cx="685800" cy="384048"/>
+          <p:cNvPr id="53" name="Text 51"/>
+          <p:cNvSpPr/>
+          <p:nvPr/>
+        </p:nvSpPr>
+        <p:spPr>
+          <a:xfrm>
+            <a:off x="6062472" y="4169664"/>
+            <a:ext cx="685800" cy="475488"/>
           </a:xfrm>
           <a:prstGeom prst="rect">
             <a:avLst/>
@@ -34186,7 +36098,7 @@
                 <a:ea typeface="Trebuchet MS" pitchFamily="34" charset="-122"/>
                 <a:cs typeface="Trebuchet MS" pitchFamily="34" charset="-120"/>
               </a:rPr>
-              <a:t>ion</a:t>
+              <a:t>o</a:t>
             </a:r>
             <a:endParaRPr lang="en-US" sz="900" dirty="0"/>
           </a:p>
@@ -34194,40 +36106,133 @@
       </p:sp>
       <p:sp>
         <p:nvSpPr>
-          <p:cNvPr id="51" name="Text 49"/>
-          <p:cNvSpPr/>
-          <p:nvPr/>
-        </p:nvSpPr>
-        <p:spPr>
-          <a:xfrm>
-            <a:off x="7447135" y="4572000"/>
-            <a:ext cx="685800" cy="219456"/>
-          </a:xfrm>
-          <a:prstGeom prst="rect">
-            <a:avLst/>
-          </a:prstGeom>
-          <a:noFill/>
-          <a:ln/>
-        </p:spPr>
-        <p:txBody>
-          <a:bodyPr wrap="square" lIns="0" tIns="0" rIns="0" bIns="0" rtlCol="0" anchor="t"/>
-          <a:lstStyle/>
-          <a:p>
-            <a:pPr algn="ctr" indent="0" marL="0">
-              <a:buNone/>
-            </a:pPr>
-            <a:r>
-              <a:rPr lang="en-US" sz="750" i="1" dirty="0">
-                <a:solidFill>
-                  <a:srgbClr val="94A3B8"/>
-                </a:solidFill>
-                <a:latin typeface="Calibri" pitchFamily="34" charset="0"/>
-                <a:ea typeface="Calibri" pitchFamily="34" charset="-122"/>
-                <a:cs typeface="Calibri" pitchFamily="34" charset="-120"/>
-              </a:rPr>
-              <a:t>/shun/</a:t>
-            </a:r>
-            <a:endParaRPr lang="en-US" sz="750" dirty="0"/>
+          <p:cNvPr id="54" name="Shape 52"/>
+          <p:cNvSpPr/>
+          <p:nvPr/>
+        </p:nvSpPr>
+        <p:spPr>
+          <a:xfrm>
+            <a:off x="6870192" y="4169664"/>
+            <a:ext cx="685800" cy="475488"/>
+          </a:xfrm>
+          <a:prstGeom prst="rect">
+            <a:avLst>
+              <a:gd name="adj" fmla="val 7692"/>
+            </a:avLst>
+          </a:prstGeom>
+          <a:solidFill>
+            <a:srgbClr val="FFFFFF"/>
+          </a:solidFill>
+          <a:ln w="12700">
+            <a:solidFill>
+              <a:srgbClr val="DB2777"/>
+            </a:solidFill>
+            <a:prstDash val="solid"/>
+          </a:ln>
+        </p:spPr>
+      </p:sp>
+      <p:sp>
+        <p:nvSpPr>
+          <p:cNvPr id="55" name="Text 53"/>
+          <p:cNvSpPr/>
+          <p:nvPr/>
+        </p:nvSpPr>
+        <p:spPr>
+          <a:xfrm>
+            <a:off x="6870192" y="4169664"/>
+            <a:ext cx="685800" cy="475488"/>
+          </a:xfrm>
+          <a:prstGeom prst="rect">
+            <a:avLst/>
+          </a:prstGeom>
+          <a:noFill/>
+          <a:ln/>
+        </p:spPr>
+        <p:txBody>
+          <a:bodyPr wrap="square" lIns="0" tIns="0" rIns="0" bIns="0" rtlCol="0" anchor="ctr"/>
+          <a:lstStyle/>
+          <a:p>
+            <a:pPr algn="ctr" indent="0" marL="0">
+              <a:buNone/>
+            </a:pPr>
+            <a:r>
+              <a:rPr lang="en-US" sz="900" b="1" dirty="0">
+                <a:solidFill>
+                  <a:srgbClr val="9D174D"/>
+                </a:solidFill>
+                <a:latin typeface="Trebuchet MS" pitchFamily="34" charset="0"/>
+                <a:ea typeface="Trebuchet MS" pitchFamily="34" charset="-122"/>
+                <a:cs typeface="Trebuchet MS" pitchFamily="34" charset="-120"/>
+              </a:rPr>
+              <a:t>n</a:t>
+            </a:r>
+            <a:endParaRPr lang="en-US" sz="900" dirty="0"/>
+          </a:p>
+        </p:txBody>
+      </p:sp>
+      <p:sp>
+        <p:nvSpPr>
+          <p:cNvPr id="56" name="Shape 54"/>
+          <p:cNvSpPr/>
+          <p:nvPr/>
+        </p:nvSpPr>
+        <p:spPr>
+          <a:xfrm>
+            <a:off x="7677912" y="4169664"/>
+            <a:ext cx="685800" cy="475488"/>
+          </a:xfrm>
+          <a:prstGeom prst="rect">
+            <a:avLst>
+              <a:gd name="adj" fmla="val 7692"/>
+            </a:avLst>
+          </a:prstGeom>
+          <a:solidFill>
+            <a:srgbClr val="FFFFFF"/>
+          </a:solidFill>
+          <a:ln w="12700">
+            <a:solidFill>
+              <a:srgbClr val="DB2777"/>
+            </a:solidFill>
+            <a:prstDash val="solid"/>
+          </a:ln>
+        </p:spPr>
+      </p:sp>
+      <p:sp>
+        <p:nvSpPr>
+          <p:cNvPr id="57" name="Text 55"/>
+          <p:cNvSpPr/>
+          <p:nvPr/>
+        </p:nvSpPr>
+        <p:spPr>
+          <a:xfrm>
+            <a:off x="7677912" y="4169664"/>
+            <a:ext cx="685800" cy="475488"/>
+          </a:xfrm>
+          <a:prstGeom prst="rect">
+            <a:avLst/>
+          </a:prstGeom>
+          <a:noFill/>
+          <a:ln/>
+        </p:spPr>
+        <p:txBody>
+          <a:bodyPr wrap="square" lIns="0" tIns="0" rIns="0" bIns="0" rtlCol="0" anchor="ctr"/>
+          <a:lstStyle/>
+          <a:p>
+            <a:pPr algn="ctr" indent="0" marL="0">
+              <a:buNone/>
+            </a:pPr>
+            <a:r>
+              <a:rPr lang="en-US" sz="900" b="1" dirty="0">
+                <a:solidFill>
+                  <a:srgbClr val="9D174D"/>
+                </a:solidFill>
+                <a:latin typeface="Trebuchet MS" pitchFamily="34" charset="0"/>
+                <a:ea typeface="Trebuchet MS" pitchFamily="34" charset="-122"/>
+                <a:cs typeface="Trebuchet MS" pitchFamily="34" charset="-120"/>
+              </a:rPr>
+              <a:t>s</a:t>
+            </a:r>
+            <a:endParaRPr lang="en-US" sz="900" dirty="0"/>
           </a:p>
         </p:txBody>
       </p:sp>
@@ -34517,7 +36522,7 @@
                 <a:ea typeface="Calibri" pitchFamily="34" charset="-122"/>
                 <a:cs typeface="Calibri" pitchFamily="34" charset="-120"/>
               </a:rPr>
-              <a:t>Word Labs  •  wordlabs.app  •  Root: 'miss' = send, let go, release</a:t>
+              <a:t>Word Labs  •  wordlabs.app  •  Root: 'miss' = send</a:t>
             </a:r>
             <a:endParaRPr lang="en-US" sz="800" dirty="0"/>
           </a:p>
@@ -35686,7 +37691,7 @@
                 <a:ea typeface="Calibri" pitchFamily="34" charset="-122"/>
                 <a:cs typeface="Calibri" pitchFamily="34" charset="-120"/>
               </a:rPr>
-              <a:t>Word Labs  •  wordlabs.app  •  Root: 'miss' = send, let go, release</a:t>
+              <a:t>Word Labs  •  wordlabs.app  •  Root: 'miss' = send</a:t>
             </a:r>
             <a:endParaRPr lang="en-US" sz="800" dirty="0"/>
           </a:p>
@@ -36179,7 +38184,7 @@
                 <a:ea typeface="Trebuchet MS" pitchFamily="34" charset="-122"/>
                 <a:cs typeface="Trebuchet MS" pitchFamily="34" charset="-120"/>
               </a:rPr>
-              <a:t>com-</a:t>
+              <a:t>con-</a:t>
             </a:r>
             <a:endParaRPr lang="en-US" sz="1300" dirty="0"/>
           </a:p>
@@ -36268,7 +38273,7 @@
                 <a:ea typeface="Trebuchet MS" pitchFamily="34" charset="-122"/>
                 <a:cs typeface="Trebuchet MS" pitchFamily="34" charset="-120"/>
               </a:rPr>
-              <a:t>-ive</a:t>
+              <a:t>-al</a:t>
             </a:r>
             <a:endParaRPr lang="en-US" sz="1300" dirty="0"/>
           </a:p>
@@ -36332,7 +38337,7 @@
                 <a:ea typeface="Trebuchet MS" pitchFamily="34" charset="-122"/>
                 <a:cs typeface="Trebuchet MS" pitchFamily="34" charset="-120"/>
               </a:rPr>
-              <a:t>e-</a:t>
+              <a:t>dis-</a:t>
             </a:r>
             <a:endParaRPr lang="en-US" sz="1300" dirty="0"/>
           </a:p>
@@ -36421,7 +38426,7 @@
                 <a:ea typeface="Trebuchet MS" pitchFamily="34" charset="-122"/>
                 <a:cs typeface="Trebuchet MS" pitchFamily="34" charset="-120"/>
               </a:rPr>
-              <a:t>-ary</a:t>
+              <a:t>-ed</a:t>
             </a:r>
             <a:endParaRPr lang="en-US" sz="1300" dirty="0"/>
           </a:p>
@@ -36485,7 +38490,7 @@
                 <a:ea typeface="Trebuchet MS" pitchFamily="34" charset="-122"/>
                 <a:cs typeface="Trebuchet MS" pitchFamily="34" charset="-120"/>
               </a:rPr>
-              <a:t>per-</a:t>
+              <a:t>e-</a:t>
             </a:r>
             <a:endParaRPr lang="en-US" sz="1300" dirty="0"/>
           </a:p>
@@ -36574,7 +38579,7 @@
                 <a:ea typeface="Trebuchet MS" pitchFamily="34" charset="-122"/>
                 <a:cs typeface="Trebuchet MS" pitchFamily="34" charset="-120"/>
               </a:rPr>
-              <a:t>-ile</a:t>
+              <a:t>-es</a:t>
             </a:r>
             <a:endParaRPr lang="en-US" sz="1300" dirty="0"/>
           </a:p>
@@ -36638,7 +38643,7 @@
                 <a:ea typeface="Trebuchet MS" pitchFamily="34" charset="-122"/>
                 <a:cs typeface="Trebuchet MS" pitchFamily="34" charset="-120"/>
               </a:rPr>
-              <a:t>sub-</a:t>
+              <a:t>re-</a:t>
             </a:r>
             <a:endParaRPr lang="en-US" sz="1300" dirty="0"/>
           </a:p>
@@ -36735,37 +38740,151 @@
       </p:sp>
       <p:sp>
         <p:nvSpPr>
-          <p:cNvPr id="43" name="Text 41"/>
-          <p:cNvSpPr/>
-          <p:nvPr/>
-        </p:nvSpPr>
-        <p:spPr>
-          <a:xfrm>
-            <a:off x="365760" y="3611880"/>
-            <a:ext cx="1828800" cy="347472"/>
-          </a:xfrm>
-          <a:prstGeom prst="rect">
-            <a:avLst/>
-          </a:prstGeom>
-          <a:noFill/>
-          <a:ln/>
-        </p:spPr>
-        <p:txBody>
-          <a:bodyPr wrap="square" lIns="0" tIns="0" rIns="0" bIns="0" rtlCol="0" anchor="ctr"/>
-          <a:lstStyle/>
-          <a:p>
-            <a:pPr algn="l" indent="0" marL="0">
-              <a:buNone/>
-            </a:pPr>
-            <a:r>
-              <a:rPr lang="en-US" sz="1200" b="1" dirty="0">
-                <a:solidFill>
-                  <a:srgbClr val="0F172A"/>
+          <p:cNvPr id="43" name="Shape 41"/>
+          <p:cNvSpPr/>
+          <p:nvPr/>
+        </p:nvSpPr>
+        <p:spPr>
+          <a:xfrm>
+            <a:off x="365760" y="3666744"/>
+            <a:ext cx="2468880" cy="402336"/>
+          </a:xfrm>
+          <a:prstGeom prst="rect">
+            <a:avLst/>
+          </a:prstGeom>
+          <a:solidFill>
+            <a:srgbClr val="DDD6FE"/>
+          </a:solidFill>
+          <a:ln w="12700">
+            <a:solidFill>
+              <a:srgbClr val="E2E8F0"/>
+            </a:solidFill>
+            <a:prstDash val="solid"/>
+          </a:ln>
+        </p:spPr>
+      </p:sp>
+      <p:sp>
+        <p:nvSpPr>
+          <p:cNvPr id="44" name="Text 42"/>
+          <p:cNvSpPr/>
+          <p:nvPr/>
+        </p:nvSpPr>
+        <p:spPr>
+          <a:xfrm>
+            <a:off x="365760" y="3666744"/>
+            <a:ext cx="2468880" cy="402336"/>
+          </a:xfrm>
+          <a:prstGeom prst="rect">
+            <a:avLst/>
+          </a:prstGeom>
+          <a:noFill/>
+          <a:ln/>
+        </p:spPr>
+        <p:txBody>
+          <a:bodyPr wrap="square" lIns="0" tIns="0" rIns="0" bIns="0" rtlCol="0" anchor="ctr"/>
+          <a:lstStyle/>
+          <a:p>
+            <a:pPr algn="ctr" indent="0" marL="0">
+              <a:buNone/>
+            </a:pPr>
+            <a:r>
+              <a:rPr lang="en-US" sz="1300" b="1" dirty="0">
+                <a:solidFill>
+                  <a:srgbClr val="4C1D95"/>
                 </a:solidFill>
                 <a:latin typeface="Trebuchet MS" pitchFamily="34" charset="0"/>
                 <a:ea typeface="Trebuchet MS" pitchFamily="34" charset="-122"/>
                 <a:cs typeface="Trebuchet MS" pitchFamily="34" charset="-120"/>
               </a:rPr>
+              <a:t>sub-</a:t>
+            </a:r>
+            <a:endParaRPr lang="en-US" sz="1300" dirty="0"/>
+          </a:p>
+        </p:txBody>
+      </p:sp>
+      <p:sp>
+        <p:nvSpPr>
+          <p:cNvPr id="45" name="Shape 43"/>
+          <p:cNvSpPr/>
+          <p:nvPr/>
+        </p:nvSpPr>
+        <p:spPr>
+          <a:xfrm>
+            <a:off x="2971800" y="3666744"/>
+            <a:ext cx="2834640" cy="402336"/>
+          </a:xfrm>
+          <a:prstGeom prst="rect">
+            <a:avLst/>
+          </a:prstGeom>
+          <a:solidFill>
+            <a:srgbClr val="F1F5F9"/>
+          </a:solidFill>
+          <a:ln w="12700">
+            <a:solidFill>
+              <a:srgbClr val="E2E8F0"/>
+            </a:solidFill>
+            <a:prstDash val="solid"/>
+          </a:ln>
+        </p:spPr>
+      </p:sp>
+      <p:sp>
+        <p:nvSpPr>
+          <p:cNvPr id="46" name="Shape 44"/>
+          <p:cNvSpPr/>
+          <p:nvPr/>
+        </p:nvSpPr>
+        <p:spPr>
+          <a:xfrm>
+            <a:off x="5943600" y="3666744"/>
+            <a:ext cx="2834640" cy="402336"/>
+          </a:xfrm>
+          <a:prstGeom prst="rect">
+            <a:avLst/>
+          </a:prstGeom>
+          <a:solidFill>
+            <a:srgbClr val="F1F5F9"/>
+          </a:solidFill>
+          <a:ln w="12700">
+            <a:solidFill>
+              <a:srgbClr val="E2E8F0"/>
+            </a:solidFill>
+            <a:prstDash val="solid"/>
+          </a:ln>
+        </p:spPr>
+      </p:sp>
+      <p:sp>
+        <p:nvSpPr>
+          <p:cNvPr id="47" name="Text 45"/>
+          <p:cNvSpPr/>
+          <p:nvPr/>
+        </p:nvSpPr>
+        <p:spPr>
+          <a:xfrm>
+            <a:off x="365760" y="3611880"/>
+            <a:ext cx="1828800" cy="347472"/>
+          </a:xfrm>
+          <a:prstGeom prst="rect">
+            <a:avLst/>
+          </a:prstGeom>
+          <a:noFill/>
+          <a:ln/>
+        </p:spPr>
+        <p:txBody>
+          <a:bodyPr wrap="square" lIns="0" tIns="0" rIns="0" bIns="0" rtlCol="0" anchor="ctr"/>
+          <a:lstStyle/>
+          <a:p>
+            <a:pPr algn="l" indent="0" marL="0">
+              <a:buNone/>
+            </a:pPr>
+            <a:r>
+              <a:rPr lang="en-US" sz="1200" b="1" dirty="0">
+                <a:solidFill>
+                  <a:srgbClr val="0F172A"/>
+                </a:solidFill>
+                <a:latin typeface="Trebuchet MS" pitchFamily="34" charset="0"/>
+                <a:ea typeface="Trebuchet MS" pitchFamily="34" charset="-122"/>
+                <a:cs typeface="Trebuchet MS" pitchFamily="34" charset="-120"/>
+              </a:rPr>
               <a:t>Sample words:</a:t>
             </a:r>
             <a:endParaRPr lang="en-US" sz="1200" dirty="0"/>
@@ -36774,7 +38893,7 @@
       </p:sp>
       <p:sp>
         <p:nvSpPr>
-          <p:cNvPr id="44" name="Shape 42"/>
+          <p:cNvPr id="48" name="Shape 46"/>
           <p:cNvSpPr/>
           <p:nvPr/>
         </p:nvSpPr>
@@ -36801,7 +38920,7 @@
       </p:sp>
       <p:sp>
         <p:nvSpPr>
-          <p:cNvPr id="45" name="Text 43"/>
+          <p:cNvPr id="49" name="Text 47"/>
           <p:cNvSpPr/>
           <p:nvPr/>
         </p:nvSpPr>
@@ -36832,7 +38951,7 @@
                 <a:ea typeface="Trebuchet MS" pitchFamily="34" charset="-122"/>
                 <a:cs typeface="Trebuchet MS" pitchFamily="34" charset="-120"/>
               </a:rPr>
-              <a:t>mission</a:t>
+              <a:t>miss</a:t>
             </a:r>
             <a:endParaRPr lang="en-US" sz="1200" dirty="0"/>
           </a:p>
@@ -36840,7 +38959,7 @@
       </p:sp>
       <p:sp>
         <p:nvSpPr>
-          <p:cNvPr id="46" name="Shape 44"/>
+          <p:cNvPr id="50" name="Shape 48"/>
           <p:cNvSpPr/>
           <p:nvPr/>
         </p:nvSpPr>
@@ -36867,7 +38986,7 @@
       </p:sp>
       <p:sp>
         <p:nvSpPr>
-          <p:cNvPr id="47" name="Text 45"/>
+          <p:cNvPr id="51" name="Text 49"/>
           <p:cNvSpPr/>
           <p:nvPr/>
         </p:nvSpPr>
@@ -36898,7 +39017,7 @@
                 <a:ea typeface="Trebuchet MS" pitchFamily="34" charset="-122"/>
                 <a:cs typeface="Trebuchet MS" pitchFamily="34" charset="-120"/>
               </a:rPr>
-              <a:t>dismiss</a:t>
+              <a:t>missed</a:t>
             </a:r>
             <a:endParaRPr lang="en-US" sz="1200" dirty="0"/>
           </a:p>
@@ -36906,7 +39025,7 @@
       </p:sp>
       <p:sp>
         <p:nvSpPr>
-          <p:cNvPr id="48" name="Shape 46"/>
+          <p:cNvPr id="52" name="Shape 50"/>
           <p:cNvSpPr/>
           <p:nvPr/>
         </p:nvSpPr>
@@ -36933,7 +39052,7 @@
       </p:sp>
       <p:sp>
         <p:nvSpPr>
-          <p:cNvPr id="49" name="Text 47"/>
+          <p:cNvPr id="53" name="Text 51"/>
           <p:cNvSpPr/>
           <p:nvPr/>
         </p:nvSpPr>
@@ -36964,7 +39083,7 @@
                 <a:ea typeface="Trebuchet MS" pitchFamily="34" charset="-122"/>
                 <a:cs typeface="Trebuchet MS" pitchFamily="34" charset="-120"/>
               </a:rPr>
-              <a:t>permission</a:t>
+              <a:t>misses</a:t>
             </a:r>
             <a:endParaRPr lang="en-US" sz="1200" dirty="0"/>
           </a:p>
@@ -36972,7 +39091,7 @@
       </p:sp>
       <p:sp>
         <p:nvSpPr>
-          <p:cNvPr id="50" name="Shape 48"/>
+          <p:cNvPr id="54" name="Shape 52"/>
           <p:cNvSpPr/>
           <p:nvPr/>
         </p:nvSpPr>
@@ -36999,7 +39118,7 @@
       </p:sp>
       <p:sp>
         <p:nvSpPr>
-          <p:cNvPr id="51" name="Text 49"/>
+          <p:cNvPr id="55" name="Text 53"/>
           <p:cNvSpPr/>
           <p:nvPr/>
         </p:nvSpPr>
@@ -37030,7 +39149,7 @@
                 <a:ea typeface="Trebuchet MS" pitchFamily="34" charset="-122"/>
                 <a:cs typeface="Trebuchet MS" pitchFamily="34" charset="-120"/>
               </a:rPr>
-              <a:t>admission</a:t>
+              <a:t>remiss</a:t>
             </a:r>
             <a:endParaRPr lang="en-US" sz="1200" dirty="0"/>
           </a:p>
@@ -37038,7 +39157,7 @@
       </p:sp>
       <p:sp>
         <p:nvSpPr>
-          <p:cNvPr id="52" name="Shape 50"/>
+          <p:cNvPr id="56" name="Shape 54"/>
           <p:cNvSpPr/>
           <p:nvPr/>
         </p:nvSpPr>
@@ -37065,7 +39184,7 @@
       </p:sp>
       <p:sp>
         <p:nvSpPr>
-          <p:cNvPr id="53" name="Text 51"/>
+          <p:cNvPr id="57" name="Text 55"/>
           <p:cNvSpPr/>
           <p:nvPr/>
         </p:nvSpPr>
@@ -37096,7 +39215,7 @@
                 <a:ea typeface="Trebuchet MS" pitchFamily="34" charset="-122"/>
                 <a:cs typeface="Trebuchet MS" pitchFamily="34" charset="-120"/>
               </a:rPr>
-              <a:t>submission</a:t>
+              <a:t>dismiss</a:t>
             </a:r>
             <a:endParaRPr lang="en-US" sz="1200" dirty="0"/>
           </a:p>
@@ -37104,7 +39223,7 @@
       </p:sp>
       <p:sp>
         <p:nvSpPr>
-          <p:cNvPr id="54" name="Shape 52"/>
+          <p:cNvPr id="58" name="Shape 56"/>
           <p:cNvSpPr/>
           <p:nvPr/>
         </p:nvSpPr>
@@ -37131,7 +39250,7 @@
       </p:sp>
       <p:sp>
         <p:nvSpPr>
-          <p:cNvPr id="55" name="Text 53"/>
+          <p:cNvPr id="59" name="Text 57"/>
           <p:cNvSpPr/>
           <p:nvPr/>
         </p:nvSpPr>
@@ -37162,7 +39281,7 @@
                 <a:ea typeface="Trebuchet MS" pitchFamily="34" charset="-122"/>
                 <a:cs typeface="Trebuchet MS" pitchFamily="34" charset="-120"/>
               </a:rPr>
-              <a:t>commissioner</a:t>
+              <a:t>missing</a:t>
             </a:r>
             <a:endParaRPr lang="en-US" sz="1200" dirty="0"/>
           </a:p>
@@ -37170,7 +39289,7 @@
       </p:sp>
       <p:sp>
         <p:nvSpPr>
-          <p:cNvPr id="56" name="Shape 54"/>
+          <p:cNvPr id="60" name="Shape 58"/>
           <p:cNvSpPr/>
           <p:nvPr/>
         </p:nvSpPr>
@@ -37197,7 +39316,7 @@
       </p:sp>
       <p:sp>
         <p:nvSpPr>
-          <p:cNvPr id="57" name="Text 55"/>
+          <p:cNvPr id="61" name="Text 59"/>
           <p:cNvSpPr/>
           <p:nvPr/>
         </p:nvSpPr>
@@ -37228,73 +39347,7 @@
                 <a:ea typeface="Trebuchet MS" pitchFamily="34" charset="-122"/>
                 <a:cs typeface="Trebuchet MS" pitchFamily="34" charset="-120"/>
               </a:rPr>
-              <a:t>missile</a:t>
-            </a:r>
-            <a:endParaRPr lang="en-US" sz="1200" dirty="0"/>
-          </a:p>
-        </p:txBody>
-      </p:sp>
-      <p:sp>
-        <p:nvSpPr>
-          <p:cNvPr id="58" name="Shape 56"/>
-          <p:cNvSpPr/>
-          <p:nvPr/>
-        </p:nvSpPr>
-        <p:spPr>
-          <a:xfrm>
-            <a:off x="6894576" y="4498848"/>
-            <a:ext cx="2011680" cy="402336"/>
-          </a:xfrm>
-          <a:prstGeom prst="rect">
-            <a:avLst>
-              <a:gd name="adj" fmla="val 13636"/>
-            </a:avLst>
-          </a:prstGeom>
-          <a:solidFill>
-            <a:srgbClr val="EEF2FF"/>
-          </a:solidFill>
-          <a:ln w="12700">
-            <a:solidFill>
-              <a:srgbClr val="6366F1"/>
-            </a:solidFill>
-            <a:prstDash val="solid"/>
-          </a:ln>
-        </p:spPr>
-      </p:sp>
-      <p:sp>
-        <p:nvSpPr>
-          <p:cNvPr id="59" name="Text 57"/>
-          <p:cNvSpPr/>
-          <p:nvPr/>
-        </p:nvSpPr>
-        <p:spPr>
-          <a:xfrm>
-            <a:off x="6894576" y="4498848"/>
-            <a:ext cx="2011680" cy="402336"/>
-          </a:xfrm>
-          <a:prstGeom prst="rect">
-            <a:avLst/>
-          </a:prstGeom>
-          <a:noFill/>
-          <a:ln/>
-        </p:spPr>
-        <p:txBody>
-          <a:bodyPr wrap="square" lIns="0" tIns="0" rIns="0" bIns="0" rtlCol="0" anchor="ctr"/>
-          <a:lstStyle/>
-          <a:p>
-            <a:pPr algn="ctr" indent="0" marL="0">
-              <a:buNone/>
-            </a:pPr>
-            <a:r>
-              <a:rPr lang="en-US" sz="1200" b="1" dirty="0">
-                <a:solidFill>
-                  <a:srgbClr val="4338CA"/>
-                </a:solidFill>
-                <a:latin typeface="Trebuchet MS" pitchFamily="34" charset="0"/>
-                <a:ea typeface="Trebuchet MS" pitchFamily="34" charset="-122"/>
-                <a:cs typeface="Trebuchet MS" pitchFamily="34" charset="-120"/>
-              </a:rPr>
-              <a:t>missionary</a:t>
+              <a:t>mission</a:t>
             </a:r>
             <a:endParaRPr lang="en-US" sz="1200" dirty="0"/>
           </a:p>
@@ -37586,7 +39639,7 @@
                 <a:ea typeface="Calibri" pitchFamily="34" charset="-122"/>
                 <a:cs typeface="Calibri" pitchFamily="34" charset="-120"/>
               </a:rPr>
-              <a:t>Word Labs  •  wordlabs.app  •  Root: 'miss' = send, let go, release</a:t>
+              <a:t>Word Labs  •  wordlabs.app  •  Root: 'miss' = send</a:t>
             </a:r>
             <a:endParaRPr lang="en-US" sz="800" dirty="0"/>
           </a:p>
@@ -37750,7 +39803,7 @@
                 <a:ea typeface="Calibri" pitchFamily="34" charset="-122"/>
                 <a:cs typeface="Calibri" pitchFamily="34" charset="-120"/>
               </a:rPr>
-              <a:t>The core part of a word carrying its basic meaning. For example, 'miss' means 'send, let go, release'.</a:t>
+              <a:t>The core part of a word carrying its basic meaning. For example, 'miss' means 'send'.</a:t>
             </a:r>
             <a:endParaRPr lang="en-US" sz="1350" dirty="0"/>
           </a:p>
@@ -38370,7 +40423,7 @@
                 <a:ea typeface="Calibri" pitchFamily="34" charset="-122"/>
                 <a:cs typeface="Calibri" pitchFamily="34" charset="-120"/>
               </a:rPr>
-              <a:t>Word Labs  •  wordlabs.app  •  Root: 'miss' = send, let go, release</a:t>
+              <a:t>Word Labs  •  wordlabs.app  •  Root: 'miss' = send</a:t>
             </a:r>
             <a:endParaRPr lang="en-US" sz="800" dirty="0"/>
           </a:p>
@@ -38482,7 +40535,7 @@
                 <a:ea typeface="Calibri" pitchFamily="34" charset="-122"/>
                 <a:cs typeface="Calibri" pitchFamily="34" charset="-120"/>
               </a:rPr>
-              <a:t>1.  The prefix 'e-' can be added to 'miss' to form the word 'emission'.</a:t>
+              <a:t>1.  'miss' means 'send'.</a:t>
             </a:r>
             <a:endParaRPr lang="en-US" sz="1300" dirty="0"/>
           </a:p>
@@ -38505,11 +40558,11 @@
             </a:avLst>
           </a:prstGeom>
           <a:solidFill>
-            <a:srgbClr val="FEE2E2"/>
-          </a:solidFill>
-          <a:ln w="12700">
-            <a:solidFill>
-              <a:srgbClr val="DC2626"/>
+            <a:srgbClr val="DCFCE7"/>
+          </a:solidFill>
+          <a:ln w="12700">
+            <a:solidFill>
+              <a:srgbClr val="16A34A"/>
             </a:solidFill>
             <a:prstDash val="solid"/>
           </a:ln>
@@ -38542,13 +40595,13 @@
             <a:r>
               <a:rPr lang="en-US" sz="1100" b="1" dirty="0">
                 <a:solidFill>
-                  <a:srgbClr val="DC2626"/>
+                  <a:srgbClr val="16A34A"/>
                 </a:solidFill>
                 <a:latin typeface="Trebuchet MS" pitchFamily="34" charset="0"/>
                 <a:ea typeface="Trebuchet MS" pitchFamily="34" charset="-122"/>
                 <a:cs typeface="Trebuchet MS" pitchFamily="34" charset="-120"/>
               </a:rPr>
-              <a:t>FALSE</a:t>
+              <a:t>TRUE</a:t>
             </a:r>
             <a:endParaRPr lang="en-US" sz="1100" dirty="0"/>
           </a:p>
@@ -38621,7 +40674,7 @@
                 <a:ea typeface="Calibri" pitchFamily="34" charset="-122"/>
                 <a:cs typeface="Calibri" pitchFamily="34" charset="-120"/>
               </a:rPr>
-              <a:t>2.  The word 'missile' has nothing to do with the root 'miss'.</a:t>
+              <a:t>2.  'miss' means 'to greet someone warmly with a handshake'.</a:t>
             </a:r>
             <a:endParaRPr lang="en-US" sz="1300" dirty="0"/>
           </a:p>
@@ -38760,7 +40813,7 @@
                 <a:ea typeface="Calibri" pitchFamily="34" charset="-122"/>
                 <a:cs typeface="Calibri" pitchFamily="34" charset="-120"/>
               </a:rPr>
-              <a:t>3.  The word 'permission' contains the root 'miss' because it relates to being sent or allowed.</a:t>
+              <a:t>3.  'missed' means 'felt sad because someone or something you like was not there'.</a:t>
             </a:r>
             <a:endParaRPr lang="en-US" sz="1300" dirty="0"/>
           </a:p>
@@ -38899,7 +40952,7 @@
                 <a:ea typeface="Calibri" pitchFamily="34" charset="-122"/>
                 <a:cs typeface="Calibri" pitchFamily="34" charset="-120"/>
               </a:rPr>
-              <a:t>4.  The root 'miss' comes from a Latin word meaning to send or let go.</a:t>
+              <a:t>4.  'missed' means 'celebrated a special occasion with friends'.</a:t>
             </a:r>
             <a:endParaRPr lang="en-US" sz="1300" dirty="0"/>
           </a:p>
@@ -38922,11 +40975,11 @@
             </a:avLst>
           </a:prstGeom>
           <a:solidFill>
-            <a:srgbClr val="DCFCE7"/>
-          </a:solidFill>
-          <a:ln w="12700">
-            <a:solidFill>
-              <a:srgbClr val="16A34A"/>
+            <a:srgbClr val="FEE2E2"/>
+          </a:solidFill>
+          <a:ln w="12700">
+            <a:solidFill>
+              <a:srgbClr val="DC2626"/>
             </a:solidFill>
             <a:prstDash val="solid"/>
           </a:ln>
@@ -38959,13 +41012,13 @@
             <a:r>
               <a:rPr lang="en-US" sz="1100" b="1" dirty="0">
                 <a:solidFill>
-                  <a:srgbClr val="16A34A"/>
+                  <a:srgbClr val="DC2626"/>
                 </a:solidFill>
                 <a:latin typeface="Trebuchet MS" pitchFamily="34" charset="0"/>
                 <a:ea typeface="Trebuchet MS" pitchFamily="34" charset="-122"/>
                 <a:cs typeface="Trebuchet MS" pitchFamily="34" charset="-120"/>
               </a:rPr>
-              <a:t>TRUE</a:t>
+              <a:t>FALSE</a:t>
             </a:r>
             <a:endParaRPr lang="en-US" sz="1100" dirty="0"/>
           </a:p>
@@ -39038,7 +41091,7 @@
                 <a:ea typeface="Calibri" pitchFamily="34" charset="-122"/>
                 <a:cs typeface="Calibri" pitchFamily="34" charset="-120"/>
               </a:rPr>
-              <a:t>5.  The word 'mission' means an important task someone is sent to carry out.</a:t>
+              <a:t>5.  'miss' means 'to feel sad because someone or something you like is not there'.</a:t>
             </a:r>
             <a:endParaRPr lang="en-US" sz="1300" dirty="0"/>
           </a:p>
@@ -39396,7 +41449,7 @@
                 <a:ea typeface="Calibri" pitchFamily="34" charset="-122"/>
                 <a:cs typeface="Calibri" pitchFamily="34" charset="-120"/>
               </a:rPr>
-              <a:t>Word Labs  •  wordlabs.app  •  Root: 'miss' = send, let go, release</a:t>
+              <a:t>Word Labs  •  wordlabs.app  •  Root: 'miss' = send</a:t>
             </a:r>
             <a:endParaRPr lang="en-US" sz="800" dirty="0"/>
           </a:p>
@@ -39533,7 +41586,7 @@
                 <a:ea typeface="Trebuchet MS" pitchFamily="34" charset="-122"/>
                 <a:cs typeface="Trebuchet MS" pitchFamily="34" charset="-120"/>
               </a:rPr>
-              <a:t>send, let go, release</a:t>
+              <a:t>send</a:t>
             </a:r>
             <a:endParaRPr lang="en-US" sz="2000" dirty="0"/>
           </a:p>
@@ -39572,7 +41625,7 @@
                 <a:ea typeface="Calibri" pitchFamily="34" charset="-122"/>
                 <a:cs typeface="Calibri" pitchFamily="34" charset="-120"/>
               </a:rPr>
-              <a:t>Origin: Latin: mittere</a:t>
+              <a:t>Origin: Latin root</a:t>
             </a:r>
             <a:endParaRPr lang="en-US" sz="1100" dirty="0"/>
           </a:p>
@@ -39677,7 +41730,7 @@
                 <a:ea typeface="Trebuchet MS" pitchFamily="34" charset="-122"/>
                 <a:cs typeface="Trebuchet MS" pitchFamily="34" charset="-120"/>
               </a:rPr>
-              <a:t>mission</a:t>
+              <a:t>miss</a:t>
             </a:r>
             <a:endParaRPr lang="en-US" sz="1300" dirty="0"/>
           </a:p>
@@ -39743,7 +41796,7 @@
                 <a:ea typeface="Trebuchet MS" pitchFamily="34" charset="-122"/>
                 <a:cs typeface="Trebuchet MS" pitchFamily="34" charset="-120"/>
               </a:rPr>
-              <a:t>dismiss</a:t>
+              <a:t>missed</a:t>
             </a:r>
             <a:endParaRPr lang="en-US" sz="1300" dirty="0"/>
           </a:p>
@@ -39809,7 +41862,7 @@
                 <a:ea typeface="Trebuchet MS" pitchFamily="34" charset="-122"/>
                 <a:cs typeface="Trebuchet MS" pitchFamily="34" charset="-120"/>
               </a:rPr>
-              <a:t>permission</a:t>
+              <a:t>misses</a:t>
             </a:r>
             <a:endParaRPr lang="en-US" sz="1300" dirty="0"/>
           </a:p>
@@ -39875,7 +41928,7 @@
                 <a:ea typeface="Trebuchet MS" pitchFamily="34" charset="-122"/>
                 <a:cs typeface="Trebuchet MS" pitchFamily="34" charset="-120"/>
               </a:rPr>
-              <a:t>admission</a:t>
+              <a:t>remiss</a:t>
             </a:r>
             <a:endParaRPr lang="en-US" sz="1300" dirty="0"/>
           </a:p>
@@ -39941,7 +41994,7 @@
                 <a:ea typeface="Trebuchet MS" pitchFamily="34" charset="-122"/>
                 <a:cs typeface="Trebuchet MS" pitchFamily="34" charset="-120"/>
               </a:rPr>
-              <a:t>submission</a:t>
+              <a:t>dismiss</a:t>
             </a:r>
             <a:endParaRPr lang="en-US" sz="1300" dirty="0"/>
           </a:p>
@@ -40007,7 +42060,7 @@
                 <a:ea typeface="Trebuchet MS" pitchFamily="34" charset="-122"/>
                 <a:cs typeface="Trebuchet MS" pitchFamily="34" charset="-120"/>
               </a:rPr>
-              <a:t>commissioner</a:t>
+              <a:t>missing</a:t>
             </a:r>
             <a:endParaRPr lang="en-US" sz="1300" dirty="0"/>
           </a:p>
@@ -40073,7 +42126,7 @@
                 <a:ea typeface="Trebuchet MS" pitchFamily="34" charset="-122"/>
                 <a:cs typeface="Trebuchet MS" pitchFamily="34" charset="-120"/>
               </a:rPr>
-              <a:t>missile</a:t>
+              <a:t>mission</a:t>
             </a:r>
             <a:endParaRPr lang="en-US" sz="1300" dirty="0"/>
           </a:p>
@@ -40365,7 +42418,7 @@
                 <a:ea typeface="Calibri" pitchFamily="34" charset="-122"/>
                 <a:cs typeface="Calibri" pitchFamily="34" charset="-120"/>
               </a:rPr>
-              <a:t>Word Labs  •  wordlabs.app  •  Root: 'miss' = send, let go, release</a:t>
+              <a:t>Word Labs  •  wordlabs.app  •  Root: 'miss' = send</a:t>
             </a:r>
             <a:endParaRPr lang="en-US" sz="800" dirty="0"/>
           </a:p>
@@ -40858,7 +42911,7 @@
                 <a:ea typeface="Trebuchet MS" pitchFamily="34" charset="-122"/>
                 <a:cs typeface="Trebuchet MS" pitchFamily="34" charset="-120"/>
               </a:rPr>
-              <a:t>com-</a:t>
+              <a:t>con-</a:t>
             </a:r>
             <a:endParaRPr lang="en-US" sz="1300" dirty="0"/>
           </a:p>
@@ -40947,7 +43000,7 @@
                 <a:ea typeface="Trebuchet MS" pitchFamily="34" charset="-122"/>
                 <a:cs typeface="Trebuchet MS" pitchFamily="34" charset="-120"/>
               </a:rPr>
-              <a:t>-ive</a:t>
+              <a:t>-al</a:t>
             </a:r>
             <a:endParaRPr lang="en-US" sz="1300" dirty="0"/>
           </a:p>
@@ -41011,7 +43064,7 @@
                 <a:ea typeface="Trebuchet MS" pitchFamily="34" charset="-122"/>
                 <a:cs typeface="Trebuchet MS" pitchFamily="34" charset="-120"/>
               </a:rPr>
-              <a:t>e-</a:t>
+              <a:t>dis-</a:t>
             </a:r>
             <a:endParaRPr lang="en-US" sz="1300" dirty="0"/>
           </a:p>
@@ -41100,7 +43153,7 @@
                 <a:ea typeface="Trebuchet MS" pitchFamily="34" charset="-122"/>
                 <a:cs typeface="Trebuchet MS" pitchFamily="34" charset="-120"/>
               </a:rPr>
-              <a:t>-ary</a:t>
+              <a:t>-ed</a:t>
             </a:r>
             <a:endParaRPr lang="en-US" sz="1300" dirty="0"/>
           </a:p>
@@ -41164,7 +43217,7 @@
                 <a:ea typeface="Trebuchet MS" pitchFamily="34" charset="-122"/>
                 <a:cs typeface="Trebuchet MS" pitchFamily="34" charset="-120"/>
               </a:rPr>
-              <a:t>per-</a:t>
+              <a:t>e-</a:t>
             </a:r>
             <a:endParaRPr lang="en-US" sz="1300" dirty="0"/>
           </a:p>
@@ -41253,7 +43306,7 @@
                 <a:ea typeface="Trebuchet MS" pitchFamily="34" charset="-122"/>
                 <a:cs typeface="Trebuchet MS" pitchFamily="34" charset="-120"/>
               </a:rPr>
-              <a:t>-ile</a:t>
+              <a:t>-es</a:t>
             </a:r>
             <a:endParaRPr lang="en-US" sz="1300" dirty="0"/>
           </a:p>
@@ -41317,7 +43370,7 @@
                 <a:ea typeface="Trebuchet MS" pitchFamily="34" charset="-122"/>
                 <a:cs typeface="Trebuchet MS" pitchFamily="34" charset="-120"/>
               </a:rPr>
-              <a:t>sub-</a:t>
+              <a:t>re-</a:t>
             </a:r>
             <a:endParaRPr lang="en-US" sz="1300" dirty="0"/>
           </a:p>
@@ -41414,13 +43467,127 @@
       </p:sp>
       <p:sp>
         <p:nvSpPr>
-          <p:cNvPr id="43" name="Text 41"/>
-          <p:cNvSpPr/>
-          <p:nvPr/>
-        </p:nvSpPr>
-        <p:spPr>
-          <a:xfrm>
-            <a:off x="365760" y="4178808"/>
+          <p:cNvPr id="43" name="Shape 41"/>
+          <p:cNvSpPr/>
+          <p:nvPr/>
+        </p:nvSpPr>
+        <p:spPr>
+          <a:xfrm>
+            <a:off x="640080" y="4041648"/>
+            <a:ext cx="1463040" cy="420624"/>
+          </a:xfrm>
+          <a:prstGeom prst="rect">
+            <a:avLst/>
+          </a:prstGeom>
+          <a:solidFill>
+            <a:srgbClr val="DDD6FE"/>
+          </a:solidFill>
+          <a:ln w="12700">
+            <a:solidFill>
+              <a:srgbClr val="E5E7EB"/>
+            </a:solidFill>
+            <a:prstDash val="solid"/>
+          </a:ln>
+        </p:spPr>
+      </p:sp>
+      <p:sp>
+        <p:nvSpPr>
+          <p:cNvPr id="44" name="Text 42"/>
+          <p:cNvSpPr/>
+          <p:nvPr/>
+        </p:nvSpPr>
+        <p:spPr>
+          <a:xfrm>
+            <a:off x="640080" y="4041648"/>
+            <a:ext cx="1463040" cy="420624"/>
+          </a:xfrm>
+          <a:prstGeom prst="rect">
+            <a:avLst/>
+          </a:prstGeom>
+          <a:noFill/>
+          <a:ln/>
+        </p:spPr>
+        <p:txBody>
+          <a:bodyPr wrap="square" lIns="0" tIns="0" rIns="0" bIns="0" rtlCol="0" anchor="ctr"/>
+          <a:lstStyle/>
+          <a:p>
+            <a:pPr algn="ctr" indent="0" marL="0">
+              <a:buNone/>
+            </a:pPr>
+            <a:r>
+              <a:rPr lang="en-US" sz="1300" b="1" dirty="0">
+                <a:solidFill>
+                  <a:srgbClr val="4C1D95"/>
+                </a:solidFill>
+                <a:latin typeface="Trebuchet MS" pitchFamily="34" charset="0"/>
+                <a:ea typeface="Trebuchet MS" pitchFamily="34" charset="-122"/>
+                <a:cs typeface="Trebuchet MS" pitchFamily="34" charset="-120"/>
+              </a:rPr>
+              <a:t>sub-</a:t>
+            </a:r>
+            <a:endParaRPr lang="en-US" sz="1300" dirty="0"/>
+          </a:p>
+        </p:txBody>
+      </p:sp>
+      <p:sp>
+        <p:nvSpPr>
+          <p:cNvPr id="45" name="Shape 43"/>
+          <p:cNvSpPr/>
+          <p:nvPr/>
+        </p:nvSpPr>
+        <p:spPr>
+          <a:xfrm>
+            <a:off x="3291840" y="4041648"/>
+            <a:ext cx="1645920" cy="420624"/>
+          </a:xfrm>
+          <a:prstGeom prst="rect">
+            <a:avLst/>
+          </a:prstGeom>
+          <a:solidFill>
+            <a:srgbClr val="F1F5F9"/>
+          </a:solidFill>
+          <a:ln w="12700">
+            <a:solidFill>
+              <a:srgbClr val="E5E7EB"/>
+            </a:solidFill>
+            <a:prstDash val="solid"/>
+          </a:ln>
+        </p:spPr>
+      </p:sp>
+      <p:sp>
+        <p:nvSpPr>
+          <p:cNvPr id="46" name="Shape 44"/>
+          <p:cNvSpPr/>
+          <p:nvPr/>
+        </p:nvSpPr>
+        <p:spPr>
+          <a:xfrm>
+            <a:off x="5943600" y="4041648"/>
+            <a:ext cx="1463040" cy="420624"/>
+          </a:xfrm>
+          <a:prstGeom prst="rect">
+            <a:avLst/>
+          </a:prstGeom>
+          <a:solidFill>
+            <a:srgbClr val="F1F5F9"/>
+          </a:solidFill>
+          <a:ln w="12700">
+            <a:solidFill>
+              <a:srgbClr val="E5E7EB"/>
+            </a:solidFill>
+            <a:prstDash val="solid"/>
+          </a:ln>
+        </p:spPr>
+      </p:sp>
+      <p:sp>
+        <p:nvSpPr>
+          <p:cNvPr id="47" name="Text 45"/>
+          <p:cNvSpPr/>
+          <p:nvPr/>
+        </p:nvSpPr>
+        <p:spPr>
+          <a:xfrm>
+            <a:off x="365760" y="4636008"/>
             <a:ext cx="1097280" cy="420624"/>
           </a:xfrm>
           <a:prstGeom prst="rect">
@@ -41453,13 +43620,13 @@
       </p:sp>
       <p:sp>
         <p:nvSpPr>
-          <p:cNvPr id="44" name="Shape 42"/>
-          <p:cNvSpPr/>
-          <p:nvPr/>
-        </p:nvSpPr>
-        <p:spPr>
-          <a:xfrm>
-            <a:off x="1508760" y="4178808"/>
+          <p:cNvPr id="48" name="Shape 46"/>
+          <p:cNvSpPr/>
+          <p:nvPr/>
+        </p:nvSpPr>
+        <p:spPr>
+          <a:xfrm>
+            <a:off x="1508760" y="4636008"/>
             <a:ext cx="822960" cy="420624"/>
           </a:xfrm>
           <a:prstGeom prst="rect">
@@ -41487,13 +43654,13 @@
       </p:sp>
       <p:sp>
         <p:nvSpPr>
-          <p:cNvPr id="45" name="Text 43"/>
-          <p:cNvSpPr/>
-          <p:nvPr/>
-        </p:nvSpPr>
-        <p:spPr>
-          <a:xfrm>
-            <a:off x="1508760" y="4178808"/>
+          <p:cNvPr id="49" name="Text 47"/>
+          <p:cNvSpPr/>
+          <p:nvPr/>
+        </p:nvSpPr>
+        <p:spPr>
+          <a:xfrm>
+            <a:off x="1508760" y="4636008"/>
             <a:ext cx="822960" cy="420624"/>
           </a:xfrm>
           <a:prstGeom prst="rect">
@@ -41526,13 +43693,13 @@
       </p:sp>
       <p:sp>
         <p:nvSpPr>
-          <p:cNvPr id="46" name="Text 44"/>
-          <p:cNvSpPr/>
-          <p:nvPr/>
-        </p:nvSpPr>
-        <p:spPr>
-          <a:xfrm>
-            <a:off x="2359152" y="4178808"/>
+          <p:cNvPr id="50" name="Text 48"/>
+          <p:cNvSpPr/>
+          <p:nvPr/>
+        </p:nvSpPr>
+        <p:spPr>
+          <a:xfrm>
+            <a:off x="2359152" y="4636008"/>
             <a:ext cx="320040" cy="420624"/>
           </a:xfrm>
           <a:prstGeom prst="rect">
@@ -41565,13 +43732,13 @@
       </p:sp>
       <p:sp>
         <p:nvSpPr>
-          <p:cNvPr id="47" name="Shape 45"/>
-          <p:cNvSpPr/>
-          <p:nvPr/>
-        </p:nvSpPr>
-        <p:spPr>
-          <a:xfrm>
-            <a:off x="2706624" y="4178808"/>
+          <p:cNvPr id="51" name="Shape 49"/>
+          <p:cNvSpPr/>
+          <p:nvPr/>
+        </p:nvSpPr>
+        <p:spPr>
+          <a:xfrm>
+            <a:off x="2706624" y="4636008"/>
             <a:ext cx="1243584" cy="420624"/>
           </a:xfrm>
           <a:prstGeom prst="rect">
@@ -41599,13 +43766,13 @@
       </p:sp>
       <p:sp>
         <p:nvSpPr>
-          <p:cNvPr id="48" name="Text 46"/>
-          <p:cNvSpPr/>
-          <p:nvPr/>
-        </p:nvSpPr>
-        <p:spPr>
-          <a:xfrm>
-            <a:off x="2706624" y="4178808"/>
+          <p:cNvPr id="52" name="Text 50"/>
+          <p:cNvSpPr/>
+          <p:nvPr/>
+        </p:nvSpPr>
+        <p:spPr>
+          <a:xfrm>
+            <a:off x="2706624" y="4636008"/>
             <a:ext cx="1243584" cy="420624"/>
           </a:xfrm>
           <a:prstGeom prst="rect">
@@ -41638,13 +43805,13 @@
       </p:sp>
       <p:sp>
         <p:nvSpPr>
-          <p:cNvPr id="49" name="Text 47"/>
-          <p:cNvSpPr/>
-          <p:nvPr/>
-        </p:nvSpPr>
-        <p:spPr>
-          <a:xfrm>
-            <a:off x="3977640" y="4178808"/>
+          <p:cNvPr id="53" name="Text 51"/>
+          <p:cNvSpPr/>
+          <p:nvPr/>
+        </p:nvSpPr>
+        <p:spPr>
+          <a:xfrm>
+            <a:off x="3977640" y="4636008"/>
             <a:ext cx="320040" cy="420624"/>
           </a:xfrm>
           <a:prstGeom prst="rect">
@@ -41677,13 +43844,13 @@
       </p:sp>
       <p:sp>
         <p:nvSpPr>
-          <p:cNvPr id="50" name="Shape 48"/>
-          <p:cNvSpPr/>
-          <p:nvPr/>
-        </p:nvSpPr>
-        <p:spPr>
-          <a:xfrm>
-            <a:off x="4325112" y="4178808"/>
+          <p:cNvPr id="54" name="Shape 52"/>
+          <p:cNvSpPr/>
+          <p:nvPr/>
+        </p:nvSpPr>
+        <p:spPr>
+          <a:xfrm>
+            <a:off x="4325112" y="4636008"/>
             <a:ext cx="950976" cy="420624"/>
           </a:xfrm>
           <a:prstGeom prst="rect">
@@ -41711,13 +43878,13 @@
       </p:sp>
       <p:sp>
         <p:nvSpPr>
-          <p:cNvPr id="51" name="Text 49"/>
-          <p:cNvSpPr/>
-          <p:nvPr/>
-        </p:nvSpPr>
-        <p:spPr>
-          <a:xfrm>
-            <a:off x="4325112" y="4178808"/>
+          <p:cNvPr id="55" name="Text 53"/>
+          <p:cNvSpPr/>
+          <p:nvPr/>
+        </p:nvSpPr>
+        <p:spPr>
+          <a:xfrm>
+            <a:off x="4325112" y="4636008"/>
             <a:ext cx="950976" cy="420624"/>
           </a:xfrm>
           <a:prstGeom prst="rect">
@@ -41750,13 +43917,13 @@
       </p:sp>
       <p:sp>
         <p:nvSpPr>
-          <p:cNvPr id="52" name="Text 50"/>
-          <p:cNvSpPr/>
-          <p:nvPr/>
-        </p:nvSpPr>
-        <p:spPr>
-          <a:xfrm>
-            <a:off x="5349240" y="4178808"/>
+          <p:cNvPr id="56" name="Text 54"/>
+          <p:cNvSpPr/>
+          <p:nvPr/>
+        </p:nvSpPr>
+        <p:spPr>
+          <a:xfrm>
+            <a:off x="5349240" y="4636008"/>
             <a:ext cx="365760" cy="420624"/>
           </a:xfrm>
           <a:prstGeom prst="rect">
@@ -41789,13 +43956,13 @@
       </p:sp>
       <p:sp>
         <p:nvSpPr>
-          <p:cNvPr id="53" name="Shape 51"/>
-          <p:cNvSpPr/>
-          <p:nvPr/>
-        </p:nvSpPr>
-        <p:spPr>
-          <a:xfrm>
-            <a:off x="5760720" y="4178808"/>
+          <p:cNvPr id="57" name="Shape 55"/>
+          <p:cNvSpPr/>
+          <p:nvPr/>
+        </p:nvSpPr>
+        <p:spPr>
+          <a:xfrm>
+            <a:off x="5760720" y="4636008"/>
             <a:ext cx="2194560" cy="420624"/>
           </a:xfrm>
           <a:prstGeom prst="rect">
@@ -41816,13 +43983,13 @@
       </p:sp>
       <p:sp>
         <p:nvSpPr>
-          <p:cNvPr id="54" name="Text 52"/>
-          <p:cNvSpPr/>
-          <p:nvPr/>
-        </p:nvSpPr>
-        <p:spPr>
-          <a:xfrm>
-            <a:off x="5760720" y="4178808"/>
+          <p:cNvPr id="58" name="Text 56"/>
+          <p:cNvSpPr/>
+          <p:nvPr/>
+        </p:nvSpPr>
+        <p:spPr>
+          <a:xfrm>
+            <a:off x="5760720" y="4636008"/>
             <a:ext cx="2194560" cy="420624"/>
           </a:xfrm>
           <a:prstGeom prst="rect">
@@ -41847,7 +44014,7 @@
                 <a:ea typeface="Trebuchet MS" pitchFamily="34" charset="-122"/>
                 <a:cs typeface="Trebuchet MS" pitchFamily="34" charset="-120"/>
               </a:rPr>
-              <a:t>mission</a:t>
+              <a:t>miss</a:t>
             </a:r>
             <a:endParaRPr lang="en-US" sz="1400" dirty="0"/>
           </a:p>
@@ -42139,7 +44306,7 @@
                 <a:ea typeface="Calibri" pitchFamily="34" charset="-122"/>
                 <a:cs typeface="Calibri" pitchFamily="34" charset="-120"/>
               </a:rPr>
-              <a:t>Word Labs  •  wordlabs.app  •  Root: 'miss' = send, let go, release</a:t>
+              <a:t>Word Labs  •  wordlabs.app  •  Root: 'miss' = send</a:t>
             </a:r>
             <a:endParaRPr lang="en-US" sz="800" dirty="0"/>
           </a:p>
@@ -42251,7 +44418,7 @@
                 <a:ea typeface="Trebuchet MS" pitchFamily="34" charset="-122"/>
                 <a:cs typeface="Trebuchet MS" pitchFamily="34" charset="-120"/>
               </a:rPr>
-              <a:t>mission</a:t>
+              <a:t>miss</a:t>
             </a:r>
             <a:endParaRPr lang="en-US" sz="1200" dirty="0"/>
           </a:p>
@@ -42317,7 +44484,7 @@
                 <a:ea typeface="Calibri" pitchFamily="34" charset="-122"/>
                 <a:cs typeface="Calibri" pitchFamily="34" charset="-120"/>
               </a:rPr>
-              <a:t>An object that is launched through the air and sent towards a target.</a:t>
+              <a:t>an important task or job someone is sent to do</a:t>
             </a:r>
             <a:endParaRPr lang="en-US" sz="1200" dirty="0"/>
           </a:p>
@@ -42390,7 +44557,7 @@
                 <a:ea typeface="Trebuchet MS" pitchFamily="34" charset="-122"/>
                 <a:cs typeface="Trebuchet MS" pitchFamily="34" charset="-120"/>
               </a:rPr>
-              <a:t>dismiss</a:t>
+              <a:t>missed</a:t>
             </a:r>
             <a:endParaRPr lang="en-US" sz="1200" dirty="0"/>
           </a:p>
@@ -42456,7 +44623,7 @@
                 <a:ea typeface="Calibri" pitchFamily="34" charset="-122"/>
                 <a:cs typeface="Calibri" pitchFamily="34" charset="-120"/>
               </a:rPr>
-              <a:t>Being allowed to enter a place, like a cinema or school.</a:t>
+              <a:t>careless or failing to do something you should have done</a:t>
             </a:r>
             <a:endParaRPr lang="en-US" sz="1200" dirty="0"/>
           </a:p>
@@ -42529,7 +44696,7 @@
                 <a:ea typeface="Trebuchet MS" pitchFamily="34" charset="-122"/>
                 <a:cs typeface="Trebuchet MS" pitchFamily="34" charset="-120"/>
               </a:rPr>
-              <a:t>permission</a:t>
+              <a:t>misses</a:t>
             </a:r>
             <a:endParaRPr lang="en-US" sz="1200" dirty="0"/>
           </a:p>
@@ -42595,7 +44762,7 @@
                 <a:ea typeface="Calibri" pitchFamily="34" charset="-122"/>
                 <a:cs typeface="Calibri" pitchFamily="34" charset="-120"/>
               </a:rPr>
-              <a:t>Handing in work or sending something to someone for them to look at.</a:t>
+              <a:t>to send someone away or refuse to consider something seriously</a:t>
             </a:r>
             <a:endParaRPr lang="en-US" sz="1200" dirty="0"/>
           </a:p>
@@ -42668,7 +44835,7 @@
                 <a:ea typeface="Trebuchet MS" pitchFamily="34" charset="-122"/>
                 <a:cs typeface="Trebuchet MS" pitchFamily="34" charset="-120"/>
               </a:rPr>
-              <a:t>admission</a:t>
+              <a:t>remiss</a:t>
             </a:r>
             <a:endParaRPr lang="en-US" sz="1200" dirty="0"/>
           </a:p>
@@ -42734,7 +44901,7 @@
                 <a:ea typeface="Calibri" pitchFamily="34" charset="-122"/>
                 <a:cs typeface="Calibri" pitchFamily="34" charset="-120"/>
               </a:rPr>
-              <a:t>Being allowed to do something by someone in charge.</a:t>
+              <a:t>fails to hit, catch, or reach something</a:t>
             </a:r>
             <a:endParaRPr lang="en-US" sz="1200" dirty="0"/>
           </a:p>
@@ -42807,7 +44974,7 @@
                 <a:ea typeface="Trebuchet MS" pitchFamily="34" charset="-122"/>
                 <a:cs typeface="Trebuchet MS" pitchFamily="34" charset="-120"/>
               </a:rPr>
-              <a:t>submission</a:t>
+              <a:t>dismiss</a:t>
             </a:r>
             <a:endParaRPr lang="en-US" sz="1200" dirty="0"/>
           </a:p>
@@ -42873,7 +45040,7 @@
                 <a:ea typeface="Calibri" pitchFamily="34" charset="-122"/>
                 <a:cs typeface="Calibri" pitchFamily="34" charset="-120"/>
               </a:rPr>
-              <a:t>A person who is officially put in charge of an important area or department.</a:t>
+              <a:t>not present where it should be; lost</a:t>
             </a:r>
             <a:endParaRPr lang="en-US" sz="1200" dirty="0"/>
           </a:p>
@@ -42946,7 +45113,7 @@
                 <a:ea typeface="Trebuchet MS" pitchFamily="34" charset="-122"/>
                 <a:cs typeface="Trebuchet MS" pitchFamily="34" charset="-120"/>
               </a:rPr>
-              <a:t>commissioner</a:t>
+              <a:t>missing</a:t>
             </a:r>
             <a:endParaRPr lang="en-US" sz="1200" dirty="0"/>
           </a:p>
@@ -43012,7 +45179,7 @@
                 <a:ea typeface="Calibri" pitchFamily="34" charset="-122"/>
                 <a:cs typeface="Calibri" pitchFamily="34" charset="-120"/>
               </a:rPr>
-              <a:t>An important job or task that someone is sent to do.</a:t>
+              <a:t>to feel sad because someone or something you like is not there</a:t>
             </a:r>
             <a:endParaRPr lang="en-US" sz="1200" dirty="0"/>
           </a:p>
@@ -43085,7 +45252,7 @@
                 <a:ea typeface="Trebuchet MS" pitchFamily="34" charset="-122"/>
                 <a:cs typeface="Trebuchet MS" pitchFamily="34" charset="-120"/>
               </a:rPr>
-              <a:t>missile</a:t>
+              <a:t>mission</a:t>
             </a:r>
             <a:endParaRPr lang="en-US" sz="1200" dirty="0"/>
           </a:p>
@@ -43151,7 +45318,7 @@
                 <a:ea typeface="Calibri" pitchFamily="34" charset="-122"/>
                 <a:cs typeface="Calibri" pitchFamily="34" charset="-120"/>
               </a:rPr>
-              <a:t>To send someone away or tell a group they are free to go.</a:t>
+              <a:t>felt sad because someone or something you like was not there</a:t>
             </a:r>
             <a:endParaRPr lang="en-US" sz="1200" dirty="0"/>
           </a:p>
@@ -43443,7 +45610,7 @@
                 <a:ea typeface="Calibri" pitchFamily="34" charset="-122"/>
                 <a:cs typeface="Calibri" pitchFamily="34" charset="-120"/>
               </a:rPr>
-              <a:t>Word Labs  •  wordlabs.app  •  Root: 'miss' = send, let go, release</a:t>
+              <a:t>Word Labs  •  wordlabs.app  •  Root: 'miss' = send</a:t>
             </a:r>
             <a:endParaRPr lang="en-US" sz="800" dirty="0"/>
           </a:p>
@@ -43646,7 +45813,7 @@
                 <a:ea typeface="Calibri" pitchFamily="34" charset="-122"/>
                 <a:cs typeface="Calibri" pitchFamily="34" charset="-120"/>
               </a:rPr>
-              <a:t>The astronauts completed their mission and returned safely to Earth.</a:t>
+              <a:t>She will miss her best friend during the school holidays.</a:t>
             </a:r>
             <a:endParaRPr lang="en-US" sz="1500" dirty="0"/>
           </a:p>
@@ -43810,7 +45977,7 @@
                 <a:ea typeface="Calibri" pitchFamily="34" charset="-122"/>
                 <a:cs typeface="Calibri" pitchFamily="34" charset="-120"/>
               </a:rPr>
-              <a:t>The teacher gave the class permission to work outside in the sunshine.</a:t>
+              <a:t>He missed his family while he was away at camp.</a:t>
             </a:r>
             <a:endParaRPr lang="en-US" sz="1500" dirty="0"/>
           </a:p>
@@ -43974,7 +46141,7 @@
                 <a:ea typeface="Calibri" pitchFamily="34" charset="-122"/>
                 <a:cs typeface="Calibri" pitchFamily="34" charset="-120"/>
               </a:rPr>
-              <a:t>The students had to hand in their submission before Friday afternoon.</a:t>
+              <a:t>She misses the target every time she throws the dart.</a:t>
             </a:r>
             <a:endParaRPr lang="en-US" sz="1500" dirty="0"/>
           </a:p>
